--- a/src/from_model/fig/model.pptx
+++ b/src/from_model/fig/model.pptx
@@ -116,8 +116,7 @@
 <file path=ppt/revisionInfo.xml><?xml version="1.0" encoding="utf-8"?>
 <p1510:revInfo xmlns:a="http://schemas.openxmlformats.org/drawingml/2006/main" xmlns:r="http://schemas.openxmlformats.org/officeDocument/2006/relationships" xmlns:p1510="http://schemas.microsoft.com/office/powerpoint/2015/10/main">
   <p1510:revLst>
-    <p1510:client id="{A769DFB0-DDBA-4BBA-A9E9-53B3513C4E3E}" v="308" dt="2025-02-26T02:57:42.177"/>
-    <p1510:client id="{C9303CD7-D17E-4514-AC6E-4EFA4FDCDEDB}" v="73" dt="2025-02-25T19:07:14.128"/>
+    <p1510:client id="{C9303CD7-D17E-4514-AC6E-4EFA4FDCDEDB}" v="95" dt="2025-02-28T00:32:34.577"/>
   </p1510:revLst>
 </p1510:revInfo>
 </file>
@@ -137,36 +136,12 @@
           <pc:docMk/>
           <pc:sldMk cId="340494126" sldId="257"/>
         </pc:sldMkLst>
-        <pc:spChg chg="add del mod">
-          <ac:chgData name="Hou, Bowen" userId="cbd36780-c17d-4782-a6cd-6dd8a1dcdc2c" providerId="ADAL" clId="{A769DFB0-DDBA-4BBA-A9E9-53B3513C4E3E}" dt="2025-02-26T00:58:05.594" v="219" actId="478"/>
-          <ac:spMkLst>
-            <pc:docMk/>
-            <pc:sldMk cId="340494126" sldId="257"/>
-            <ac:spMk id="14" creationId="{B0D828EF-6EBB-222B-2FB5-3EC8B72B0911}"/>
-          </ac:spMkLst>
-        </pc:spChg>
-        <pc:spChg chg="mod">
-          <ac:chgData name="Hou, Bowen" userId="cbd36780-c17d-4782-a6cd-6dd8a1dcdc2c" providerId="ADAL" clId="{A769DFB0-DDBA-4BBA-A9E9-53B3513C4E3E}" dt="2025-02-26T00:51:28.676" v="90" actId="571"/>
-          <ac:spMkLst>
-            <pc:docMk/>
-            <pc:sldMk cId="340494126" sldId="257"/>
-            <ac:spMk id="19" creationId="{68F75377-9C00-19D8-C439-AABE609EE417}"/>
-          </ac:spMkLst>
-        </pc:spChg>
         <pc:spChg chg="mod ord topLvl">
           <ac:chgData name="Hou, Bowen" userId="cbd36780-c17d-4782-a6cd-6dd8a1dcdc2c" providerId="ADAL" clId="{A769DFB0-DDBA-4BBA-A9E9-53B3513C4E3E}" dt="2025-02-26T01:58:37.284" v="1447" actId="1076"/>
           <ac:spMkLst>
             <pc:docMk/>
             <pc:sldMk cId="340494126" sldId="257"/>
             <ac:spMk id="20" creationId="{09B1C4CE-6F10-2E31-CB69-8E176A010D34}"/>
-          </ac:spMkLst>
-        </pc:spChg>
-        <pc:spChg chg="mod">
-          <ac:chgData name="Hou, Bowen" userId="cbd36780-c17d-4782-a6cd-6dd8a1dcdc2c" providerId="ADAL" clId="{A769DFB0-DDBA-4BBA-A9E9-53B3513C4E3E}" dt="2025-02-26T00:51:28.676" v="90" actId="571"/>
-          <ac:spMkLst>
-            <pc:docMk/>
-            <pc:sldMk cId="340494126" sldId="257"/>
-            <ac:spMk id="21" creationId="{1088B338-A9E1-1075-8D5B-7E936E996942}"/>
           </ac:spMkLst>
         </pc:spChg>
         <pc:spChg chg="mod">
@@ -194,14 +169,6 @@
           </ac:spMkLst>
         </pc:spChg>
         <pc:spChg chg="mod">
-          <ac:chgData name="Hou, Bowen" userId="cbd36780-c17d-4782-a6cd-6dd8a1dcdc2c" providerId="ADAL" clId="{A769DFB0-DDBA-4BBA-A9E9-53B3513C4E3E}" dt="2025-02-26T00:51:28.676" v="90" actId="571"/>
-          <ac:spMkLst>
-            <pc:docMk/>
-            <pc:sldMk cId="340494126" sldId="257"/>
-            <ac:spMk id="26" creationId="{E057D616-484F-9549-1402-6C920977BA4A}"/>
-          </ac:spMkLst>
-        </pc:spChg>
-        <pc:spChg chg="mod">
           <ac:chgData name="Hou, Bowen" userId="cbd36780-c17d-4782-a6cd-6dd8a1dcdc2c" providerId="ADAL" clId="{A769DFB0-DDBA-4BBA-A9E9-53B3513C4E3E}" dt="2025-02-26T02:21:56.950" v="1835" actId="20577"/>
           <ac:spMkLst>
             <pc:docMk/>
@@ -217,52 +184,12 @@
             <ac:spMk id="29" creationId="{F9241C23-D731-835C-E63E-C707888B2DED}"/>
           </ac:spMkLst>
         </pc:spChg>
-        <pc:spChg chg="mod">
-          <ac:chgData name="Hou, Bowen" userId="cbd36780-c17d-4782-a6cd-6dd8a1dcdc2c" providerId="ADAL" clId="{A769DFB0-DDBA-4BBA-A9E9-53B3513C4E3E}" dt="2025-02-26T00:51:28.676" v="90" actId="571"/>
-          <ac:spMkLst>
-            <pc:docMk/>
-            <pc:sldMk cId="340494126" sldId="257"/>
-            <ac:spMk id="31" creationId="{9FCF3843-D522-98F3-F5EE-6E1FE5AAE3C3}"/>
-          </ac:spMkLst>
-        </pc:spChg>
-        <pc:spChg chg="mod">
-          <ac:chgData name="Hou, Bowen" userId="cbd36780-c17d-4782-a6cd-6dd8a1dcdc2c" providerId="ADAL" clId="{A769DFB0-DDBA-4BBA-A9E9-53B3513C4E3E}" dt="2025-02-26T00:51:28.676" v="90" actId="571"/>
-          <ac:spMkLst>
-            <pc:docMk/>
-            <pc:sldMk cId="340494126" sldId="257"/>
-            <ac:spMk id="32" creationId="{BA2CB62A-8B86-D08F-D889-28C442F25FF0}"/>
-          </ac:spMkLst>
-        </pc:spChg>
-        <pc:spChg chg="del mod ord topLvl">
-          <ac:chgData name="Hou, Bowen" userId="cbd36780-c17d-4782-a6cd-6dd8a1dcdc2c" providerId="ADAL" clId="{A769DFB0-DDBA-4BBA-A9E9-53B3513C4E3E}" dt="2025-02-26T01:45:07.840" v="1274" actId="478"/>
-          <ac:spMkLst>
-            <pc:docMk/>
-            <pc:sldMk cId="340494126" sldId="257"/>
-            <ac:spMk id="43" creationId="{1360BA30-5BF2-11B9-39AE-576E3A2EA90A}"/>
-          </ac:spMkLst>
-        </pc:spChg>
         <pc:spChg chg="mod topLvl">
           <ac:chgData name="Hou, Bowen" userId="cbd36780-c17d-4782-a6cd-6dd8a1dcdc2c" providerId="ADAL" clId="{A769DFB0-DDBA-4BBA-A9E9-53B3513C4E3E}" dt="2025-02-26T01:58:00.713" v="1434" actId="1038"/>
           <ac:spMkLst>
             <pc:docMk/>
             <pc:sldMk cId="340494126" sldId="257"/>
             <ac:spMk id="46" creationId="{5CD321E6-6270-0EE4-F772-5FF9EDA84ABF}"/>
-          </ac:spMkLst>
-        </pc:spChg>
-        <pc:spChg chg="mod">
-          <ac:chgData name="Hou, Bowen" userId="cbd36780-c17d-4782-a6cd-6dd8a1dcdc2c" providerId="ADAL" clId="{A769DFB0-DDBA-4BBA-A9E9-53B3513C4E3E}" dt="2025-02-26T00:51:28.676" v="90" actId="571"/>
-          <ac:spMkLst>
-            <pc:docMk/>
-            <pc:sldMk cId="340494126" sldId="257"/>
-            <ac:spMk id="47" creationId="{21013571-2ED6-D12D-A762-57B8D9855B27}"/>
-          </ac:spMkLst>
-        </pc:spChg>
-        <pc:spChg chg="mod topLvl">
-          <ac:chgData name="Hou, Bowen" userId="cbd36780-c17d-4782-a6cd-6dd8a1dcdc2c" providerId="ADAL" clId="{A769DFB0-DDBA-4BBA-A9E9-53B3513C4E3E}" dt="2025-02-26T01:32:50.502" v="1171" actId="207"/>
-          <ac:spMkLst>
-            <pc:docMk/>
-            <pc:sldMk cId="340494126" sldId="257"/>
-            <ac:spMk id="49" creationId="{61752C14-1C2A-4D71-9066-1B79C9CA6254}"/>
           </ac:spMkLst>
         </pc:spChg>
         <pc:spChg chg="mod">
@@ -289,324 +216,12 @@
             <ac:spMk id="55" creationId="{98A5F899-C69E-82FF-B84D-98A10D8FF88C}"/>
           </ac:spMkLst>
         </pc:spChg>
-        <pc:spChg chg="del mod">
-          <ac:chgData name="Hou, Bowen" userId="cbd36780-c17d-4782-a6cd-6dd8a1dcdc2c" providerId="ADAL" clId="{A769DFB0-DDBA-4BBA-A9E9-53B3513C4E3E}" dt="2025-02-26T00:54:23.554" v="151" actId="478"/>
-          <ac:spMkLst>
-            <pc:docMk/>
-            <pc:sldMk cId="340494126" sldId="257"/>
-            <ac:spMk id="56" creationId="{E8021E42-ECC1-F546-6898-CBA1AA1BE632}"/>
-          </ac:spMkLst>
-        </pc:spChg>
-        <pc:spChg chg="mod">
-          <ac:chgData name="Hou, Bowen" userId="cbd36780-c17d-4782-a6cd-6dd8a1dcdc2c" providerId="ADAL" clId="{A769DFB0-DDBA-4BBA-A9E9-53B3513C4E3E}" dt="2025-02-26T00:51:28.676" v="90" actId="571"/>
-          <ac:spMkLst>
-            <pc:docMk/>
-            <pc:sldMk cId="340494126" sldId="257"/>
-            <ac:spMk id="61" creationId="{624E4D19-25F3-8921-4C9D-6CEB9E67C772}"/>
-          </ac:spMkLst>
-        </pc:spChg>
-        <pc:spChg chg="del mod">
-          <ac:chgData name="Hou, Bowen" userId="cbd36780-c17d-4782-a6cd-6dd8a1dcdc2c" providerId="ADAL" clId="{A769DFB0-DDBA-4BBA-A9E9-53B3513C4E3E}" dt="2025-02-26T01:22:50.007" v="872" actId="478"/>
-          <ac:spMkLst>
-            <pc:docMk/>
-            <pc:sldMk cId="340494126" sldId="257"/>
-            <ac:spMk id="66" creationId="{297CA310-143A-B7FF-4E19-45A5184C2590}"/>
-          </ac:spMkLst>
-        </pc:spChg>
-        <pc:spChg chg="mod">
-          <ac:chgData name="Hou, Bowen" userId="cbd36780-c17d-4782-a6cd-6dd8a1dcdc2c" providerId="ADAL" clId="{A769DFB0-DDBA-4BBA-A9E9-53B3513C4E3E}" dt="2025-02-26T01:20:07.992" v="827" actId="207"/>
-          <ac:spMkLst>
-            <pc:docMk/>
-            <pc:sldMk cId="340494126" sldId="257"/>
-            <ac:spMk id="69" creationId="{28FB4922-107F-D00A-74A1-E92D062BE97C}"/>
-          </ac:spMkLst>
-        </pc:spChg>
-        <pc:spChg chg="del mod">
-          <ac:chgData name="Hou, Bowen" userId="cbd36780-c17d-4782-a6cd-6dd8a1dcdc2c" providerId="ADAL" clId="{A769DFB0-DDBA-4BBA-A9E9-53B3513C4E3E}" dt="2025-02-26T01:18:58.645" v="802" actId="478"/>
-          <ac:spMkLst>
-            <pc:docMk/>
-            <pc:sldMk cId="340494126" sldId="257"/>
-            <ac:spMk id="70" creationId="{B6C5BC15-3976-FF79-55DA-D4185937DFBC}"/>
-          </ac:spMkLst>
-        </pc:spChg>
-        <pc:spChg chg="mod">
-          <ac:chgData name="Hou, Bowen" userId="cbd36780-c17d-4782-a6cd-6dd8a1dcdc2c" providerId="ADAL" clId="{A769DFB0-DDBA-4BBA-A9E9-53B3513C4E3E}" dt="2025-02-26T01:20:07.992" v="827" actId="207"/>
-          <ac:spMkLst>
-            <pc:docMk/>
-            <pc:sldMk cId="340494126" sldId="257"/>
-            <ac:spMk id="71" creationId="{AC9FCE48-816C-051F-78D9-4B5541DB3156}"/>
-          </ac:spMkLst>
-        </pc:spChg>
-        <pc:spChg chg="mod">
-          <ac:chgData name="Hou, Bowen" userId="cbd36780-c17d-4782-a6cd-6dd8a1dcdc2c" providerId="ADAL" clId="{A769DFB0-DDBA-4BBA-A9E9-53B3513C4E3E}" dt="2025-02-26T01:20:07.992" v="827" actId="207"/>
-          <ac:spMkLst>
-            <pc:docMk/>
-            <pc:sldMk cId="340494126" sldId="257"/>
-            <ac:spMk id="72" creationId="{F60117F7-0495-E635-CADD-8EDAC6A5AF1C}"/>
-          </ac:spMkLst>
-        </pc:spChg>
-        <pc:spChg chg="add mod">
-          <ac:chgData name="Hou, Bowen" userId="cbd36780-c17d-4782-a6cd-6dd8a1dcdc2c" providerId="ADAL" clId="{A769DFB0-DDBA-4BBA-A9E9-53B3513C4E3E}" dt="2025-02-26T01:23:00.917" v="889" actId="1035"/>
-          <ac:spMkLst>
-            <pc:docMk/>
-            <pc:sldMk cId="340494126" sldId="257"/>
-            <ac:spMk id="73" creationId="{68238376-71B6-7CEC-C76B-AC9E2346B039}"/>
-          </ac:spMkLst>
-        </pc:spChg>
-        <pc:spChg chg="del mod">
-          <ac:chgData name="Hou, Bowen" userId="cbd36780-c17d-4782-a6cd-6dd8a1dcdc2c" providerId="ADAL" clId="{A769DFB0-DDBA-4BBA-A9E9-53B3513C4E3E}" dt="2025-02-26T01:22:47.248" v="871" actId="478"/>
-          <ac:spMkLst>
-            <pc:docMk/>
-            <pc:sldMk cId="340494126" sldId="257"/>
-            <ac:spMk id="76" creationId="{E2874E62-2B85-F9FD-C554-243361015859}"/>
-          </ac:spMkLst>
-        </pc:spChg>
-        <pc:spChg chg="mod">
-          <ac:chgData name="Hou, Bowen" userId="cbd36780-c17d-4782-a6cd-6dd8a1dcdc2c" providerId="ADAL" clId="{A769DFB0-DDBA-4BBA-A9E9-53B3513C4E3E}" dt="2025-02-26T01:18:53.594" v="800"/>
-          <ac:spMkLst>
-            <pc:docMk/>
-            <pc:sldMk cId="340494126" sldId="257"/>
-            <ac:spMk id="79" creationId="{862BF77E-E3A4-6F55-72B7-F1FFF343BE77}"/>
-          </ac:spMkLst>
-        </pc:spChg>
-        <pc:spChg chg="del mod">
-          <ac:chgData name="Hou, Bowen" userId="cbd36780-c17d-4782-a6cd-6dd8a1dcdc2c" providerId="ADAL" clId="{A769DFB0-DDBA-4BBA-A9E9-53B3513C4E3E}" dt="2025-02-26T01:19:00.041" v="803" actId="478"/>
-          <ac:spMkLst>
-            <pc:docMk/>
-            <pc:sldMk cId="340494126" sldId="257"/>
-            <ac:spMk id="80" creationId="{66D73311-B936-A930-1569-2E0910F393F5}"/>
-          </ac:spMkLst>
-        </pc:spChg>
-        <pc:spChg chg="mod">
-          <ac:chgData name="Hou, Bowen" userId="cbd36780-c17d-4782-a6cd-6dd8a1dcdc2c" providerId="ADAL" clId="{A769DFB0-DDBA-4BBA-A9E9-53B3513C4E3E}" dt="2025-02-26T01:18:53.594" v="800"/>
-          <ac:spMkLst>
-            <pc:docMk/>
-            <pc:sldMk cId="340494126" sldId="257"/>
-            <ac:spMk id="81" creationId="{0303B653-16BE-37BF-1A76-BD10715957F5}"/>
-          </ac:spMkLst>
-        </pc:spChg>
-        <pc:spChg chg="mod">
-          <ac:chgData name="Hou, Bowen" userId="cbd36780-c17d-4782-a6cd-6dd8a1dcdc2c" providerId="ADAL" clId="{A769DFB0-DDBA-4BBA-A9E9-53B3513C4E3E}" dt="2025-02-26T01:18:53.594" v="800"/>
-          <ac:spMkLst>
-            <pc:docMk/>
-            <pc:sldMk cId="340494126" sldId="257"/>
-            <ac:spMk id="82" creationId="{6943FAEF-9C5A-FD94-1469-BC8698B6490E}"/>
-          </ac:spMkLst>
-        </pc:spChg>
-        <pc:spChg chg="add mod">
-          <ac:chgData name="Hou, Bowen" userId="cbd36780-c17d-4782-a6cd-6dd8a1dcdc2c" providerId="ADAL" clId="{A769DFB0-DDBA-4BBA-A9E9-53B3513C4E3E}" dt="2025-02-26T01:31:43.126" v="1165" actId="207"/>
-          <ac:spMkLst>
-            <pc:docMk/>
-            <pc:sldMk cId="340494126" sldId="257"/>
-            <ac:spMk id="83" creationId="{7D431DA5-A1FE-3541-B6C6-4D9D3D68C0FA}"/>
-          </ac:spMkLst>
-        </pc:spChg>
-        <pc:spChg chg="add mod">
-          <ac:chgData name="Hou, Bowen" userId="cbd36780-c17d-4782-a6cd-6dd8a1dcdc2c" providerId="ADAL" clId="{A769DFB0-DDBA-4BBA-A9E9-53B3513C4E3E}" dt="2025-02-26T01:27:52.384" v="1107" actId="207"/>
-          <ac:spMkLst>
-            <pc:docMk/>
-            <pc:sldMk cId="340494126" sldId="257"/>
-            <ac:spMk id="84" creationId="{660923C6-0219-D843-2DE2-742F6A744BC8}"/>
-          </ac:spMkLst>
-        </pc:spChg>
-        <pc:spChg chg="add mod">
-          <ac:chgData name="Hou, Bowen" userId="cbd36780-c17d-4782-a6cd-6dd8a1dcdc2c" providerId="ADAL" clId="{A769DFB0-DDBA-4BBA-A9E9-53B3513C4E3E}" dt="2025-02-26T01:28:37.556" v="1113" actId="164"/>
-          <ac:spMkLst>
-            <pc:docMk/>
-            <pc:sldMk cId="340494126" sldId="257"/>
-            <ac:spMk id="86" creationId="{E507E9F2-ACDC-73BE-A51B-81BDD52657E9}"/>
-          </ac:spMkLst>
-        </pc:spChg>
-        <pc:spChg chg="add del mod">
-          <ac:chgData name="Hou, Bowen" userId="cbd36780-c17d-4782-a6cd-6dd8a1dcdc2c" providerId="ADAL" clId="{A769DFB0-DDBA-4BBA-A9E9-53B3513C4E3E}" dt="2025-02-26T01:22:28.822" v="865" actId="478"/>
-          <ac:spMkLst>
-            <pc:docMk/>
-            <pc:sldMk cId="340494126" sldId="257"/>
-            <ac:spMk id="87" creationId="{01DC00FE-0099-F462-55EE-3EA39FE89662}"/>
-          </ac:spMkLst>
-        </pc:spChg>
-        <pc:spChg chg="add del mod">
-          <ac:chgData name="Hou, Bowen" userId="cbd36780-c17d-4782-a6cd-6dd8a1dcdc2c" providerId="ADAL" clId="{A769DFB0-DDBA-4BBA-A9E9-53B3513C4E3E}" dt="2025-02-26T01:22:30.342" v="866" actId="478"/>
-          <ac:spMkLst>
-            <pc:docMk/>
-            <pc:sldMk cId="340494126" sldId="257"/>
-            <ac:spMk id="88" creationId="{E2B30AF1-85F6-9AC2-2F8E-BA9F7BEDDD3F}"/>
-          </ac:spMkLst>
-        </pc:spChg>
-        <pc:spChg chg="del mod">
-          <ac:chgData name="Hou, Bowen" userId="cbd36780-c17d-4782-a6cd-6dd8a1dcdc2c" providerId="ADAL" clId="{A769DFB0-DDBA-4BBA-A9E9-53B3513C4E3E}" dt="2025-02-26T01:22:38.682" v="869" actId="478"/>
-          <ac:spMkLst>
-            <pc:docMk/>
-            <pc:sldMk cId="340494126" sldId="257"/>
-            <ac:spMk id="91" creationId="{1A9A1E27-3579-F31F-4716-3CA162F22A12}"/>
-          </ac:spMkLst>
-        </pc:spChg>
-        <pc:spChg chg="del mod">
-          <ac:chgData name="Hou, Bowen" userId="cbd36780-c17d-4782-a6cd-6dd8a1dcdc2c" providerId="ADAL" clId="{A769DFB0-DDBA-4BBA-A9E9-53B3513C4E3E}" dt="2025-02-26T01:22:32.942" v="867" actId="478"/>
-          <ac:spMkLst>
-            <pc:docMk/>
-            <pc:sldMk cId="340494126" sldId="257"/>
-            <ac:spMk id="93" creationId="{51D9F67E-EC9D-0FCB-C194-258B22808B82}"/>
-          </ac:spMkLst>
-        </pc:spChg>
-        <pc:spChg chg="del mod">
-          <ac:chgData name="Hou, Bowen" userId="cbd36780-c17d-4782-a6cd-6dd8a1dcdc2c" providerId="ADAL" clId="{A769DFB0-DDBA-4BBA-A9E9-53B3513C4E3E}" dt="2025-02-26T01:22:34.390" v="868" actId="478"/>
-          <ac:spMkLst>
-            <pc:docMk/>
-            <pc:sldMk cId="340494126" sldId="257"/>
-            <ac:spMk id="94" creationId="{C3061DDB-56DB-B6A4-E26A-23EB7EC32889}"/>
-          </ac:spMkLst>
-        </pc:spChg>
-        <pc:spChg chg="mod">
-          <ac:chgData name="Hou, Bowen" userId="cbd36780-c17d-4782-a6cd-6dd8a1dcdc2c" providerId="ADAL" clId="{A769DFB0-DDBA-4BBA-A9E9-53B3513C4E3E}" dt="2025-02-26T01:25:05.203" v="1079" actId="207"/>
-          <ac:spMkLst>
-            <pc:docMk/>
-            <pc:sldMk cId="340494126" sldId="257"/>
-            <ac:spMk id="96" creationId="{D9667B51-64A1-290D-CDFF-413CFD5ADA36}"/>
-          </ac:spMkLst>
-        </pc:spChg>
-        <pc:spChg chg="del mod">
-          <ac:chgData name="Hou, Bowen" userId="cbd36780-c17d-4782-a6cd-6dd8a1dcdc2c" providerId="ADAL" clId="{A769DFB0-DDBA-4BBA-A9E9-53B3513C4E3E}" dt="2025-02-26T01:25:38.962" v="1089" actId="478"/>
-          <ac:spMkLst>
-            <pc:docMk/>
-            <pc:sldMk cId="340494126" sldId="257"/>
-            <ac:spMk id="98" creationId="{E87BAA04-7E7F-45B9-F6C2-1FFE925E191F}"/>
-          </ac:spMkLst>
-        </pc:spChg>
-        <pc:spChg chg="mod">
-          <ac:chgData name="Hou, Bowen" userId="cbd36780-c17d-4782-a6cd-6dd8a1dcdc2c" providerId="ADAL" clId="{A769DFB0-DDBA-4BBA-A9E9-53B3513C4E3E}" dt="2025-02-26T01:25:53.170" v="1092" actId="1076"/>
-          <ac:spMkLst>
-            <pc:docMk/>
-            <pc:sldMk cId="340494126" sldId="257"/>
-            <ac:spMk id="99" creationId="{E8E382E8-2A55-3C73-DF01-11CBE3AEEE94}"/>
-          </ac:spMkLst>
-        </pc:spChg>
-        <pc:spChg chg="mod">
-          <ac:chgData name="Hou, Bowen" userId="cbd36780-c17d-4782-a6cd-6dd8a1dcdc2c" providerId="ADAL" clId="{A769DFB0-DDBA-4BBA-A9E9-53B3513C4E3E}" dt="2025-02-26T01:25:53.170" v="1092" actId="1076"/>
-          <ac:spMkLst>
-            <pc:docMk/>
-            <pc:sldMk cId="340494126" sldId="257"/>
-            <ac:spMk id="100" creationId="{11EC783F-5C1D-517E-D2F5-2A48F137F192}"/>
-          </ac:spMkLst>
-        </pc:spChg>
-        <pc:spChg chg="mod">
-          <ac:chgData name="Hou, Bowen" userId="cbd36780-c17d-4782-a6cd-6dd8a1dcdc2c" providerId="ADAL" clId="{A769DFB0-DDBA-4BBA-A9E9-53B3513C4E3E}" dt="2025-02-26T01:22:43.012" v="870" actId="165"/>
-          <ac:spMkLst>
-            <pc:docMk/>
-            <pc:sldMk cId="340494126" sldId="257"/>
-            <ac:spMk id="102" creationId="{47FDA27F-A44E-D7B6-F2BA-D1C41C11800F}"/>
-          </ac:spMkLst>
-        </pc:spChg>
-        <pc:spChg chg="mod">
-          <ac:chgData name="Hou, Bowen" userId="cbd36780-c17d-4782-a6cd-6dd8a1dcdc2c" providerId="ADAL" clId="{A769DFB0-DDBA-4BBA-A9E9-53B3513C4E3E}" dt="2025-02-26T01:22:43.012" v="870" actId="165"/>
-          <ac:spMkLst>
-            <pc:docMk/>
-            <pc:sldMk cId="340494126" sldId="257"/>
-            <ac:spMk id="105" creationId="{AA21008B-2BBB-79B1-A63A-97504860FDF6}"/>
-          </ac:spMkLst>
-        </pc:spChg>
-        <pc:spChg chg="mod">
-          <ac:chgData name="Hou, Bowen" userId="cbd36780-c17d-4782-a6cd-6dd8a1dcdc2c" providerId="ADAL" clId="{A769DFB0-DDBA-4BBA-A9E9-53B3513C4E3E}" dt="2025-02-26T01:22:43.012" v="870" actId="165"/>
-          <ac:spMkLst>
-            <pc:docMk/>
-            <pc:sldMk cId="340494126" sldId="257"/>
-            <ac:spMk id="106" creationId="{44639FEC-6EE8-1BC7-F684-E9649D010B6A}"/>
-          </ac:spMkLst>
-        </pc:spChg>
-        <pc:spChg chg="mod">
-          <ac:chgData name="Hou, Bowen" userId="cbd36780-c17d-4782-a6cd-6dd8a1dcdc2c" providerId="ADAL" clId="{A769DFB0-DDBA-4BBA-A9E9-53B3513C4E3E}" dt="2025-02-26T01:22:43.012" v="870" actId="165"/>
-          <ac:spMkLst>
-            <pc:docMk/>
-            <pc:sldMk cId="340494126" sldId="257"/>
-            <ac:spMk id="107" creationId="{313D1BB0-21C1-6314-8603-5B66A95BEBBF}"/>
-          </ac:spMkLst>
-        </pc:spChg>
-        <pc:spChg chg="mod">
-          <ac:chgData name="Hou, Bowen" userId="cbd36780-c17d-4782-a6cd-6dd8a1dcdc2c" providerId="ADAL" clId="{A769DFB0-DDBA-4BBA-A9E9-53B3513C4E3E}" dt="2025-02-26T01:25:22.525" v="1084" actId="207"/>
-          <ac:spMkLst>
-            <pc:docMk/>
-            <pc:sldMk cId="340494126" sldId="257"/>
-            <ac:spMk id="112" creationId="{9F6DC92C-F756-993C-0DE0-A04053B538E0}"/>
-          </ac:spMkLst>
-        </pc:spChg>
-        <pc:spChg chg="mod">
-          <ac:chgData name="Hou, Bowen" userId="cbd36780-c17d-4782-a6cd-6dd8a1dcdc2c" providerId="ADAL" clId="{A769DFB0-DDBA-4BBA-A9E9-53B3513C4E3E}" dt="2025-02-26T01:25:22.525" v="1084" actId="207"/>
-          <ac:spMkLst>
-            <pc:docMk/>
-            <pc:sldMk cId="340494126" sldId="257"/>
-            <ac:spMk id="115" creationId="{3E264E96-4BD1-7F8D-9180-2F13F9C72970}"/>
-          </ac:spMkLst>
-        </pc:spChg>
-        <pc:spChg chg="del mod">
-          <ac:chgData name="Hou, Bowen" userId="cbd36780-c17d-4782-a6cd-6dd8a1dcdc2c" providerId="ADAL" clId="{A769DFB0-DDBA-4BBA-A9E9-53B3513C4E3E}" dt="2025-02-26T01:25:40.854" v="1090" actId="478"/>
-          <ac:spMkLst>
-            <pc:docMk/>
-            <pc:sldMk cId="340494126" sldId="257"/>
-            <ac:spMk id="116" creationId="{FE2F99B4-C060-7562-AF64-CED9C46B16B3}"/>
-          </ac:spMkLst>
-        </pc:spChg>
-        <pc:spChg chg="mod">
-          <ac:chgData name="Hou, Bowen" userId="cbd36780-c17d-4782-a6cd-6dd8a1dcdc2c" providerId="ADAL" clId="{A769DFB0-DDBA-4BBA-A9E9-53B3513C4E3E}" dt="2025-02-26T01:25:22.525" v="1084" actId="207"/>
-          <ac:spMkLst>
-            <pc:docMk/>
-            <pc:sldMk cId="340494126" sldId="257"/>
-            <ac:spMk id="117" creationId="{DCF66AFB-EEE1-5899-CFDF-A89F7011ADB2}"/>
-          </ac:spMkLst>
-        </pc:spChg>
-        <pc:spChg chg="add mod">
-          <ac:chgData name="Hou, Bowen" userId="cbd36780-c17d-4782-a6cd-6dd8a1dcdc2c" providerId="ADAL" clId="{A769DFB0-DDBA-4BBA-A9E9-53B3513C4E3E}" dt="2025-02-26T01:40:10.609" v="1181" actId="164"/>
-          <ac:spMkLst>
-            <pc:docMk/>
-            <pc:sldMk cId="340494126" sldId="257"/>
-            <ac:spMk id="124" creationId="{F00C1FF9-88D4-FB0C-FFF0-752398FCDEA4}"/>
-          </ac:spMkLst>
-        </pc:spChg>
-        <pc:spChg chg="add mod">
-          <ac:chgData name="Hou, Bowen" userId="cbd36780-c17d-4782-a6cd-6dd8a1dcdc2c" providerId="ADAL" clId="{A769DFB0-DDBA-4BBA-A9E9-53B3513C4E3E}" dt="2025-02-26T01:29:54.983" v="1141"/>
-          <ac:spMkLst>
-            <pc:docMk/>
-            <pc:sldMk cId="340494126" sldId="257"/>
-            <ac:spMk id="125" creationId="{863FC29C-5161-5A21-6116-7F5041B1582F}"/>
-          </ac:spMkLst>
-        </pc:spChg>
-        <pc:spChg chg="add mod">
-          <ac:chgData name="Hou, Bowen" userId="cbd36780-c17d-4782-a6cd-6dd8a1dcdc2c" providerId="ADAL" clId="{A769DFB0-DDBA-4BBA-A9E9-53B3513C4E3E}" dt="2025-02-26T01:30:01.272" v="1144" actId="1076"/>
-          <ac:spMkLst>
-            <pc:docMk/>
-            <pc:sldMk cId="340494126" sldId="257"/>
-            <ac:spMk id="126" creationId="{0F63798B-CB83-21F1-DA0F-11DE1EC11CAE}"/>
-          </ac:spMkLst>
-        </pc:spChg>
-        <pc:spChg chg="add mod">
-          <ac:chgData name="Hou, Bowen" userId="cbd36780-c17d-4782-a6cd-6dd8a1dcdc2c" providerId="ADAL" clId="{A769DFB0-DDBA-4BBA-A9E9-53B3513C4E3E}" dt="2025-02-26T01:30:03.654" v="1145"/>
-          <ac:spMkLst>
-            <pc:docMk/>
-            <pc:sldMk cId="340494126" sldId="257"/>
-            <ac:spMk id="127" creationId="{5A785DCA-DE7F-B8F2-EA01-F31DB8A5078D}"/>
-          </ac:spMkLst>
-        </pc:spChg>
-        <pc:spChg chg="add mod">
-          <ac:chgData name="Hou, Bowen" userId="cbd36780-c17d-4782-a6cd-6dd8a1dcdc2c" providerId="ADAL" clId="{A769DFB0-DDBA-4BBA-A9E9-53B3513C4E3E}" dt="2025-02-26T01:30:03.654" v="1145"/>
-          <ac:spMkLst>
-            <pc:docMk/>
-            <pc:sldMk cId="340494126" sldId="257"/>
-            <ac:spMk id="128" creationId="{BD7E3D80-CF6E-DA96-02AC-23EF81EAA589}"/>
-          </ac:spMkLst>
-        </pc:spChg>
         <pc:spChg chg="add mod">
           <ac:chgData name="Hou, Bowen" userId="cbd36780-c17d-4782-a6cd-6dd8a1dcdc2c" providerId="ADAL" clId="{A769DFB0-DDBA-4BBA-A9E9-53B3513C4E3E}" dt="2025-02-26T02:06:16.184" v="1584" actId="207"/>
           <ac:spMkLst>
             <pc:docMk/>
             <pc:sldMk cId="340494126" sldId="257"/>
             <ac:spMk id="130" creationId="{137137A3-FC58-5069-92FE-B68A92163B8E}"/>
-          </ac:spMkLst>
-        </pc:spChg>
-        <pc:spChg chg="add mod">
-          <ac:chgData name="Hou, Bowen" userId="cbd36780-c17d-4782-a6cd-6dd8a1dcdc2c" providerId="ADAL" clId="{A769DFB0-DDBA-4BBA-A9E9-53B3513C4E3E}" dt="2025-02-26T01:48:44.702" v="1307"/>
-          <ac:spMkLst>
-            <pc:docMk/>
-            <pc:sldMk cId="340494126" sldId="257"/>
-            <ac:spMk id="138" creationId="{6FFDEB1E-4A0D-19D0-527C-1233C95F54BC}"/>
           </ac:spMkLst>
         </pc:spChg>
         <pc:spChg chg="add mod">
@@ -633,22 +248,6 @@
             <ac:spMk id="163" creationId="{281E9742-9BC6-333B-BFB9-F6A70ADCD8E5}"/>
           </ac:spMkLst>
         </pc:spChg>
-        <pc:spChg chg="add del mod">
-          <ac:chgData name="Hou, Bowen" userId="cbd36780-c17d-4782-a6cd-6dd8a1dcdc2c" providerId="ADAL" clId="{A769DFB0-DDBA-4BBA-A9E9-53B3513C4E3E}" dt="2025-02-26T02:03:01.076" v="1507" actId="478"/>
-          <ac:spMkLst>
-            <pc:docMk/>
-            <pc:sldMk cId="340494126" sldId="257"/>
-            <ac:spMk id="191" creationId="{A35B0634-1F8C-0307-C0E1-C6D733B7C884}"/>
-          </ac:spMkLst>
-        </pc:spChg>
-        <pc:spChg chg="add del mod">
-          <ac:chgData name="Hou, Bowen" userId="cbd36780-c17d-4782-a6cd-6dd8a1dcdc2c" providerId="ADAL" clId="{A769DFB0-DDBA-4BBA-A9E9-53B3513C4E3E}" dt="2025-02-26T02:03:53.818" v="1525" actId="478"/>
-          <ac:spMkLst>
-            <pc:docMk/>
-            <pc:sldMk cId="340494126" sldId="257"/>
-            <ac:spMk id="192" creationId="{0FEA5336-E16B-849E-60D0-020993569FF6}"/>
-          </ac:spMkLst>
-        </pc:spChg>
         <pc:spChg chg="mod">
           <ac:chgData name="Hou, Bowen" userId="cbd36780-c17d-4782-a6cd-6dd8a1dcdc2c" providerId="ADAL" clId="{A769DFB0-DDBA-4BBA-A9E9-53B3513C4E3E}" dt="2025-02-26T02:21:56.950" v="1835" actId="20577"/>
           <ac:spMkLst>
@@ -697,22 +296,6 @@
             <ac:spMk id="227" creationId="{8726E3A4-BFCC-D6D0-19B0-3CC4892B0846}"/>
           </ac:spMkLst>
         </pc:spChg>
-        <pc:spChg chg="add del mod">
-          <ac:chgData name="Hou, Bowen" userId="cbd36780-c17d-4782-a6cd-6dd8a1dcdc2c" providerId="ADAL" clId="{A769DFB0-DDBA-4BBA-A9E9-53B3513C4E3E}" dt="2025-02-26T02:23:59.660" v="1873" actId="478"/>
-          <ac:spMkLst>
-            <pc:docMk/>
-            <pc:sldMk cId="340494126" sldId="257"/>
-            <ac:spMk id="230" creationId="{98E32427-B62E-00B7-FD49-05F26C3D199C}"/>
-          </ac:spMkLst>
-        </pc:spChg>
-        <pc:spChg chg="add del mod">
-          <ac:chgData name="Hou, Bowen" userId="cbd36780-c17d-4782-a6cd-6dd8a1dcdc2c" providerId="ADAL" clId="{A769DFB0-DDBA-4BBA-A9E9-53B3513C4E3E}" dt="2025-02-26T02:25:28.351" v="1895" actId="478"/>
-          <ac:spMkLst>
-            <pc:docMk/>
-            <pc:sldMk cId="340494126" sldId="257"/>
-            <ac:spMk id="240" creationId="{70C0452C-ED9F-14CA-7356-B0B39BED3E4A}"/>
-          </ac:spMkLst>
-        </pc:spChg>
         <pc:spChg chg="add mod">
           <ac:chgData name="Hou, Bowen" userId="cbd36780-c17d-4782-a6cd-6dd8a1dcdc2c" providerId="ADAL" clId="{A769DFB0-DDBA-4BBA-A9E9-53B3513C4E3E}" dt="2025-02-26T02:25:32.989" v="1897" actId="1076"/>
           <ac:spMkLst>
@@ -745,14 +328,6 @@
             <ac:spMk id="254" creationId="{B1AD85E8-F85E-21E1-FA50-09C4BACD9ED7}"/>
           </ac:spMkLst>
         </pc:spChg>
-        <pc:spChg chg="del mod">
-          <ac:chgData name="Hou, Bowen" userId="cbd36780-c17d-4782-a6cd-6dd8a1dcdc2c" providerId="ADAL" clId="{A769DFB0-DDBA-4BBA-A9E9-53B3513C4E3E}" dt="2025-02-26T02:14:00.957" v="1701" actId="478"/>
-          <ac:spMkLst>
-            <pc:docMk/>
-            <pc:sldMk cId="340494126" sldId="257"/>
-            <ac:spMk id="272" creationId="{CB0280F8-C299-4FEB-ED68-213460B5E6CB}"/>
-          </ac:spMkLst>
-        </pc:spChg>
         <pc:spChg chg="mod">
           <ac:chgData name="Hou, Bowen" userId="cbd36780-c17d-4782-a6cd-6dd8a1dcdc2c" providerId="ADAL" clId="{A769DFB0-DDBA-4BBA-A9E9-53B3513C4E3E}" dt="2025-02-26T01:45:36.102" v="1284" actId="1076"/>
           <ac:spMkLst>
@@ -873,14 +448,6 @@
             <ac:spMk id="388" creationId="{6A626E0B-30F4-2057-245F-68BE5CB03595}"/>
           </ac:spMkLst>
         </pc:spChg>
-        <pc:spChg chg="del mod">
-          <ac:chgData name="Hou, Bowen" userId="cbd36780-c17d-4782-a6cd-6dd8a1dcdc2c" providerId="ADAL" clId="{A769DFB0-DDBA-4BBA-A9E9-53B3513C4E3E}" dt="2025-02-26T02:13:24.342" v="1666" actId="478"/>
-          <ac:spMkLst>
-            <pc:docMk/>
-            <pc:sldMk cId="340494126" sldId="257"/>
-            <ac:spMk id="391" creationId="{08CBBD54-F122-B9EE-2F64-72965E2F6F8C}"/>
-          </ac:spMkLst>
-        </pc:spChg>
         <pc:spChg chg="mod">
           <ac:chgData name="Hou, Bowen" userId="cbd36780-c17d-4782-a6cd-6dd8a1dcdc2c" providerId="ADAL" clId="{A769DFB0-DDBA-4BBA-A9E9-53B3513C4E3E}" dt="2025-02-26T02:23:20.858" v="1854" actId="20577"/>
           <ac:spMkLst>
@@ -946,35 +513,11 @@
           </ac:spMkLst>
         </pc:spChg>
         <pc:spChg chg="mod">
-          <ac:chgData name="Hou, Bowen" userId="cbd36780-c17d-4782-a6cd-6dd8a1dcdc2c" providerId="ADAL" clId="{A769DFB0-DDBA-4BBA-A9E9-53B3513C4E3E}" dt="2025-02-26T00:51:28.676" v="90" actId="571"/>
-          <ac:spMkLst>
-            <pc:docMk/>
-            <pc:sldMk cId="340494126" sldId="257"/>
-            <ac:spMk id="449" creationId="{932B39EE-6AE6-465B-9473-858600526080}"/>
-          </ac:spMkLst>
-        </pc:spChg>
-        <pc:spChg chg="mod">
           <ac:chgData name="Hou, Bowen" userId="cbd36780-c17d-4782-a6cd-6dd8a1dcdc2c" providerId="ADAL" clId="{A769DFB0-DDBA-4BBA-A9E9-53B3513C4E3E}" dt="2025-02-26T01:47:56.051" v="1301" actId="164"/>
           <ac:spMkLst>
             <pc:docMk/>
             <pc:sldMk cId="340494126" sldId="257"/>
             <ac:spMk id="450" creationId="{CB5A6863-3ACC-12BD-503A-22A9BD48C1A3}"/>
-          </ac:spMkLst>
-        </pc:spChg>
-        <pc:spChg chg="mod">
-          <ac:chgData name="Hou, Bowen" userId="cbd36780-c17d-4782-a6cd-6dd8a1dcdc2c" providerId="ADAL" clId="{A769DFB0-DDBA-4BBA-A9E9-53B3513C4E3E}" dt="2025-02-26T00:51:28.676" v="90" actId="571"/>
-          <ac:spMkLst>
-            <pc:docMk/>
-            <pc:sldMk cId="340494126" sldId="257"/>
-            <ac:spMk id="453" creationId="{63965E04-1A7C-86E7-3D28-665C401379D8}"/>
-          </ac:spMkLst>
-        </pc:spChg>
-        <pc:spChg chg="mod">
-          <ac:chgData name="Hou, Bowen" userId="cbd36780-c17d-4782-a6cd-6dd8a1dcdc2c" providerId="ADAL" clId="{A769DFB0-DDBA-4BBA-A9E9-53B3513C4E3E}" dt="2025-02-26T00:51:28.676" v="90" actId="571"/>
-          <ac:spMkLst>
-            <pc:docMk/>
-            <pc:sldMk cId="340494126" sldId="257"/>
-            <ac:spMk id="454" creationId="{9055D51A-6ABC-75A2-F150-901F1A1BD95D}"/>
           </ac:spMkLst>
         </pc:spChg>
         <pc:spChg chg="mod">
@@ -994,14 +537,6 @@
           </ac:spMkLst>
         </pc:spChg>
         <pc:spChg chg="add mod">
-          <ac:chgData name="Hou, Bowen" userId="cbd36780-c17d-4782-a6cd-6dd8a1dcdc2c" providerId="ADAL" clId="{A769DFB0-DDBA-4BBA-A9E9-53B3513C4E3E}" dt="2025-02-26T00:55:59.554" v="173"/>
-          <ac:spMkLst>
-            <pc:docMk/>
-            <pc:sldMk cId="340494126" sldId="257"/>
-            <ac:spMk id="465" creationId="{579E3D70-AF69-5778-037F-05E431985C0A}"/>
-          </ac:spMkLst>
-        </pc:spChg>
-        <pc:spChg chg="add mod">
           <ac:chgData name="Hou, Bowen" userId="cbd36780-c17d-4782-a6cd-6dd8a1dcdc2c" providerId="ADAL" clId="{A769DFB0-DDBA-4BBA-A9E9-53B3513C4E3E}" dt="2025-02-26T01:47:56.051" v="1301" actId="164"/>
           <ac:spMkLst>
             <pc:docMk/>
@@ -1025,30 +560,6 @@
             <ac:spMk id="474" creationId="{E0440752-5FD2-DE53-3FBD-451916B4C794}"/>
           </ac:spMkLst>
         </pc:spChg>
-        <pc:spChg chg="add mod">
-          <ac:chgData name="Hou, Bowen" userId="cbd36780-c17d-4782-a6cd-6dd8a1dcdc2c" providerId="ADAL" clId="{A769DFB0-DDBA-4BBA-A9E9-53B3513C4E3E}" dt="2025-02-26T01:31:59.627" v="1167" actId="207"/>
-          <ac:spMkLst>
-            <pc:docMk/>
-            <pc:sldMk cId="340494126" sldId="257"/>
-            <ac:spMk id="482" creationId="{24458D8A-B702-6F1F-260B-3A7A84F9E4C8}"/>
-          </ac:spMkLst>
-        </pc:spChg>
-        <pc:spChg chg="add mod">
-          <ac:chgData name="Hou, Bowen" userId="cbd36780-c17d-4782-a6cd-6dd8a1dcdc2c" providerId="ADAL" clId="{A769DFB0-DDBA-4BBA-A9E9-53B3513C4E3E}" dt="2025-02-26T01:32:07.424" v="1168" actId="1076"/>
-          <ac:spMkLst>
-            <pc:docMk/>
-            <pc:sldMk cId="340494126" sldId="257"/>
-            <ac:spMk id="483" creationId="{CEC7C0D0-39BA-D267-57E3-BE69883DF8B5}"/>
-          </ac:spMkLst>
-        </pc:spChg>
-        <pc:spChg chg="mod">
-          <ac:chgData name="Hou, Bowen" userId="cbd36780-c17d-4782-a6cd-6dd8a1dcdc2c" providerId="ADAL" clId="{A769DFB0-DDBA-4BBA-A9E9-53B3513C4E3E}" dt="2025-02-26T01:31:59.627" v="1167" actId="207"/>
-          <ac:spMkLst>
-            <pc:docMk/>
-            <pc:sldMk cId="340494126" sldId="257"/>
-            <ac:spMk id="486" creationId="{AA5B85DB-50DD-74B0-AFD3-AAF1A5FA4758}"/>
-          </ac:spMkLst>
-        </pc:spChg>
         <pc:spChg chg="mod topLvl">
           <ac:chgData name="Hou, Bowen" userId="cbd36780-c17d-4782-a6cd-6dd8a1dcdc2c" providerId="ADAL" clId="{A769DFB0-DDBA-4BBA-A9E9-53B3513C4E3E}" dt="2025-02-26T01:45:14.109" v="1275" actId="164"/>
           <ac:spMkLst>
@@ -1090,38 +601,6 @@
           </ac:spMkLst>
         </pc:spChg>
         <pc:spChg chg="mod">
-          <ac:chgData name="Hou, Bowen" userId="cbd36780-c17d-4782-a6cd-6dd8a1dcdc2c" providerId="ADAL" clId="{A769DFB0-DDBA-4BBA-A9E9-53B3513C4E3E}" dt="2025-02-26T01:31:59.627" v="1167" actId="207"/>
-          <ac:spMkLst>
-            <pc:docMk/>
-            <pc:sldMk cId="340494126" sldId="257"/>
-            <ac:spMk id="492" creationId="{422EDB06-5398-4A79-46F2-0FF3C8FAD3D7}"/>
-          </ac:spMkLst>
-        </pc:spChg>
-        <pc:spChg chg="add mod">
-          <ac:chgData name="Hou, Bowen" userId="cbd36780-c17d-4782-a6cd-6dd8a1dcdc2c" providerId="ADAL" clId="{A769DFB0-DDBA-4BBA-A9E9-53B3513C4E3E}" dt="2025-02-26T01:31:59.627" v="1167" actId="207"/>
-          <ac:spMkLst>
-            <pc:docMk/>
-            <pc:sldMk cId="340494126" sldId="257"/>
-            <ac:spMk id="493" creationId="{DA1666FE-4F84-A869-B950-46829624AAC5}"/>
-          </ac:spMkLst>
-        </pc:spChg>
-        <pc:spChg chg="add mod">
-          <ac:chgData name="Hou, Bowen" userId="cbd36780-c17d-4782-a6cd-6dd8a1dcdc2c" providerId="ADAL" clId="{A769DFB0-DDBA-4BBA-A9E9-53B3513C4E3E}" dt="2025-02-26T01:31:59.627" v="1167" actId="207"/>
-          <ac:spMkLst>
-            <pc:docMk/>
-            <pc:sldMk cId="340494126" sldId="257"/>
-            <ac:spMk id="494" creationId="{BA6ECD76-1FEF-5029-2979-8B5376B088C2}"/>
-          </ac:spMkLst>
-        </pc:spChg>
-        <pc:spChg chg="add mod">
-          <ac:chgData name="Hou, Bowen" userId="cbd36780-c17d-4782-a6cd-6dd8a1dcdc2c" providerId="ADAL" clId="{A769DFB0-DDBA-4BBA-A9E9-53B3513C4E3E}" dt="2025-02-26T01:31:59.627" v="1167" actId="207"/>
-          <ac:spMkLst>
-            <pc:docMk/>
-            <pc:sldMk cId="340494126" sldId="257"/>
-            <ac:spMk id="495" creationId="{23F934A7-EFF2-86C0-D99E-66B10007AFB6}"/>
-          </ac:spMkLst>
-        </pc:spChg>
-        <pc:spChg chg="mod">
           <ac:chgData name="Hou, Bowen" userId="cbd36780-c17d-4782-a6cd-6dd8a1dcdc2c" providerId="ADAL" clId="{A769DFB0-DDBA-4BBA-A9E9-53B3513C4E3E}" dt="2025-02-26T01:59:19.019" v="1462" actId="1076"/>
           <ac:spMkLst>
             <pc:docMk/>
@@ -1137,14 +616,6 @@
             <ac:spMk id="500" creationId="{7B00E5E2-59CA-AD44-63EB-0EF93E21A268}"/>
           </ac:spMkLst>
         </pc:spChg>
-        <pc:spChg chg="add mod">
-          <ac:chgData name="Hou, Bowen" userId="cbd36780-c17d-4782-a6cd-6dd8a1dcdc2c" providerId="ADAL" clId="{A769DFB0-DDBA-4BBA-A9E9-53B3513C4E3E}" dt="2025-02-26T01:40:10.609" v="1181" actId="164"/>
-          <ac:spMkLst>
-            <pc:docMk/>
-            <pc:sldMk cId="340494126" sldId="257"/>
-            <ac:spMk id="501" creationId="{6492E6D0-4428-2915-E547-2920A1F00DFB}"/>
-          </ac:spMkLst>
-        </pc:spChg>
         <pc:spChg chg="mod topLvl">
           <ac:chgData name="Hou, Bowen" userId="cbd36780-c17d-4782-a6cd-6dd8a1dcdc2c" providerId="ADAL" clId="{A769DFB0-DDBA-4BBA-A9E9-53B3513C4E3E}" dt="2025-02-26T01:45:14.109" v="1275" actId="164"/>
           <ac:spMkLst>
@@ -1161,22 +632,6 @@
             <ac:spMk id="507" creationId="{3AA4A90A-D383-EFA9-CF64-E947EB1D1704}"/>
           </ac:spMkLst>
         </pc:spChg>
-        <pc:spChg chg="add mod">
-          <ac:chgData name="Hou, Bowen" userId="cbd36780-c17d-4782-a6cd-6dd8a1dcdc2c" providerId="ADAL" clId="{A769DFB0-DDBA-4BBA-A9E9-53B3513C4E3E}" dt="2025-02-26T01:40:10.609" v="1181" actId="164"/>
-          <ac:spMkLst>
-            <pc:docMk/>
-            <pc:sldMk cId="340494126" sldId="257"/>
-            <ac:spMk id="508" creationId="{669C178F-81E2-82ED-C1B6-20C1BB25981A}"/>
-          </ac:spMkLst>
-        </pc:spChg>
-        <pc:grpChg chg="mod">
-          <ac:chgData name="Hou, Bowen" userId="cbd36780-c17d-4782-a6cd-6dd8a1dcdc2c" providerId="ADAL" clId="{A769DFB0-DDBA-4BBA-A9E9-53B3513C4E3E}" dt="2025-02-26T00:51:32.842" v="91" actId="164"/>
-          <ac:grpSpMkLst>
-            <pc:docMk/>
-            <pc:sldMk cId="340494126" sldId="257"/>
-            <ac:grpSpMk id="2" creationId="{5DB604DC-2545-0741-A64A-583ED78D1080}"/>
-          </ac:grpSpMkLst>
-        </pc:grpChg>
         <pc:grpChg chg="mod">
           <ac:chgData name="Hou, Bowen" userId="cbd36780-c17d-4782-a6cd-6dd8a1dcdc2c" providerId="ADAL" clId="{A769DFB0-DDBA-4BBA-A9E9-53B3513C4E3E}" dt="2025-02-26T01:47:56.051" v="1301" actId="164"/>
           <ac:grpSpMkLst>
@@ -1210,158 +665,6 @@
           </ac:grpSpMkLst>
         </pc:grpChg>
         <pc:grpChg chg="mod">
-          <ac:chgData name="Hou, Bowen" userId="cbd36780-c17d-4782-a6cd-6dd8a1dcdc2c" providerId="ADAL" clId="{A769DFB0-DDBA-4BBA-A9E9-53B3513C4E3E}" dt="2025-02-26T01:20:07.992" v="827" actId="207"/>
-          <ac:grpSpMkLst>
-            <pc:docMk/>
-            <pc:sldMk cId="340494126" sldId="257"/>
-            <ac:grpSpMk id="64" creationId="{FA1B3329-E98E-D9A0-122A-6A08E7EC1A55}"/>
-          </ac:grpSpMkLst>
-        </pc:grpChg>
-        <pc:grpChg chg="mod">
-          <ac:chgData name="Hou, Bowen" userId="cbd36780-c17d-4782-a6cd-6dd8a1dcdc2c" providerId="ADAL" clId="{A769DFB0-DDBA-4BBA-A9E9-53B3513C4E3E}" dt="2025-02-26T01:20:07.992" v="827" actId="207"/>
-          <ac:grpSpMkLst>
-            <pc:docMk/>
-            <pc:sldMk cId="340494126" sldId="257"/>
-            <ac:grpSpMk id="68" creationId="{6302A008-E8C0-54B0-D072-FCB72A4FDF90}"/>
-          </ac:grpSpMkLst>
-        </pc:grpChg>
-        <pc:grpChg chg="add del mod">
-          <ac:chgData name="Hou, Bowen" userId="cbd36780-c17d-4782-a6cd-6dd8a1dcdc2c" providerId="ADAL" clId="{A769DFB0-DDBA-4BBA-A9E9-53B3513C4E3E}" dt="2025-02-26T01:22:47.248" v="871" actId="478"/>
-          <ac:grpSpMkLst>
-            <pc:docMk/>
-            <pc:sldMk cId="340494126" sldId="257"/>
-            <ac:grpSpMk id="74" creationId="{A8C2B524-1388-2CFA-BF32-A2FA53CB73AF}"/>
-          </ac:grpSpMkLst>
-        </pc:grpChg>
-        <pc:grpChg chg="mod">
-          <ac:chgData name="Hou, Bowen" userId="cbd36780-c17d-4782-a6cd-6dd8a1dcdc2c" providerId="ADAL" clId="{A769DFB0-DDBA-4BBA-A9E9-53B3513C4E3E}" dt="2025-02-26T01:18:53.594" v="800"/>
-          <ac:grpSpMkLst>
-            <pc:docMk/>
-            <pc:sldMk cId="340494126" sldId="257"/>
-            <ac:grpSpMk id="75" creationId="{1842772C-9952-3625-D8BA-6F98E5D163AC}"/>
-          </ac:grpSpMkLst>
-        </pc:grpChg>
-        <pc:grpChg chg="mod">
-          <ac:chgData name="Hou, Bowen" userId="cbd36780-c17d-4782-a6cd-6dd8a1dcdc2c" providerId="ADAL" clId="{A769DFB0-DDBA-4BBA-A9E9-53B3513C4E3E}" dt="2025-02-26T01:18:53.594" v="800"/>
-          <ac:grpSpMkLst>
-            <pc:docMk/>
-            <pc:sldMk cId="340494126" sldId="257"/>
-            <ac:grpSpMk id="77" creationId="{173D8E00-2766-EA83-9D99-DFDBE4BC90A2}"/>
-          </ac:grpSpMkLst>
-        </pc:grpChg>
-        <pc:grpChg chg="add mod">
-          <ac:chgData name="Hou, Bowen" userId="cbd36780-c17d-4782-a6cd-6dd8a1dcdc2c" providerId="ADAL" clId="{A769DFB0-DDBA-4BBA-A9E9-53B3513C4E3E}" dt="2025-02-26T01:28:37.556" v="1113" actId="164"/>
-          <ac:grpSpMkLst>
-            <pc:docMk/>
-            <pc:sldMk cId="340494126" sldId="257"/>
-            <ac:grpSpMk id="85" creationId="{2B77C1B0-F5CA-2D47-DC24-B0B02CB5833E}"/>
-          </ac:grpSpMkLst>
-        </pc:grpChg>
-        <pc:grpChg chg="del mod">
-          <ac:chgData name="Hou, Bowen" userId="cbd36780-c17d-4782-a6cd-6dd8a1dcdc2c" providerId="ADAL" clId="{A769DFB0-DDBA-4BBA-A9E9-53B3513C4E3E}" dt="2025-02-26T01:22:43.012" v="870" actId="165"/>
-          <ac:grpSpMkLst>
-            <pc:docMk/>
-            <pc:sldMk cId="340494126" sldId="257"/>
-            <ac:grpSpMk id="89" creationId="{EF155727-0945-5E75-D00E-0BD0BE8D99BF}"/>
-          </ac:grpSpMkLst>
-        </pc:grpChg>
-        <pc:grpChg chg="del mod">
-          <ac:chgData name="Hou, Bowen" userId="cbd36780-c17d-4782-a6cd-6dd8a1dcdc2c" providerId="ADAL" clId="{A769DFB0-DDBA-4BBA-A9E9-53B3513C4E3E}" dt="2025-02-26T01:26:20.120" v="1096" actId="478"/>
-          <ac:grpSpMkLst>
-            <pc:docMk/>
-            <pc:sldMk cId="340494126" sldId="257"/>
-            <ac:grpSpMk id="90" creationId="{2D2C9B4C-06AC-35AD-683E-6B15843E139D}"/>
-          </ac:grpSpMkLst>
-        </pc:grpChg>
-        <pc:grpChg chg="mod">
-          <ac:chgData name="Hou, Bowen" userId="cbd36780-c17d-4782-a6cd-6dd8a1dcdc2c" providerId="ADAL" clId="{A769DFB0-DDBA-4BBA-A9E9-53B3513C4E3E}" dt="2025-02-26T01:26:00.434" v="1093" actId="164"/>
-          <ac:grpSpMkLst>
-            <pc:docMk/>
-            <pc:sldMk cId="340494126" sldId="257"/>
-            <ac:grpSpMk id="92" creationId="{AA542C19-3585-8FFA-A588-28149DBF618D}"/>
-          </ac:grpSpMkLst>
-        </pc:grpChg>
-        <pc:grpChg chg="del mod">
-          <ac:chgData name="Hou, Bowen" userId="cbd36780-c17d-4782-a6cd-6dd8a1dcdc2c" providerId="ADAL" clId="{A769DFB0-DDBA-4BBA-A9E9-53B3513C4E3E}" dt="2025-02-26T01:25:38.962" v="1089" actId="478"/>
-          <ac:grpSpMkLst>
-            <pc:docMk/>
-            <pc:sldMk cId="340494126" sldId="257"/>
-            <ac:grpSpMk id="95" creationId="{8BA27C76-586F-3B3C-252E-A48612F7E58E}"/>
-          </ac:grpSpMkLst>
-        </pc:grpChg>
-        <pc:grpChg chg="mod">
-          <ac:chgData name="Hou, Bowen" userId="cbd36780-c17d-4782-a6cd-6dd8a1dcdc2c" providerId="ADAL" clId="{A769DFB0-DDBA-4BBA-A9E9-53B3513C4E3E}" dt="2025-02-26T01:25:05.203" v="1079" actId="207"/>
-          <ac:grpSpMkLst>
-            <pc:docMk/>
-            <pc:sldMk cId="340494126" sldId="257"/>
-            <ac:grpSpMk id="97" creationId="{DBB7E804-DD4B-6F40-7E93-0B228FEDB1C9}"/>
-          </ac:grpSpMkLst>
-        </pc:grpChg>
-        <pc:grpChg chg="mod">
-          <ac:chgData name="Hou, Bowen" userId="cbd36780-c17d-4782-a6cd-6dd8a1dcdc2c" providerId="ADAL" clId="{A769DFB0-DDBA-4BBA-A9E9-53B3513C4E3E}" dt="2025-02-26T01:22:43.012" v="870" actId="165"/>
-          <ac:grpSpMkLst>
-            <pc:docMk/>
-            <pc:sldMk cId="340494126" sldId="257"/>
-            <ac:grpSpMk id="101" creationId="{1D6C041C-39E8-DE7D-E244-F6D3478BCDC4}"/>
-          </ac:grpSpMkLst>
-        </pc:grpChg>
-        <pc:grpChg chg="add mod">
-          <ac:chgData name="Hou, Bowen" userId="cbd36780-c17d-4782-a6cd-6dd8a1dcdc2c" providerId="ADAL" clId="{A769DFB0-DDBA-4BBA-A9E9-53B3513C4E3E}" dt="2025-02-26T01:26:00.434" v="1093" actId="164"/>
-          <ac:grpSpMkLst>
-            <pc:docMk/>
-            <pc:sldMk cId="340494126" sldId="257"/>
-            <ac:grpSpMk id="109" creationId="{C8E4B314-DD02-B0FC-BFB1-2A2509209FEB}"/>
-          </ac:grpSpMkLst>
-        </pc:grpChg>
-        <pc:grpChg chg="mod">
-          <ac:chgData name="Hou, Bowen" userId="cbd36780-c17d-4782-a6cd-6dd8a1dcdc2c" providerId="ADAL" clId="{A769DFB0-DDBA-4BBA-A9E9-53B3513C4E3E}" dt="2025-02-26T01:25:22.525" v="1084" actId="207"/>
-          <ac:grpSpMkLst>
-            <pc:docMk/>
-            <pc:sldMk cId="340494126" sldId="257"/>
-            <ac:grpSpMk id="110" creationId="{A025EB0E-176F-7396-A049-B9A7D3F70BD2}"/>
-          </ac:grpSpMkLst>
-        </pc:grpChg>
-        <pc:grpChg chg="del mod">
-          <ac:chgData name="Hou, Bowen" userId="cbd36780-c17d-4782-a6cd-6dd8a1dcdc2c" providerId="ADAL" clId="{A769DFB0-DDBA-4BBA-A9E9-53B3513C4E3E}" dt="2025-02-26T01:25:40.854" v="1090" actId="478"/>
-          <ac:grpSpMkLst>
-            <pc:docMk/>
-            <pc:sldMk cId="340494126" sldId="257"/>
-            <ac:grpSpMk id="113" creationId="{B8AAA184-AB2D-BFAA-4B16-EB847A24E953}"/>
-          </ac:grpSpMkLst>
-        </pc:grpChg>
-        <pc:grpChg chg="add mod">
-          <ac:chgData name="Hou, Bowen" userId="cbd36780-c17d-4782-a6cd-6dd8a1dcdc2c" providerId="ADAL" clId="{A769DFB0-DDBA-4BBA-A9E9-53B3513C4E3E}" dt="2025-02-26T01:28:37.556" v="1113" actId="164"/>
-          <ac:grpSpMkLst>
-            <pc:docMk/>
-            <pc:sldMk cId="340494126" sldId="257"/>
-            <ac:grpSpMk id="118" creationId="{A28C57C4-760C-DCDA-0FDD-BE29BFC2C970}"/>
-          </ac:grpSpMkLst>
-        </pc:grpChg>
-        <pc:grpChg chg="add mod">
-          <ac:chgData name="Hou, Bowen" userId="cbd36780-c17d-4782-a6cd-6dd8a1dcdc2c" providerId="ADAL" clId="{A769DFB0-DDBA-4BBA-A9E9-53B3513C4E3E}" dt="2025-02-26T01:40:10.609" v="1181" actId="164"/>
-          <ac:grpSpMkLst>
-            <pc:docMk/>
-            <pc:sldMk cId="340494126" sldId="257"/>
-            <ac:grpSpMk id="121" creationId="{C1B1FA68-7AC1-BA0A-6004-68565D67A832}"/>
-          </ac:grpSpMkLst>
-        </pc:grpChg>
-        <pc:grpChg chg="add mod">
-          <ac:chgData name="Hou, Bowen" userId="cbd36780-c17d-4782-a6cd-6dd8a1dcdc2c" providerId="ADAL" clId="{A769DFB0-DDBA-4BBA-A9E9-53B3513C4E3E}" dt="2025-02-26T01:40:10.609" v="1181" actId="164"/>
-          <ac:grpSpMkLst>
-            <pc:docMk/>
-            <pc:sldMk cId="340494126" sldId="257"/>
-            <ac:grpSpMk id="122" creationId="{EABA09EA-45E7-FF1A-B5CC-3E65B3545232}"/>
-          </ac:grpSpMkLst>
-        </pc:grpChg>
-        <pc:grpChg chg="add del mod">
-          <ac:chgData name="Hou, Bowen" userId="cbd36780-c17d-4782-a6cd-6dd8a1dcdc2c" providerId="ADAL" clId="{A769DFB0-DDBA-4BBA-A9E9-53B3513C4E3E}" dt="2025-02-26T01:40:11.662" v="1182" actId="21"/>
-          <ac:grpSpMkLst>
-            <pc:docMk/>
-            <pc:sldMk cId="340494126" sldId="257"/>
-            <ac:grpSpMk id="129" creationId="{4B6B2034-386F-36CC-6DAC-55FEBB33A37A}"/>
-          </ac:grpSpMkLst>
-        </pc:grpChg>
-        <pc:grpChg chg="mod">
           <ac:chgData name="Hou, Bowen" userId="cbd36780-c17d-4782-a6cd-6dd8a1dcdc2c" providerId="ADAL" clId="{A769DFB0-DDBA-4BBA-A9E9-53B3513C4E3E}" dt="2025-02-26T01:45:20.823" v="1278" actId="164"/>
           <ac:grpSpMkLst>
             <pc:docMk/>
@@ -1393,54 +696,6 @@
             <ac:grpSpMk id="405" creationId="{04375840-4445-180F-3480-1A4A89EE6B7F}"/>
           </ac:grpSpMkLst>
         </pc:grpChg>
-        <pc:grpChg chg="mod">
-          <ac:chgData name="Hou, Bowen" userId="cbd36780-c17d-4782-a6cd-6dd8a1dcdc2c" providerId="ADAL" clId="{A769DFB0-DDBA-4BBA-A9E9-53B3513C4E3E}" dt="2025-02-26T02:01:08.272" v="1476" actId="1076"/>
-          <ac:grpSpMkLst>
-            <pc:docMk/>
-            <pc:sldMk cId="340494126" sldId="257"/>
-            <ac:grpSpMk id="422" creationId="{44D403D0-1FC5-87D7-34F8-190E7D499046}"/>
-          </ac:grpSpMkLst>
-        </pc:grpChg>
-        <pc:grpChg chg="add mod">
-          <ac:chgData name="Hou, Bowen" userId="cbd36780-c17d-4782-a6cd-6dd8a1dcdc2c" providerId="ADAL" clId="{A769DFB0-DDBA-4BBA-A9E9-53B3513C4E3E}" dt="2025-02-26T01:26:26.362" v="1098" actId="1076"/>
-          <ac:grpSpMkLst>
-            <pc:docMk/>
-            <pc:sldMk cId="340494126" sldId="257"/>
-            <ac:grpSpMk id="457" creationId="{427D1DF0-7F5A-D659-3F67-0B14117778FA}"/>
-          </ac:grpSpMkLst>
-        </pc:grpChg>
-        <pc:grpChg chg="add mod">
-          <ac:chgData name="Hou, Bowen" userId="cbd36780-c17d-4782-a6cd-6dd8a1dcdc2c" providerId="ADAL" clId="{A769DFB0-DDBA-4BBA-A9E9-53B3513C4E3E}" dt="2025-02-26T01:31:59.627" v="1167" actId="207"/>
-          <ac:grpSpMkLst>
-            <pc:docMk/>
-            <pc:sldMk cId="340494126" sldId="257"/>
-            <ac:grpSpMk id="484" creationId="{12AE39A6-707E-3158-92C5-0BB04813F6B4}"/>
-          </ac:grpSpMkLst>
-        </pc:grpChg>
-        <pc:grpChg chg="add mod">
-          <ac:chgData name="Hou, Bowen" userId="cbd36780-c17d-4782-a6cd-6dd8a1dcdc2c" providerId="ADAL" clId="{A769DFB0-DDBA-4BBA-A9E9-53B3513C4E3E}" dt="2025-02-26T01:11:38.588" v="688" actId="164"/>
-          <ac:grpSpMkLst>
-            <pc:docMk/>
-            <pc:sldMk cId="340494126" sldId="257"/>
-            <ac:grpSpMk id="485" creationId="{ADDB355E-D799-E1B8-D563-5858F8F99314}"/>
-          </ac:grpSpMkLst>
-        </pc:grpChg>
-        <pc:grpChg chg="add mod">
-          <ac:chgData name="Hou, Bowen" userId="cbd36780-c17d-4782-a6cd-6dd8a1dcdc2c" providerId="ADAL" clId="{A769DFB0-DDBA-4BBA-A9E9-53B3513C4E3E}" dt="2025-02-26T01:31:59.627" v="1167" actId="207"/>
-          <ac:grpSpMkLst>
-            <pc:docMk/>
-            <pc:sldMk cId="340494126" sldId="257"/>
-            <ac:grpSpMk id="496" creationId="{F65FED54-5EAB-666F-D523-ABB1D12B7695}"/>
-          </ac:grpSpMkLst>
-        </pc:grpChg>
-        <pc:grpChg chg="add del mod">
-          <ac:chgData name="Hou, Bowen" userId="cbd36780-c17d-4782-a6cd-6dd8a1dcdc2c" providerId="ADAL" clId="{A769DFB0-DDBA-4BBA-A9E9-53B3513C4E3E}" dt="2025-02-26T01:22:50.007" v="872" actId="478"/>
-          <ac:grpSpMkLst>
-            <pc:docMk/>
-            <pc:sldMk cId="340494126" sldId="257"/>
-            <ac:grpSpMk id="510" creationId="{A1FA2C41-4359-E0E1-4E4A-A7A752A8C816}"/>
-          </ac:grpSpMkLst>
-        </pc:grpChg>
         <pc:picChg chg="mod">
           <ac:chgData name="Hou, Bowen" userId="cbd36780-c17d-4782-a6cd-6dd8a1dcdc2c" providerId="ADAL" clId="{A769DFB0-DDBA-4BBA-A9E9-53B3513C4E3E}" dt="2025-02-26T02:01:44.036" v="1484" actId="1076"/>
           <ac:picMkLst>
@@ -1457,44 +712,12 @@
             <ac:picMk id="376" creationId="{8ADF1106-A16C-F553-5C85-DA398D3008FA}"/>
           </ac:picMkLst>
         </pc:picChg>
-        <pc:cxnChg chg="del mod">
-          <ac:chgData name="Hou, Bowen" userId="cbd36780-c17d-4782-a6cd-6dd8a1dcdc2c" providerId="ADAL" clId="{A769DFB0-DDBA-4BBA-A9E9-53B3513C4E3E}" dt="2025-02-26T00:51:14.534" v="86" actId="478"/>
-          <ac:cxnSpMkLst>
-            <pc:docMk/>
-            <pc:sldMk cId="340494126" sldId="257"/>
-            <ac:cxnSpMk id="4" creationId="{DBA78B91-A67A-F8A5-FF22-4103FC6ED99C}"/>
-          </ac:cxnSpMkLst>
-        </pc:cxnChg>
-        <pc:cxnChg chg="del mod">
-          <ac:chgData name="Hou, Bowen" userId="cbd36780-c17d-4782-a6cd-6dd8a1dcdc2c" providerId="ADAL" clId="{A769DFB0-DDBA-4BBA-A9E9-53B3513C4E3E}" dt="2025-02-26T01:45:07.840" v="1274" actId="478"/>
-          <ac:cxnSpMkLst>
-            <pc:docMk/>
-            <pc:sldMk cId="340494126" sldId="257"/>
-            <ac:cxnSpMk id="44" creationId="{66731AEF-24A9-3031-50EB-31D78AF2A853}"/>
-          </ac:cxnSpMkLst>
-        </pc:cxnChg>
-        <pc:cxnChg chg="del mod">
-          <ac:chgData name="Hou, Bowen" userId="cbd36780-c17d-4782-a6cd-6dd8a1dcdc2c" providerId="ADAL" clId="{A769DFB0-DDBA-4BBA-A9E9-53B3513C4E3E}" dt="2025-02-26T01:45:07.840" v="1274" actId="478"/>
-          <ac:cxnSpMkLst>
-            <pc:docMk/>
-            <pc:sldMk cId="340494126" sldId="257"/>
-            <ac:cxnSpMk id="45" creationId="{69B95CF9-B93F-ED3A-A5DB-268D62AF9F8D}"/>
-          </ac:cxnSpMkLst>
-        </pc:cxnChg>
         <pc:cxnChg chg="mod">
           <ac:chgData name="Hou, Bowen" userId="cbd36780-c17d-4782-a6cd-6dd8a1dcdc2c" providerId="ADAL" clId="{A769DFB0-DDBA-4BBA-A9E9-53B3513C4E3E}" dt="2025-02-26T00:50:08.508" v="64" actId="14100"/>
           <ac:cxnSpMkLst>
             <pc:docMk/>
             <pc:sldMk cId="340494126" sldId="257"/>
             <ac:cxnSpMk id="78" creationId="{C03D7238-8C22-E04F-ADD7-AADC4E9B89D8}"/>
-          </ac:cxnSpMkLst>
-        </pc:cxnChg>
-        <pc:cxnChg chg="add mod">
-          <ac:chgData name="Hou, Bowen" userId="cbd36780-c17d-4782-a6cd-6dd8a1dcdc2c" providerId="ADAL" clId="{A769DFB0-DDBA-4BBA-A9E9-53B3513C4E3E}" dt="2025-02-26T01:40:10.609" v="1181" actId="164"/>
-          <ac:cxnSpMkLst>
-            <pc:docMk/>
-            <pc:sldMk cId="340494126" sldId="257"/>
-            <ac:cxnSpMk id="120" creationId="{398AAE92-6886-7F04-CD95-5FF7DF7642EB}"/>
           </ac:cxnSpMkLst>
         </pc:cxnChg>
         <pc:cxnChg chg="add mod">
@@ -1617,14 +840,6 @@
             <ac:cxnSpMk id="452" creationId="{A792E9DD-0246-79FD-B44A-371B65FEBC7A}"/>
           </ac:cxnSpMkLst>
         </pc:cxnChg>
-        <pc:cxnChg chg="add del">
-          <ac:chgData name="Hou, Bowen" userId="cbd36780-c17d-4782-a6cd-6dd8a1dcdc2c" providerId="ADAL" clId="{A769DFB0-DDBA-4BBA-A9E9-53B3513C4E3E}" dt="2025-02-26T00:57:47.799" v="214" actId="478"/>
-          <ac:cxnSpMkLst>
-            <pc:docMk/>
-            <pc:sldMk cId="340494126" sldId="257"/>
-            <ac:cxnSpMk id="459" creationId="{BF6045F8-F3EE-8884-9B4F-FA7D5A9DF15B}"/>
-          </ac:cxnSpMkLst>
-        </pc:cxnChg>
         <pc:cxnChg chg="mod">
           <ac:chgData name="Hou, Bowen" userId="cbd36780-c17d-4782-a6cd-6dd8a1dcdc2c" providerId="ADAL" clId="{A769DFB0-DDBA-4BBA-A9E9-53B3513C4E3E}" dt="2025-02-26T00:56:27.777" v="180" actId="14100"/>
           <ac:cxnSpMkLst>
@@ -1671,14 +886,6 @@
             <pc:docMk/>
             <pc:sldMk cId="340494126" sldId="257"/>
             <ac:cxnSpMk id="505" creationId="{31A2EABF-2F51-5B11-812B-BC858CCA92D1}"/>
-          </ac:cxnSpMkLst>
-        </pc:cxnChg>
-        <pc:cxnChg chg="del mod">
-          <ac:chgData name="Hou, Bowen" userId="cbd36780-c17d-4782-a6cd-6dd8a1dcdc2c" providerId="ADAL" clId="{A769DFB0-DDBA-4BBA-A9E9-53B3513C4E3E}" dt="2025-02-26T01:18:23.136" v="792" actId="478"/>
-          <ac:cxnSpMkLst>
-            <pc:docMk/>
-            <pc:sldMk cId="340494126" sldId="257"/>
-            <ac:cxnSpMk id="511" creationId="{67AFA3D8-1061-B816-4AF0-84DE437E62E2}"/>
           </ac:cxnSpMkLst>
         </pc:cxnChg>
       </pc:sldChg>
@@ -1688,22 +895,6 @@
           <pc:docMk/>
           <pc:sldMk cId="3169227195" sldId="258"/>
         </pc:sldMkLst>
-        <pc:spChg chg="del">
-          <ac:chgData name="Hou, Bowen" userId="cbd36780-c17d-4782-a6cd-6dd8a1dcdc2c" providerId="ADAL" clId="{A769DFB0-DDBA-4BBA-A9E9-53B3513C4E3E}" dt="2025-02-26T01:40:16.877" v="1184" actId="478"/>
-          <ac:spMkLst>
-            <pc:docMk/>
-            <pc:sldMk cId="3169227195" sldId="258"/>
-            <ac:spMk id="2" creationId="{DB1965DA-0193-50A7-4370-F742E7922AD4}"/>
-          </ac:spMkLst>
-        </pc:spChg>
-        <pc:spChg chg="del">
-          <ac:chgData name="Hou, Bowen" userId="cbd36780-c17d-4782-a6cd-6dd8a1dcdc2c" providerId="ADAL" clId="{A769DFB0-DDBA-4BBA-A9E9-53B3513C4E3E}" dt="2025-02-26T01:40:16.877" v="1184" actId="478"/>
-          <ac:spMkLst>
-            <pc:docMk/>
-            <pc:sldMk cId="3169227195" sldId="258"/>
-            <ac:spMk id="3" creationId="{581209D4-009D-10F6-161F-182A3EABBA90}"/>
-          </ac:spMkLst>
-        </pc:spChg>
         <pc:spChg chg="add mod">
           <ac:chgData name="Hou, Bowen" userId="cbd36780-c17d-4782-a6cd-6dd8a1dcdc2c" providerId="ADAL" clId="{A769DFB0-DDBA-4BBA-A9E9-53B3513C4E3E}" dt="2025-02-26T02:49:13.023" v="2721" actId="1076"/>
           <ac:spMkLst>
@@ -1808,14 +999,6 @@
             <ac:spMk id="32" creationId="{D27E7ECA-41AB-770F-2F5C-3647E73D80C8}"/>
           </ac:spMkLst>
         </pc:spChg>
-        <pc:spChg chg="add del mod">
-          <ac:chgData name="Hou, Bowen" userId="cbd36780-c17d-4782-a6cd-6dd8a1dcdc2c" providerId="ADAL" clId="{A769DFB0-DDBA-4BBA-A9E9-53B3513C4E3E}" dt="2025-02-26T02:34:56.007" v="2510" actId="478"/>
-          <ac:spMkLst>
-            <pc:docMk/>
-            <pc:sldMk cId="3169227195" sldId="258"/>
-            <ac:spMk id="34" creationId="{A3FB6EB4-8C2A-3995-1F14-504F18C186A8}"/>
-          </ac:spMkLst>
-        </pc:spChg>
         <pc:spChg chg="add mod">
           <ac:chgData name="Hou, Bowen" userId="cbd36780-c17d-4782-a6cd-6dd8a1dcdc2c" providerId="ADAL" clId="{A769DFB0-DDBA-4BBA-A9E9-53B3513C4E3E}" dt="2025-02-26T02:49:19.406" v="2722" actId="1076"/>
           <ac:spMkLst>
@@ -1832,14 +1015,6 @@
             <ac:spMk id="38" creationId="{B25DBE3D-7A2D-E471-5370-71D5EFF98E83}"/>
           </ac:spMkLst>
         </pc:spChg>
-        <pc:spChg chg="del mod">
-          <ac:chgData name="Hou, Bowen" userId="cbd36780-c17d-4782-a6cd-6dd8a1dcdc2c" providerId="ADAL" clId="{A769DFB0-DDBA-4BBA-A9E9-53B3513C4E3E}" dt="2025-02-26T02:40:01.045" v="2604" actId="478"/>
-          <ac:spMkLst>
-            <pc:docMk/>
-            <pc:sldMk cId="3169227195" sldId="258"/>
-            <ac:spMk id="45" creationId="{7D923116-4B5A-23BA-79FA-283DB88CEC3D}"/>
-          </ac:spMkLst>
-        </pc:spChg>
         <pc:spChg chg="add mod">
           <ac:chgData name="Hou, Bowen" userId="cbd36780-c17d-4782-a6cd-6dd8a1dcdc2c" providerId="ADAL" clId="{A769DFB0-DDBA-4BBA-A9E9-53B3513C4E3E}" dt="2025-02-26T02:46:55.839" v="2670" actId="1076"/>
           <ac:spMkLst>
@@ -1857,38 +1032,6 @@
           </ac:spMkLst>
         </pc:spChg>
         <pc:spChg chg="mod">
-          <ac:chgData name="Hou, Bowen" userId="cbd36780-c17d-4782-a6cd-6dd8a1dcdc2c" providerId="ADAL" clId="{A769DFB0-DDBA-4BBA-A9E9-53B3513C4E3E}" dt="2025-02-26T02:41:48.035" v="2612" actId="1076"/>
-          <ac:spMkLst>
-            <pc:docMk/>
-            <pc:sldMk cId="3169227195" sldId="258"/>
-            <ac:spMk id="50" creationId="{18C69A1E-199F-0226-10AF-7D5811FAE004}"/>
-          </ac:spMkLst>
-        </pc:spChg>
-        <pc:spChg chg="mod">
-          <ac:chgData name="Hou, Bowen" userId="cbd36780-c17d-4782-a6cd-6dd8a1dcdc2c" providerId="ADAL" clId="{A769DFB0-DDBA-4BBA-A9E9-53B3513C4E3E}" dt="2025-02-26T02:41:45.152" v="2611" actId="20577"/>
-          <ac:spMkLst>
-            <pc:docMk/>
-            <pc:sldMk cId="3169227195" sldId="258"/>
-            <ac:spMk id="51" creationId="{5A40989D-56B3-303E-2660-DC5F699B84FC}"/>
-          </ac:spMkLst>
-        </pc:spChg>
-        <pc:spChg chg="mod">
-          <ac:chgData name="Hou, Bowen" userId="cbd36780-c17d-4782-a6cd-6dd8a1dcdc2c" providerId="ADAL" clId="{A769DFB0-DDBA-4BBA-A9E9-53B3513C4E3E}" dt="2025-02-26T02:41:45.152" v="2611" actId="20577"/>
-          <ac:spMkLst>
-            <pc:docMk/>
-            <pc:sldMk cId="3169227195" sldId="258"/>
-            <ac:spMk id="52" creationId="{C2AEF4B0-27F5-C57A-DB9F-549A317E4142}"/>
-          </ac:spMkLst>
-        </pc:spChg>
-        <pc:spChg chg="del mod topLvl">
-          <ac:chgData name="Hou, Bowen" userId="cbd36780-c17d-4782-a6cd-6dd8a1dcdc2c" providerId="ADAL" clId="{A769DFB0-DDBA-4BBA-A9E9-53B3513C4E3E}" dt="2025-02-26T02:45:09.048" v="2632" actId="478"/>
-          <ac:spMkLst>
-            <pc:docMk/>
-            <pc:sldMk cId="3169227195" sldId="258"/>
-            <ac:spMk id="55" creationId="{8B56AB2C-087E-FD02-6840-336B28C28F41}"/>
-          </ac:spMkLst>
-        </pc:spChg>
-        <pc:spChg chg="mod">
           <ac:chgData name="Hou, Bowen" userId="cbd36780-c17d-4782-a6cd-6dd8a1dcdc2c" providerId="ADAL" clId="{A769DFB0-DDBA-4BBA-A9E9-53B3513C4E3E}" dt="2025-02-26T02:44:32.907" v="2622" actId="207"/>
           <ac:spMkLst>
             <pc:docMk/>
@@ -1912,14 +1055,6 @@
             <ac:spMk id="58" creationId="{3CACC550-6486-4737-4234-96D3CA9AF61A}"/>
           </ac:spMkLst>
         </pc:spChg>
-        <pc:spChg chg="del mod">
-          <ac:chgData name="Hou, Bowen" userId="cbd36780-c17d-4782-a6cd-6dd8a1dcdc2c" providerId="ADAL" clId="{A769DFB0-DDBA-4BBA-A9E9-53B3513C4E3E}" dt="2025-02-26T02:57:43.670" v="2852" actId="478"/>
-          <ac:spMkLst>
-            <pc:docMk/>
-            <pc:sldMk cId="3169227195" sldId="258"/>
-            <ac:spMk id="60" creationId="{4B981C4C-E183-3A64-53F2-10134C4BAE00}"/>
-          </ac:spMkLst>
-        </pc:spChg>
         <pc:spChg chg="add mod">
           <ac:chgData name="Hou, Bowen" userId="cbd36780-c17d-4782-a6cd-6dd8a1dcdc2c" providerId="ADAL" clId="{A769DFB0-DDBA-4BBA-A9E9-53B3513C4E3E}" dt="2025-02-26T02:52:46.134" v="2767" actId="164"/>
           <ac:spMkLst>
@@ -2024,14 +1159,6 @@
             <ac:spMk id="84" creationId="{660923C6-0219-D843-2DE2-742F6A744BC8}"/>
           </ac:spMkLst>
         </pc:spChg>
-        <pc:spChg chg="del mod">
-          <ac:chgData name="Hou, Bowen" userId="cbd36780-c17d-4782-a6cd-6dd8a1dcdc2c" providerId="ADAL" clId="{A769DFB0-DDBA-4BBA-A9E9-53B3513C4E3E}" dt="2025-02-26T02:11:28.314" v="1651" actId="478"/>
-          <ac:spMkLst>
-            <pc:docMk/>
-            <pc:sldMk cId="3169227195" sldId="258"/>
-            <ac:spMk id="86" creationId="{E507E9F2-ACDC-73BE-A51B-81BDD52657E9}"/>
-          </ac:spMkLst>
-        </pc:spChg>
         <pc:spChg chg="mod">
           <ac:chgData name="Hou, Bowen" userId="cbd36780-c17d-4782-a6cd-6dd8a1dcdc2c" providerId="ADAL" clId="{A769DFB0-DDBA-4BBA-A9E9-53B3513C4E3E}" dt="2025-02-26T02:18:58.826" v="1792" actId="165"/>
           <ac:spMkLst>
@@ -2073,75 +1200,11 @@
           </ac:spMkLst>
         </pc:spChg>
         <pc:spChg chg="mod">
-          <ac:chgData name="Hou, Bowen" userId="cbd36780-c17d-4782-a6cd-6dd8a1dcdc2c" providerId="ADAL" clId="{A769DFB0-DDBA-4BBA-A9E9-53B3513C4E3E}" dt="2025-02-26T02:35:52.374" v="2521"/>
-          <ac:spMkLst>
-            <pc:docMk/>
-            <pc:sldMk cId="3169227195" sldId="258"/>
-            <ac:spMk id="448" creationId="{6773B82F-7EFE-B7D5-6270-D1BEFD05DAD3}"/>
-          </ac:spMkLst>
-        </pc:spChg>
-        <pc:spChg chg="mod">
-          <ac:chgData name="Hou, Bowen" userId="cbd36780-c17d-4782-a6cd-6dd8a1dcdc2c" providerId="ADAL" clId="{A769DFB0-DDBA-4BBA-A9E9-53B3513C4E3E}" dt="2025-02-26T02:35:52.374" v="2521"/>
-          <ac:spMkLst>
-            <pc:docMk/>
-            <pc:sldMk cId="3169227195" sldId="258"/>
-            <ac:spMk id="450" creationId="{3B324B81-3F0D-6203-0CF3-D7AE2BB7C843}"/>
-          </ac:spMkLst>
-        </pc:spChg>
-        <pc:spChg chg="del mod">
-          <ac:chgData name="Hou, Bowen" userId="cbd36780-c17d-4782-a6cd-6dd8a1dcdc2c" providerId="ADAL" clId="{A769DFB0-DDBA-4BBA-A9E9-53B3513C4E3E}" dt="2025-02-26T02:50:49.791" v="2729" actId="478"/>
-          <ac:spMkLst>
-            <pc:docMk/>
-            <pc:sldMk cId="3169227195" sldId="258"/>
-            <ac:spMk id="451" creationId="{FCD52A93-F222-36CB-8335-9C5C594C368C}"/>
-          </ac:spMkLst>
-        </pc:spChg>
-        <pc:spChg chg="mod">
           <ac:chgData name="Hou, Bowen" userId="cbd36780-c17d-4782-a6cd-6dd8a1dcdc2c" providerId="ADAL" clId="{A769DFB0-DDBA-4BBA-A9E9-53B3513C4E3E}" dt="2025-02-26T02:54:11.127" v="2808" actId="1076"/>
           <ac:spMkLst>
             <pc:docMk/>
             <pc:sldMk cId="3169227195" sldId="258"/>
             <ac:spMk id="457" creationId="{A0736324-BAAE-5E7C-6EF7-9651A504355C}"/>
-          </ac:spMkLst>
-        </pc:spChg>
-        <pc:spChg chg="add del mod">
-          <ac:chgData name="Hou, Bowen" userId="cbd36780-c17d-4782-a6cd-6dd8a1dcdc2c" providerId="ADAL" clId="{A769DFB0-DDBA-4BBA-A9E9-53B3513C4E3E}" dt="2025-02-26T02:50:49.791" v="2729" actId="478"/>
-          <ac:spMkLst>
-            <pc:docMk/>
-            <pc:sldMk cId="3169227195" sldId="258"/>
-            <ac:spMk id="458" creationId="{FB419CE6-40C0-F460-2564-1F7B51D91292}"/>
-          </ac:spMkLst>
-        </pc:spChg>
-        <pc:spChg chg="mod">
-          <ac:chgData name="Hou, Bowen" userId="cbd36780-c17d-4782-a6cd-6dd8a1dcdc2c" providerId="ADAL" clId="{A769DFB0-DDBA-4BBA-A9E9-53B3513C4E3E}" dt="2025-02-26T02:35:52.374" v="2521"/>
-          <ac:spMkLst>
-            <pc:docMk/>
-            <pc:sldMk cId="3169227195" sldId="258"/>
-            <ac:spMk id="463" creationId="{1C04C423-B249-5C58-E5E9-D9E69A624762}"/>
-          </ac:spMkLst>
-        </pc:spChg>
-        <pc:spChg chg="del">
-          <ac:chgData name="Hou, Bowen" userId="cbd36780-c17d-4782-a6cd-6dd8a1dcdc2c" providerId="ADAL" clId="{A769DFB0-DDBA-4BBA-A9E9-53B3513C4E3E}" dt="2025-02-26T02:51:36.802" v="2744" actId="478"/>
-          <ac:spMkLst>
-            <pc:docMk/>
-            <pc:sldMk cId="3169227195" sldId="258"/>
-            <ac:spMk id="470" creationId="{681A6B04-FEB3-6F30-A3AC-4A1C487DB839}"/>
-          </ac:spMkLst>
-        </pc:spChg>
-        <pc:spChg chg="mod">
-          <ac:chgData name="Hou, Bowen" userId="cbd36780-c17d-4782-a6cd-6dd8a1dcdc2c" providerId="ADAL" clId="{A769DFB0-DDBA-4BBA-A9E9-53B3513C4E3E}" dt="2025-02-26T02:35:52.374" v="2521"/>
-          <ac:spMkLst>
-            <pc:docMk/>
-            <pc:sldMk cId="3169227195" sldId="258"/>
-            <ac:spMk id="479" creationId="{C58B734E-624F-546A-0E79-C9A1D27DDF69}"/>
-          </ac:spMkLst>
-        </pc:spChg>
-        <pc:spChg chg="mod">
-          <ac:chgData name="Hou, Bowen" userId="cbd36780-c17d-4782-a6cd-6dd8a1dcdc2c" providerId="ADAL" clId="{A769DFB0-DDBA-4BBA-A9E9-53B3513C4E3E}" dt="2025-02-26T02:35:52.374" v="2521"/>
-          <ac:spMkLst>
-            <pc:docMk/>
-            <pc:sldMk cId="3169227195" sldId="258"/>
-            <ac:spMk id="480" creationId="{59B51E72-0AD8-A7C3-013E-6FE80F389271}"/>
           </ac:spMkLst>
         </pc:spChg>
         <pc:spChg chg="mod">
@@ -2200,28 +1263,12 @@
             <ac:spMk id="494" creationId="{BA6ECD76-1FEF-5029-2979-8B5376B088C2}"/>
           </ac:spMkLst>
         </pc:spChg>
-        <pc:spChg chg="del mod">
-          <ac:chgData name="Hou, Bowen" userId="cbd36780-c17d-4782-a6cd-6dd8a1dcdc2c" providerId="ADAL" clId="{A769DFB0-DDBA-4BBA-A9E9-53B3513C4E3E}" dt="2025-02-26T02:15:23.960" v="1726" actId="478"/>
-          <ac:spMkLst>
-            <pc:docMk/>
-            <pc:sldMk cId="3169227195" sldId="258"/>
-            <ac:spMk id="495" creationId="{23F934A7-EFF2-86C0-D99E-66B10007AFB6}"/>
-          </ac:spMkLst>
-        </pc:spChg>
         <pc:spChg chg="add mod">
           <ac:chgData name="Hou, Bowen" userId="cbd36780-c17d-4782-a6cd-6dd8a1dcdc2c" providerId="ADAL" clId="{A769DFB0-DDBA-4BBA-A9E9-53B3513C4E3E}" dt="2025-02-26T02:45:26.169" v="2644" actId="1076"/>
           <ac:spMkLst>
             <pc:docMk/>
             <pc:sldMk cId="3169227195" sldId="258"/>
             <ac:spMk id="497" creationId="{7BEFD6E0-6CB4-B074-CFB4-03E56AFD9283}"/>
-          </ac:spMkLst>
-        </pc:spChg>
-        <pc:spChg chg="del mod">
-          <ac:chgData name="Hou, Bowen" userId="cbd36780-c17d-4782-a6cd-6dd8a1dcdc2c" providerId="ADAL" clId="{A769DFB0-DDBA-4BBA-A9E9-53B3513C4E3E}" dt="2025-02-26T02:53:21.007" v="2778" actId="478"/>
-          <ac:spMkLst>
-            <pc:docMk/>
-            <pc:sldMk cId="3169227195" sldId="258"/>
-            <ac:spMk id="499" creationId="{90627618-B5D6-5FFF-5A78-A8285925B664}"/>
           </ac:spMkLst>
         </pc:spChg>
         <pc:spChg chg="add mod">
@@ -2248,14 +1295,6 @@
             <ac:spMk id="504" creationId="{01EA5C54-D87C-BC43-804C-DB23FFB4CF1F}"/>
           </ac:spMkLst>
         </pc:spChg>
-        <pc:spChg chg="del mod">
-          <ac:chgData name="Hou, Bowen" userId="cbd36780-c17d-4782-a6cd-6dd8a1dcdc2c" providerId="ADAL" clId="{A769DFB0-DDBA-4BBA-A9E9-53B3513C4E3E}" dt="2025-02-26T02:15:16.551" v="1724" actId="478"/>
-          <ac:spMkLst>
-            <pc:docMk/>
-            <pc:sldMk cId="3169227195" sldId="258"/>
-            <ac:spMk id="508" creationId="{669C178F-81E2-82ED-C1B6-20C1BB25981A}"/>
-          </ac:spMkLst>
-        </pc:spChg>
         <pc:spChg chg="mod">
           <ac:chgData name="Hou, Bowen" userId="cbd36780-c17d-4782-a6cd-6dd8a1dcdc2c" providerId="ADAL" clId="{A769DFB0-DDBA-4BBA-A9E9-53B3513C4E3E}" dt="2025-02-26T02:51:12.820" v="2736" actId="207"/>
           <ac:spMkLst>
@@ -2312,52 +1351,12 @@
             <ac:grpSpMk id="23" creationId="{1D1ED68E-4274-BAFD-607C-F7683BC902C7}"/>
           </ac:grpSpMkLst>
         </pc:grpChg>
-        <pc:grpChg chg="add mod">
-          <ac:chgData name="Hou, Bowen" userId="cbd36780-c17d-4782-a6cd-6dd8a1dcdc2c" providerId="ADAL" clId="{A769DFB0-DDBA-4BBA-A9E9-53B3513C4E3E}" dt="2025-02-26T02:18:10.842" v="1779" actId="164"/>
-          <ac:grpSpMkLst>
-            <pc:docMk/>
-            <pc:sldMk cId="3169227195" sldId="258"/>
-            <ac:grpSpMk id="29" creationId="{44226068-DFDE-6835-1612-E647230D206F}"/>
-          </ac:grpSpMkLst>
-        </pc:grpChg>
-        <pc:grpChg chg="del mod">
-          <ac:chgData name="Hou, Bowen" userId="cbd36780-c17d-4782-a6cd-6dd8a1dcdc2c" providerId="ADAL" clId="{A769DFB0-DDBA-4BBA-A9E9-53B3513C4E3E}" dt="2025-02-26T02:53:19.213" v="2777" actId="478"/>
-          <ac:grpSpMkLst>
-            <pc:docMk/>
-            <pc:sldMk cId="3169227195" sldId="258"/>
-            <ac:grpSpMk id="47" creationId="{CDDA177D-E6AC-88B6-9E9C-DAC663CC349B}"/>
-          </ac:grpSpMkLst>
-        </pc:grpChg>
-        <pc:grpChg chg="mod">
-          <ac:chgData name="Hou, Bowen" userId="cbd36780-c17d-4782-a6cd-6dd8a1dcdc2c" providerId="ADAL" clId="{A769DFB0-DDBA-4BBA-A9E9-53B3513C4E3E}" dt="2025-02-26T02:41:45.152" v="2611" actId="20577"/>
-          <ac:grpSpMkLst>
-            <pc:docMk/>
-            <pc:sldMk cId="3169227195" sldId="258"/>
-            <ac:grpSpMk id="48" creationId="{5A791D11-6008-F218-FEC7-8ACC6356725D}"/>
-          </ac:grpSpMkLst>
-        </pc:grpChg>
-        <pc:grpChg chg="del mod">
-          <ac:chgData name="Hou, Bowen" userId="cbd36780-c17d-4782-a6cd-6dd8a1dcdc2c" providerId="ADAL" clId="{A769DFB0-DDBA-4BBA-A9E9-53B3513C4E3E}" dt="2025-02-26T02:42:53.955" v="2617" actId="165"/>
-          <ac:grpSpMkLst>
-            <pc:docMk/>
-            <pc:sldMk cId="3169227195" sldId="258"/>
-            <ac:grpSpMk id="53" creationId="{844A199C-18C9-ABCF-FEE1-F642B35D0821}"/>
-          </ac:grpSpMkLst>
-        </pc:grpChg>
         <pc:grpChg chg="mod topLvl">
           <ac:chgData name="Hou, Bowen" userId="cbd36780-c17d-4782-a6cd-6dd8a1dcdc2c" providerId="ADAL" clId="{A769DFB0-DDBA-4BBA-A9E9-53B3513C4E3E}" dt="2025-02-26T02:45:26.169" v="2644" actId="1076"/>
           <ac:grpSpMkLst>
             <pc:docMk/>
             <pc:sldMk cId="3169227195" sldId="258"/>
             <ac:grpSpMk id="54" creationId="{5361743B-CEED-A47C-286E-8EA50EAD251F}"/>
-          </ac:grpSpMkLst>
-        </pc:grpChg>
-        <pc:grpChg chg="del mod">
-          <ac:chgData name="Hou, Bowen" userId="cbd36780-c17d-4782-a6cd-6dd8a1dcdc2c" providerId="ADAL" clId="{A769DFB0-DDBA-4BBA-A9E9-53B3513C4E3E}" dt="2025-02-26T02:53:19.213" v="2777" actId="478"/>
-          <ac:grpSpMkLst>
-            <pc:docMk/>
-            <pc:sldMk cId="3169227195" sldId="258"/>
-            <ac:grpSpMk id="62" creationId="{F2E5DCC1-0606-DB6D-F0AF-4EE0FC840734}"/>
           </ac:grpSpMkLst>
         </pc:grpChg>
         <pc:grpChg chg="mod">
@@ -2385,59 +1384,11 @@
           </ac:grpSpMkLst>
         </pc:grpChg>
         <pc:grpChg chg="mod">
-          <ac:chgData name="Hou, Bowen" userId="cbd36780-c17d-4782-a6cd-6dd8a1dcdc2c" providerId="ADAL" clId="{A769DFB0-DDBA-4BBA-A9E9-53B3513C4E3E}" dt="2025-02-26T02:10:59.520" v="1641" actId="1076"/>
-          <ac:grpSpMkLst>
-            <pc:docMk/>
-            <pc:sldMk cId="3169227195" sldId="258"/>
-            <ac:grpSpMk id="85" creationId="{2B77C1B0-F5CA-2D47-DC24-B0B02CB5833E}"/>
-          </ac:grpSpMkLst>
-        </pc:grpChg>
-        <pc:grpChg chg="mod">
           <ac:chgData name="Hou, Bowen" userId="cbd36780-c17d-4782-a6cd-6dd8a1dcdc2c" providerId="ADAL" clId="{A769DFB0-DDBA-4BBA-A9E9-53B3513C4E3E}" dt="2025-02-26T02:34:59.908" v="2511" actId="1076"/>
           <ac:grpSpMkLst>
             <pc:docMk/>
             <pc:sldMk cId="3169227195" sldId="258"/>
             <ac:grpSpMk id="118" creationId="{A28C57C4-760C-DCDA-0FDD-BE29BFC2C970}"/>
-          </ac:grpSpMkLst>
-        </pc:grpChg>
-        <pc:grpChg chg="mod">
-          <ac:chgData name="Hou, Bowen" userId="cbd36780-c17d-4782-a6cd-6dd8a1dcdc2c" providerId="ADAL" clId="{A769DFB0-DDBA-4BBA-A9E9-53B3513C4E3E}" dt="2025-02-26T02:11:42.713" v="1658" actId="1076"/>
-          <ac:grpSpMkLst>
-            <pc:docMk/>
-            <pc:sldMk cId="3169227195" sldId="258"/>
-            <ac:grpSpMk id="122" creationId="{EABA09EA-45E7-FF1A-B5CC-3E65B3545232}"/>
-          </ac:grpSpMkLst>
-        </pc:grpChg>
-        <pc:grpChg chg="mod">
-          <ac:chgData name="Hou, Bowen" userId="cbd36780-c17d-4782-a6cd-6dd8a1dcdc2c" providerId="ADAL" clId="{A769DFB0-DDBA-4BBA-A9E9-53B3513C4E3E}" dt="2025-02-26T01:46:11.796" v="1288" actId="1076"/>
-          <ac:grpSpMkLst>
-            <pc:docMk/>
-            <pc:sldMk cId="3169227195" sldId="258"/>
-            <ac:grpSpMk id="129" creationId="{4B6B2034-386F-36CC-6DAC-55FEBB33A37A}"/>
-          </ac:grpSpMkLst>
-        </pc:grpChg>
-        <pc:grpChg chg="del">
-          <ac:chgData name="Hou, Bowen" userId="cbd36780-c17d-4782-a6cd-6dd8a1dcdc2c" providerId="ADAL" clId="{A769DFB0-DDBA-4BBA-A9E9-53B3513C4E3E}" dt="2025-02-26T02:50:49.791" v="2729" actId="478"/>
-          <ac:grpSpMkLst>
-            <pc:docMk/>
-            <pc:sldMk cId="3169227195" sldId="258"/>
-            <ac:grpSpMk id="452" creationId="{78F79F85-16EF-D03F-B7D3-08E73AAFBC02}"/>
-          </ac:grpSpMkLst>
-        </pc:grpChg>
-        <pc:grpChg chg="del">
-          <ac:chgData name="Hou, Bowen" userId="cbd36780-c17d-4782-a6cd-6dd8a1dcdc2c" providerId="ADAL" clId="{A769DFB0-DDBA-4BBA-A9E9-53B3513C4E3E}" dt="2025-02-26T02:51:36.132" v="2743" actId="478"/>
-          <ac:grpSpMkLst>
-            <pc:docMk/>
-            <pc:sldMk cId="3169227195" sldId="258"/>
-            <ac:grpSpMk id="459" creationId="{AFCCFE50-7C05-930E-7EF1-22024500948B}"/>
-          </ac:grpSpMkLst>
-        </pc:grpChg>
-        <pc:grpChg chg="del">
-          <ac:chgData name="Hou, Bowen" userId="cbd36780-c17d-4782-a6cd-6dd8a1dcdc2c" providerId="ADAL" clId="{A769DFB0-DDBA-4BBA-A9E9-53B3513C4E3E}" dt="2025-02-26T02:51:45.349" v="2748" actId="478"/>
-          <ac:grpSpMkLst>
-            <pc:docMk/>
-            <pc:sldMk cId="3169227195" sldId="258"/>
-            <ac:grpSpMk id="472" creationId="{32C4304A-97BC-DD01-51A7-C43BD572544C}"/>
           </ac:grpSpMkLst>
         </pc:grpChg>
         <pc:grpChg chg="mod topLvl">
@@ -2456,14 +1407,6 @@
             <ac:grpSpMk id="485" creationId="{ADDB355E-D799-E1B8-D563-5858F8F99314}"/>
           </ac:grpSpMkLst>
         </pc:grpChg>
-        <pc:grpChg chg="del mod topLvl">
-          <ac:chgData name="Hou, Bowen" userId="cbd36780-c17d-4782-a6cd-6dd8a1dcdc2c" providerId="ADAL" clId="{A769DFB0-DDBA-4BBA-A9E9-53B3513C4E3E}" dt="2025-02-26T02:15:51.052" v="1733" actId="165"/>
-          <ac:grpSpMkLst>
-            <pc:docMk/>
-            <pc:sldMk cId="3169227195" sldId="258"/>
-            <ac:grpSpMk id="496" creationId="{F65FED54-5EAB-666F-D523-ABB1D12B7695}"/>
-          </ac:grpSpMkLst>
-        </pc:grpChg>
         <pc:grpChg chg="add mod">
           <ac:chgData name="Hou, Bowen" userId="cbd36780-c17d-4782-a6cd-6dd8a1dcdc2c" providerId="ADAL" clId="{A769DFB0-DDBA-4BBA-A9E9-53B3513C4E3E}" dt="2025-02-26T02:52:32.360" v="2763" actId="1076"/>
           <ac:grpSpMkLst>
@@ -2552,22 +1495,6 @@
             <ac:cxnSpMk id="59" creationId="{3C05421D-2F2A-38E7-32A8-6AD3896E213E}"/>
           </ac:cxnSpMkLst>
         </pc:cxnChg>
-        <pc:cxnChg chg="del mod">
-          <ac:chgData name="Hou, Bowen" userId="cbd36780-c17d-4782-a6cd-6dd8a1dcdc2c" providerId="ADAL" clId="{A769DFB0-DDBA-4BBA-A9E9-53B3513C4E3E}" dt="2025-02-26T02:53:19.213" v="2777" actId="478"/>
-          <ac:cxnSpMkLst>
-            <pc:docMk/>
-            <pc:sldMk cId="3169227195" sldId="258"/>
-            <ac:cxnSpMk id="61" creationId="{9F44259E-9217-DF9B-80FC-098046594F1C}"/>
-          </ac:cxnSpMkLst>
-        </pc:cxnChg>
-        <pc:cxnChg chg="add del mod">
-          <ac:chgData name="Hou, Bowen" userId="cbd36780-c17d-4782-a6cd-6dd8a1dcdc2c" providerId="ADAL" clId="{A769DFB0-DDBA-4BBA-A9E9-53B3513C4E3E}" dt="2025-02-26T02:51:55.143" v="2750" actId="478"/>
-          <ac:cxnSpMkLst>
-            <pc:docMk/>
-            <pc:sldMk cId="3169227195" sldId="258"/>
-            <ac:cxnSpMk id="65" creationId="{42FE1C74-110B-3E3D-B668-863555B9A95E}"/>
-          </ac:cxnSpMkLst>
-        </pc:cxnChg>
         <pc:cxnChg chg="add mod">
           <ac:chgData name="Hou, Bowen" userId="cbd36780-c17d-4782-a6cd-6dd8a1dcdc2c" providerId="ADAL" clId="{A769DFB0-DDBA-4BBA-A9E9-53B3513C4E3E}" dt="2025-02-26T02:52:46.134" v="2767" actId="164"/>
           <ac:cxnSpMkLst>
@@ -2584,44 +1511,12 @@
             <ac:cxnSpMk id="120" creationId="{398AAE92-6886-7F04-CD95-5FF7DF7642EB}"/>
           </ac:cxnSpMkLst>
         </pc:cxnChg>
-        <pc:cxnChg chg="del">
-          <ac:chgData name="Hou, Bowen" userId="cbd36780-c17d-4782-a6cd-6dd8a1dcdc2c" providerId="ADAL" clId="{A769DFB0-DDBA-4BBA-A9E9-53B3513C4E3E}" dt="2025-02-26T02:50:49.791" v="2729" actId="478"/>
-          <ac:cxnSpMkLst>
-            <pc:docMk/>
-            <pc:sldMk cId="3169227195" sldId="258"/>
-            <ac:cxnSpMk id="471" creationId="{731E9C6A-F978-7F1A-19E6-1675A71E0245}"/>
-          </ac:cxnSpMkLst>
-        </pc:cxnChg>
         <pc:cxnChg chg="mod">
           <ac:chgData name="Hou, Bowen" userId="cbd36780-c17d-4782-a6cd-6dd8a1dcdc2c" providerId="ADAL" clId="{A769DFB0-DDBA-4BBA-A9E9-53B3513C4E3E}" dt="2025-02-26T02:45:04.486" v="2628" actId="1076"/>
           <ac:cxnSpMkLst>
             <pc:docMk/>
             <pc:sldMk cId="3169227195" sldId="258"/>
             <ac:cxnSpMk id="490" creationId="{4AA2C425-7D64-A9C4-278F-E7D364C4D872}"/>
-          </ac:cxnSpMkLst>
-        </pc:cxnChg>
-        <pc:cxnChg chg="del mod">
-          <ac:chgData name="Hou, Bowen" userId="cbd36780-c17d-4782-a6cd-6dd8a1dcdc2c" providerId="ADAL" clId="{A769DFB0-DDBA-4BBA-A9E9-53B3513C4E3E}" dt="2025-02-26T02:45:06.091" v="2630" actId="478"/>
-          <ac:cxnSpMkLst>
-            <pc:docMk/>
-            <pc:sldMk cId="3169227195" sldId="258"/>
-            <ac:cxnSpMk id="491" creationId="{1870DA20-9154-6BC5-8028-413F98FB9560}"/>
-          </ac:cxnSpMkLst>
-        </pc:cxnChg>
-        <pc:cxnChg chg="del">
-          <ac:chgData name="Hou, Bowen" userId="cbd36780-c17d-4782-a6cd-6dd8a1dcdc2c" providerId="ADAL" clId="{A769DFB0-DDBA-4BBA-A9E9-53B3513C4E3E}" dt="2025-02-26T02:50:53.896" v="2730" actId="478"/>
-          <ac:cxnSpMkLst>
-            <pc:docMk/>
-            <pc:sldMk cId="3169227195" sldId="258"/>
-            <ac:cxnSpMk id="498" creationId="{CF8665F6-48CE-8343-120F-B06974F19E2F}"/>
-          </ac:cxnSpMkLst>
-        </pc:cxnChg>
-        <pc:cxnChg chg="del">
-          <ac:chgData name="Hou, Bowen" userId="cbd36780-c17d-4782-a6cd-6dd8a1dcdc2c" providerId="ADAL" clId="{A769DFB0-DDBA-4BBA-A9E9-53B3513C4E3E}" dt="2025-02-26T02:51:47.376" v="2749" actId="478"/>
-          <ac:cxnSpMkLst>
-            <pc:docMk/>
-            <pc:sldMk cId="3169227195" sldId="258"/>
-            <ac:cxnSpMk id="502" creationId="{884292CA-0DEF-3D9C-9012-8A3CF48BC25F}"/>
           </ac:cxnSpMkLst>
         </pc:cxnChg>
         <pc:cxnChg chg="mod">
@@ -2647,118 +1542,30 @@
           <pc:docMk/>
           <pc:sldMk cId="3255459302" sldId="259"/>
         </pc:sldMkLst>
-        <pc:spChg chg="del">
-          <ac:chgData name="Hou, Bowen" userId="cbd36780-c17d-4782-a6cd-6dd8a1dcdc2c" providerId="ADAL" clId="{A769DFB0-DDBA-4BBA-A9E9-53B3513C4E3E}" dt="2025-02-26T02:10:26.811" v="1629" actId="478"/>
-          <ac:spMkLst>
-            <pc:docMk/>
-            <pc:sldMk cId="3255459302" sldId="259"/>
-            <ac:spMk id="2" creationId="{280E8348-3DF9-C6A3-D14D-3C4DE77899C5}"/>
-          </ac:spMkLst>
-        </pc:spChg>
-        <pc:spChg chg="del">
-          <ac:chgData name="Hou, Bowen" userId="cbd36780-c17d-4782-a6cd-6dd8a1dcdc2c" providerId="ADAL" clId="{A769DFB0-DDBA-4BBA-A9E9-53B3513C4E3E}" dt="2025-02-26T02:10:26.811" v="1629" actId="478"/>
-          <ac:spMkLst>
-            <pc:docMk/>
-            <pc:sldMk cId="3255459302" sldId="259"/>
-            <ac:spMk id="3" creationId="{15A54784-1AC8-6211-CE17-49B0F5660C61}"/>
-          </ac:spMkLst>
-        </pc:spChg>
-        <pc:spChg chg="mod">
-          <ac:chgData name="Hou, Bowen" userId="cbd36780-c17d-4782-a6cd-6dd8a1dcdc2c" providerId="ADAL" clId="{A769DFB0-DDBA-4BBA-A9E9-53B3513C4E3E}" dt="2025-02-26T02:10:27.136" v="1630"/>
-          <ac:spMkLst>
-            <pc:docMk/>
-            <pc:sldMk cId="3255459302" sldId="259"/>
-            <ac:spMk id="10" creationId="{45747532-8674-E9A9-7DFA-2DCB4BE4EDB2}"/>
-          </ac:spMkLst>
-        </pc:spChg>
-        <pc:spChg chg="mod">
-          <ac:chgData name="Hou, Bowen" userId="cbd36780-c17d-4782-a6cd-6dd8a1dcdc2c" providerId="ADAL" clId="{A769DFB0-DDBA-4BBA-A9E9-53B3513C4E3E}" dt="2025-02-26T02:10:27.136" v="1630"/>
-          <ac:spMkLst>
-            <pc:docMk/>
-            <pc:sldMk cId="3255459302" sldId="259"/>
-            <ac:spMk id="11" creationId="{6D8240B0-B619-30BF-AE30-BE20E9987FB8}"/>
-          </ac:spMkLst>
-        </pc:spChg>
-        <pc:spChg chg="mod">
-          <ac:chgData name="Hou, Bowen" userId="cbd36780-c17d-4782-a6cd-6dd8a1dcdc2c" providerId="ADAL" clId="{A769DFB0-DDBA-4BBA-A9E9-53B3513C4E3E}" dt="2025-02-26T02:10:27.136" v="1630"/>
-          <ac:spMkLst>
-            <pc:docMk/>
-            <pc:sldMk cId="3255459302" sldId="259"/>
-            <ac:spMk id="13" creationId="{7091EA42-ED55-E6FF-03DD-9347855713EB}"/>
-          </ac:spMkLst>
-        </pc:spChg>
-        <pc:spChg chg="add mod">
-          <ac:chgData name="Hou, Bowen" userId="cbd36780-c17d-4782-a6cd-6dd8a1dcdc2c" providerId="ADAL" clId="{A769DFB0-DDBA-4BBA-A9E9-53B3513C4E3E}" dt="2025-02-26T02:10:27.136" v="1630"/>
-          <ac:spMkLst>
-            <pc:docMk/>
-            <pc:sldMk cId="3255459302" sldId="259"/>
-            <ac:spMk id="16" creationId="{06C78DC2-FF35-F70E-2F8D-A01C885BC912}"/>
-          </ac:spMkLst>
-        </pc:spChg>
-        <pc:spChg chg="mod">
-          <ac:chgData name="Hou, Bowen" userId="cbd36780-c17d-4782-a6cd-6dd8a1dcdc2c" providerId="ADAL" clId="{A769DFB0-DDBA-4BBA-A9E9-53B3513C4E3E}" dt="2025-02-26T02:10:27.136" v="1630"/>
-          <ac:spMkLst>
-            <pc:docMk/>
-            <pc:sldMk cId="3255459302" sldId="259"/>
-            <ac:spMk id="34" creationId="{C5880912-CD62-FCB8-342A-B48E08A8EF4F}"/>
-          </ac:spMkLst>
-        </pc:spChg>
-        <pc:spChg chg="mod">
-          <ac:chgData name="Hou, Bowen" userId="cbd36780-c17d-4782-a6cd-6dd8a1dcdc2c" providerId="ADAL" clId="{A769DFB0-DDBA-4BBA-A9E9-53B3513C4E3E}" dt="2025-02-26T02:10:27.136" v="1630"/>
-          <ac:spMkLst>
-            <pc:docMk/>
-            <pc:sldMk cId="3255459302" sldId="259"/>
-            <ac:spMk id="41" creationId="{6E67D38E-DC2C-888A-F34D-8E78AFECC846}"/>
-          </ac:spMkLst>
-        </pc:spChg>
-        <pc:spChg chg="mod">
-          <ac:chgData name="Hou, Bowen" userId="cbd36780-c17d-4782-a6cd-6dd8a1dcdc2c" providerId="ADAL" clId="{A769DFB0-DDBA-4BBA-A9E9-53B3513C4E3E}" dt="2025-02-26T02:10:27.136" v="1630"/>
-          <ac:spMkLst>
-            <pc:docMk/>
-            <pc:sldMk cId="3255459302" sldId="259"/>
-            <ac:spMk id="42" creationId="{546D087D-A080-419A-75E0-9B2A88F3A3B5}"/>
-          </ac:spMkLst>
-        </pc:spChg>
-        <pc:spChg chg="mod">
-          <ac:chgData name="Hou, Bowen" userId="cbd36780-c17d-4782-a6cd-6dd8a1dcdc2c" providerId="ADAL" clId="{A769DFB0-DDBA-4BBA-A9E9-53B3513C4E3E}" dt="2025-02-26T02:10:27.136" v="1630"/>
-          <ac:spMkLst>
-            <pc:docMk/>
-            <pc:sldMk cId="3255459302" sldId="259"/>
-            <ac:spMk id="43" creationId="{10A29D33-7642-0097-4B4F-DE3AA8F59810}"/>
-          </ac:spMkLst>
-        </pc:spChg>
-        <pc:spChg chg="add mod">
-          <ac:chgData name="Hou, Bowen" userId="cbd36780-c17d-4782-a6cd-6dd8a1dcdc2c" providerId="ADAL" clId="{A769DFB0-DDBA-4BBA-A9E9-53B3513C4E3E}" dt="2025-02-26T02:10:27.136" v="1630"/>
-          <ac:spMkLst>
-            <pc:docMk/>
-            <pc:sldMk cId="3255459302" sldId="259"/>
-            <ac:spMk id="44" creationId="{343B4219-C8A3-A411-41C8-B92C6F67A010}"/>
-          </ac:spMkLst>
-        </pc:spChg>
-        <pc:spChg chg="add mod">
-          <ac:chgData name="Hou, Bowen" userId="cbd36780-c17d-4782-a6cd-6dd8a1dcdc2c" providerId="ADAL" clId="{A769DFB0-DDBA-4BBA-A9E9-53B3513C4E3E}" dt="2025-02-26T02:10:27.136" v="1630"/>
-          <ac:spMkLst>
-            <pc:docMk/>
-            <pc:sldMk cId="3255459302" sldId="259"/>
-            <ac:spMk id="45" creationId="{3C0DCFB6-BCBC-51BE-B33B-BC0D67BA0C8F}"/>
-          </ac:spMkLst>
-        </pc:spChg>
       </pc:sldChg>
     </pc:docChg>
   </pc:docChgLst>
   <pc:docChgLst>
     <pc:chgData name="Hou, Bowen" userId="cbd36780-c17d-4782-a6cd-6dd8a1dcdc2c" providerId="ADAL" clId="{C9303CD7-D17E-4514-AC6E-4EFA4FDCDEDB}"/>
     <pc:docChg chg="undo custSel addSld delSld modSld">
-      <pc:chgData name="Hou, Bowen" userId="cbd36780-c17d-4782-a6cd-6dd8a1dcdc2c" providerId="ADAL" clId="{C9303CD7-D17E-4514-AC6E-4EFA4FDCDEDB}" dt="2025-02-25T19:07:47.466" v="602" actId="1037"/>
+      <pc:chgData name="Hou, Bowen" userId="cbd36780-c17d-4782-a6cd-6dd8a1dcdc2c" providerId="ADAL" clId="{C9303CD7-D17E-4514-AC6E-4EFA4FDCDEDB}" dt="2025-02-28T00:33:09.347" v="820" actId="1076"/>
       <pc:docMkLst>
         <pc:docMk/>
       </pc:docMkLst>
       <pc:sldChg chg="addSp delSp modSp mod">
-        <pc:chgData name="Hou, Bowen" userId="cbd36780-c17d-4782-a6cd-6dd8a1dcdc2c" providerId="ADAL" clId="{C9303CD7-D17E-4514-AC6E-4EFA4FDCDEDB}" dt="2025-02-25T19:07:47.466" v="602" actId="1037"/>
+        <pc:chgData name="Hou, Bowen" userId="cbd36780-c17d-4782-a6cd-6dd8a1dcdc2c" providerId="ADAL" clId="{C9303CD7-D17E-4514-AC6E-4EFA4FDCDEDB}" dt="2025-02-28T00:31:24.743" v="813" actId="1076"/>
         <pc:sldMkLst>
           <pc:docMk/>
           <pc:sldMk cId="340494126" sldId="257"/>
         </pc:sldMkLst>
+        <pc:spChg chg="add mod">
+          <ac:chgData name="Hou, Bowen" userId="cbd36780-c17d-4782-a6cd-6dd8a1dcdc2c" providerId="ADAL" clId="{C9303CD7-D17E-4514-AC6E-4EFA4FDCDEDB}" dt="2025-02-28T00:21:24.676" v="644" actId="1076"/>
+          <ac:spMkLst>
+            <pc:docMk/>
+            <pc:sldMk cId="340494126" sldId="257"/>
+            <ac:spMk id="5" creationId="{75A8F754-9EF2-DF2A-AF09-EDCA812417CC}"/>
+          </ac:spMkLst>
+        </pc:spChg>
         <pc:spChg chg="mod topLvl">
           <ac:chgData name="Hou, Bowen" userId="cbd36780-c17d-4782-a6cd-6dd8a1dcdc2c" providerId="ADAL" clId="{C9303CD7-D17E-4514-AC6E-4EFA4FDCDEDB}" dt="2025-02-25T14:18:55.051" v="313" actId="164"/>
           <ac:spMkLst>
@@ -2767,20 +1574,12 @@
             <ac:spMk id="6" creationId="{CF12503F-7739-2517-E7F0-836EF6F2F942}"/>
           </ac:spMkLst>
         </pc:spChg>
-        <pc:spChg chg="add del mod">
-          <ac:chgData name="Hou, Bowen" userId="cbd36780-c17d-4782-a6cd-6dd8a1dcdc2c" providerId="ADAL" clId="{C9303CD7-D17E-4514-AC6E-4EFA4FDCDEDB}" dt="2025-02-25T14:21:07.342" v="331" actId="478"/>
+        <pc:spChg chg="add mod">
+          <ac:chgData name="Hou, Bowen" userId="cbd36780-c17d-4782-a6cd-6dd8a1dcdc2c" providerId="ADAL" clId="{C9303CD7-D17E-4514-AC6E-4EFA4FDCDEDB}" dt="2025-02-28T00:27:29.782" v="725" actId="20577"/>
           <ac:spMkLst>
             <pc:docMk/>
             <pc:sldMk cId="340494126" sldId="257"/>
-            <ac:spMk id="7" creationId="{59ABA661-62C6-9E4C-12C7-5DC1BBDDE2FA}"/>
-          </ac:spMkLst>
-        </pc:spChg>
-        <pc:spChg chg="mod">
-          <ac:chgData name="Hou, Bowen" userId="cbd36780-c17d-4782-a6cd-6dd8a1dcdc2c" providerId="ADAL" clId="{C9303CD7-D17E-4514-AC6E-4EFA4FDCDEDB}" dt="2025-02-25T14:18:15.976" v="298" actId="165"/>
-          <ac:spMkLst>
-            <pc:docMk/>
-            <pc:sldMk cId="340494126" sldId="257"/>
-            <ac:spMk id="9" creationId="{28E3F488-9951-BA42-2CA8-A069F1CB6524}"/>
+            <ac:spMk id="13" creationId="{44666D4E-179A-0FE8-FAE4-FF07FB4E5932}"/>
           </ac:spMkLst>
         </pc:spChg>
         <pc:spChg chg="add mod">
@@ -2789,14 +1588,6 @@
             <pc:docMk/>
             <pc:sldMk cId="340494126" sldId="257"/>
             <ac:spMk id="20" creationId="{09B1C4CE-6F10-2E31-CB69-8E176A010D34}"/>
-          </ac:spMkLst>
-        </pc:spChg>
-        <pc:spChg chg="add mod">
-          <ac:chgData name="Hou, Bowen" userId="cbd36780-c17d-4782-a6cd-6dd8a1dcdc2c" providerId="ADAL" clId="{C9303CD7-D17E-4514-AC6E-4EFA4FDCDEDB}" dt="2025-02-25T14:07:13.587" v="120"/>
-          <ac:spMkLst>
-            <pc:docMk/>
-            <pc:sldMk cId="340494126" sldId="257"/>
-            <ac:spMk id="21" creationId="{4B4E0C41-86C2-A674-8895-F1C13A91AA07}"/>
           </ac:spMkLst>
         </pc:spChg>
         <pc:spChg chg="mod">
@@ -2816,7 +1607,7 @@
           </ac:spMkLst>
         </pc:spChg>
         <pc:spChg chg="mod">
-          <ac:chgData name="Hou, Bowen" userId="cbd36780-c17d-4782-a6cd-6dd8a1dcdc2c" providerId="ADAL" clId="{C9303CD7-D17E-4514-AC6E-4EFA4FDCDEDB}" dt="2025-02-25T14:07:21.442" v="123"/>
+          <ac:chgData name="Hou, Bowen" userId="cbd36780-c17d-4782-a6cd-6dd8a1dcdc2c" providerId="ADAL" clId="{C9303CD7-D17E-4514-AC6E-4EFA4FDCDEDB}" dt="2025-02-28T00:22:29.707" v="662" actId="14100"/>
           <ac:spMkLst>
             <pc:docMk/>
             <pc:sldMk cId="340494126" sldId="257"/>
@@ -2908,31 +1699,7 @@
           <ac:spMkLst>
             <pc:docMk/>
             <pc:sldMk cId="340494126" sldId="257"/>
-            <ac:spMk id="43" creationId="{1360BA30-5BF2-11B9-39AE-576E3A2EA90A}"/>
-          </ac:spMkLst>
-        </pc:spChg>
-        <pc:spChg chg="add mod">
-          <ac:chgData name="Hou, Bowen" userId="cbd36780-c17d-4782-a6cd-6dd8a1dcdc2c" providerId="ADAL" clId="{C9303CD7-D17E-4514-AC6E-4EFA4FDCDEDB}" dt="2025-02-25T19:05:28.695" v="517" actId="164"/>
-          <ac:spMkLst>
-            <pc:docMk/>
-            <pc:sldMk cId="340494126" sldId="257"/>
             <ac:spMk id="46" creationId="{5CD321E6-6270-0EE4-F772-5FF9EDA84ABF}"/>
-          </ac:spMkLst>
-        </pc:spChg>
-        <pc:spChg chg="add del mod">
-          <ac:chgData name="Hou, Bowen" userId="cbd36780-c17d-4782-a6cd-6dd8a1dcdc2c" providerId="ADAL" clId="{C9303CD7-D17E-4514-AC6E-4EFA4FDCDEDB}" dt="2025-02-25T14:25:25.932" v="392" actId="478"/>
-          <ac:spMkLst>
-            <pc:docMk/>
-            <pc:sldMk cId="340494126" sldId="257"/>
-            <ac:spMk id="48" creationId="{87046EFF-E753-F509-3AB9-4D2081BB058F}"/>
-          </ac:spMkLst>
-        </pc:spChg>
-        <pc:spChg chg="add mod">
-          <ac:chgData name="Hou, Bowen" userId="cbd36780-c17d-4782-a6cd-6dd8a1dcdc2c" providerId="ADAL" clId="{C9303CD7-D17E-4514-AC6E-4EFA4FDCDEDB}" dt="2025-02-25T19:05:28.695" v="517" actId="164"/>
-          <ac:spMkLst>
-            <pc:docMk/>
-            <pc:sldMk cId="340494126" sldId="257"/>
-            <ac:spMk id="49" creationId="{61752C14-1C2A-4D71-9066-1B79C9CA6254}"/>
           </ac:spMkLst>
         </pc:spChg>
         <pc:spChg chg="mod">
@@ -2959,16 +1726,8 @@
             <ac:spMk id="55" creationId="{98A5F899-C69E-82FF-B84D-98A10D8FF88C}"/>
           </ac:spMkLst>
         </pc:spChg>
-        <pc:spChg chg="mod">
-          <ac:chgData name="Hou, Bowen" userId="cbd36780-c17d-4782-a6cd-6dd8a1dcdc2c" providerId="ADAL" clId="{C9303CD7-D17E-4514-AC6E-4EFA4FDCDEDB}" dt="2025-02-25T14:01:20.889" v="60" actId="1076"/>
-          <ac:spMkLst>
-            <pc:docMk/>
-            <pc:sldMk cId="340494126" sldId="257"/>
-            <ac:spMk id="56" creationId="{E8021E42-ECC1-F546-6898-CBA1AA1BE632}"/>
-          </ac:spMkLst>
-        </pc:spChg>
         <pc:spChg chg="add mod ord">
-          <ac:chgData name="Hou, Bowen" userId="cbd36780-c17d-4782-a6cd-6dd8a1dcdc2c" providerId="ADAL" clId="{C9303CD7-D17E-4514-AC6E-4EFA4FDCDEDB}" dt="2025-02-25T19:07:40.410" v="593" actId="1038"/>
+          <ac:chgData name="Hou, Bowen" userId="cbd36780-c17d-4782-a6cd-6dd8a1dcdc2c" providerId="ADAL" clId="{C9303CD7-D17E-4514-AC6E-4EFA4FDCDEDB}" dt="2025-02-28T00:23:13.604" v="686" actId="1036"/>
           <ac:spMkLst>
             <pc:docMk/>
             <pc:sldMk cId="340494126" sldId="257"/>
@@ -2984,14 +1743,6 @@
           </ac:spMkLst>
         </pc:spChg>
         <pc:spChg chg="mod">
-          <ac:chgData name="Hou, Bowen" userId="cbd36780-c17d-4782-a6cd-6dd8a1dcdc2c" providerId="ADAL" clId="{C9303CD7-D17E-4514-AC6E-4EFA4FDCDEDB}" dt="2025-02-25T14:18:15.976" v="298" actId="165"/>
-          <ac:spMkLst>
-            <pc:docMk/>
-            <pc:sldMk cId="340494126" sldId="257"/>
-            <ac:spMk id="66" creationId="{DB3B169F-64F8-D63C-5539-C6395A7C1652}"/>
-          </ac:spMkLst>
-        </pc:spChg>
-        <pc:spChg chg="mod">
           <ac:chgData name="Hou, Bowen" userId="cbd36780-c17d-4782-a6cd-6dd8a1dcdc2c" providerId="ADAL" clId="{C9303CD7-D17E-4514-AC6E-4EFA4FDCDEDB}" dt="2025-02-25T19:07:21.202" v="565" actId="1076"/>
           <ac:spMkLst>
             <pc:docMk/>
@@ -3015,6 +1766,14 @@
             <ac:spMk id="111" creationId="{6BDC7BC4-BAB7-974B-A858-90D4BD740F91}"/>
           </ac:spMkLst>
         </pc:spChg>
+        <pc:spChg chg="mod">
+          <ac:chgData name="Hou, Bowen" userId="cbd36780-c17d-4782-a6cd-6dd8a1dcdc2c" providerId="ADAL" clId="{C9303CD7-D17E-4514-AC6E-4EFA4FDCDEDB}" dt="2025-02-28T00:25:15.185" v="707" actId="14100"/>
+          <ac:spMkLst>
+            <pc:docMk/>
+            <pc:sldMk cId="340494126" sldId="257"/>
+            <ac:spMk id="139" creationId="{2DD9ADF3-AD76-E2F9-E200-5B79F7423F71}"/>
+          </ac:spMkLst>
+        </pc:spChg>
         <pc:spChg chg="mod topLvl">
           <ac:chgData name="Hou, Bowen" userId="cbd36780-c17d-4782-a6cd-6dd8a1dcdc2c" providerId="ADAL" clId="{C9303CD7-D17E-4514-AC6E-4EFA4FDCDEDB}" dt="2025-02-25T14:18:55.051" v="313" actId="164"/>
           <ac:spMkLst>
@@ -3080,11 +1839,11 @@
           </ac:spMkLst>
         </pc:spChg>
         <pc:spChg chg="mod">
-          <ac:chgData name="Hou, Bowen" userId="cbd36780-c17d-4782-a6cd-6dd8a1dcdc2c" providerId="ADAL" clId="{C9303CD7-D17E-4514-AC6E-4EFA4FDCDEDB}" dt="2025-02-25T14:11:30.752" v="224" actId="165"/>
+          <ac:chgData name="Hou, Bowen" userId="cbd36780-c17d-4782-a6cd-6dd8a1dcdc2c" providerId="ADAL" clId="{C9303CD7-D17E-4514-AC6E-4EFA4FDCDEDB}" dt="2025-02-28T00:22:15.474" v="660" actId="1076"/>
           <ac:spMkLst>
             <pc:docMk/>
             <pc:sldMk cId="340494126" sldId="257"/>
-            <ac:spMk id="215" creationId="{94F7A00E-2D30-0A79-24F8-00EE9701F36F}"/>
+            <ac:spMk id="226" creationId="{3B4B6C48-7885-9DEF-00B5-AAF1B0B44838}"/>
           </ac:spMkLst>
         </pc:spChg>
         <pc:spChg chg="mod">
@@ -3095,6 +1854,14 @@
             <ac:spMk id="227" creationId="{8726E3A4-BFCC-D6D0-19B0-3CC4892B0846}"/>
           </ac:spMkLst>
         </pc:spChg>
+        <pc:spChg chg="mod">
+          <ac:chgData name="Hou, Bowen" userId="cbd36780-c17d-4782-a6cd-6dd8a1dcdc2c" providerId="ADAL" clId="{C9303CD7-D17E-4514-AC6E-4EFA4FDCDEDB}" dt="2025-02-28T00:20:26.262" v="629" actId="1076"/>
+          <ac:spMkLst>
+            <pc:docMk/>
+            <pc:sldMk cId="340494126" sldId="257"/>
+            <ac:spMk id="241" creationId="{F24053C4-A13B-3A10-AE0B-5D13C403A859}"/>
+          </ac:spMkLst>
+        </pc:spChg>
         <pc:spChg chg="mod topLvl">
           <ac:chgData name="Hou, Bowen" userId="cbd36780-c17d-4782-a6cd-6dd8a1dcdc2c" providerId="ADAL" clId="{C9303CD7-D17E-4514-AC6E-4EFA4FDCDEDB}" dt="2025-02-25T14:17:05.030" v="280" actId="164"/>
           <ac:spMkLst>
@@ -3104,19 +1871,43 @@
           </ac:spMkLst>
         </pc:spChg>
         <pc:spChg chg="mod topLvl">
-          <ac:chgData name="Hou, Bowen" userId="cbd36780-c17d-4782-a6cd-6dd8a1dcdc2c" providerId="ADAL" clId="{C9303CD7-D17E-4514-AC6E-4EFA4FDCDEDB}" dt="2025-02-25T14:17:05.030" v="280" actId="164"/>
+          <ac:chgData name="Hou, Bowen" userId="cbd36780-c17d-4782-a6cd-6dd8a1dcdc2c" providerId="ADAL" clId="{C9303CD7-D17E-4514-AC6E-4EFA4FDCDEDB}" dt="2025-02-25T14:18:55.051" v="313" actId="164"/>
           <ac:spMkLst>
             <pc:docMk/>
             <pc:sldMk cId="340494126" sldId="257"/>
-            <ac:spMk id="272" creationId="{CB0280F8-C299-4FEB-ED68-213460B5E6CB}"/>
+            <ac:spMk id="273" creationId="{1F856EA6-5AB9-BBF1-97F6-BA4FA19F7620}"/>
+          </ac:spMkLst>
+        </pc:spChg>
+        <pc:spChg chg="mod">
+          <ac:chgData name="Hou, Bowen" userId="cbd36780-c17d-4782-a6cd-6dd8a1dcdc2c" providerId="ADAL" clId="{C9303CD7-D17E-4514-AC6E-4EFA4FDCDEDB}" dt="2025-02-28T00:24:41.855" v="696" actId="1076"/>
+          <ac:spMkLst>
+            <pc:docMk/>
+            <pc:sldMk cId="340494126" sldId="257"/>
+            <ac:spMk id="276" creationId="{107C6BC6-8318-4427-3B18-6B3B446F4AEE}"/>
           </ac:spMkLst>
         </pc:spChg>
         <pc:spChg chg="mod topLvl">
-          <ac:chgData name="Hou, Bowen" userId="cbd36780-c17d-4782-a6cd-6dd8a1dcdc2c" providerId="ADAL" clId="{C9303CD7-D17E-4514-AC6E-4EFA4FDCDEDB}" dt="2025-02-25T14:18:55.051" v="313" actId="164"/>
+          <ac:chgData name="Hou, Bowen" userId="cbd36780-c17d-4782-a6cd-6dd8a1dcdc2c" providerId="ADAL" clId="{C9303CD7-D17E-4514-AC6E-4EFA4FDCDEDB}" dt="2025-02-28T00:24:44.570" v="697" actId="1076"/>
           <ac:spMkLst>
             <pc:docMk/>
             <pc:sldMk cId="340494126" sldId="257"/>
-            <ac:spMk id="273" creationId="{1F856EA6-5AB9-BBF1-97F6-BA4FA19F7620}"/>
+            <ac:spMk id="277" creationId="{5CD9A01B-A7EE-DE12-A993-866631CA1799}"/>
+          </ac:spMkLst>
+        </pc:spChg>
+        <pc:spChg chg="mod">
+          <ac:chgData name="Hou, Bowen" userId="cbd36780-c17d-4782-a6cd-6dd8a1dcdc2c" providerId="ADAL" clId="{C9303CD7-D17E-4514-AC6E-4EFA4FDCDEDB}" dt="2025-02-28T00:24:31.754" v="695" actId="165"/>
+          <ac:spMkLst>
+            <pc:docMk/>
+            <pc:sldMk cId="340494126" sldId="257"/>
+            <ac:spMk id="279" creationId="{574EDFEF-4450-4CB4-44A9-D48615D386B5}"/>
+          </ac:spMkLst>
+        </pc:spChg>
+        <pc:spChg chg="mod">
+          <ac:chgData name="Hou, Bowen" userId="cbd36780-c17d-4782-a6cd-6dd8a1dcdc2c" providerId="ADAL" clId="{C9303CD7-D17E-4514-AC6E-4EFA4FDCDEDB}" dt="2025-02-28T00:24:41.855" v="696" actId="1076"/>
+          <ac:spMkLst>
+            <pc:docMk/>
+            <pc:sldMk cId="340494126" sldId="257"/>
+            <ac:spMk id="303" creationId="{BEEB7131-D278-90ED-E182-0D46B982A4F0}"/>
           </ac:spMkLst>
         </pc:spChg>
         <pc:spChg chg="mod">
@@ -3152,6 +1943,22 @@
           </ac:spMkLst>
         </pc:spChg>
         <pc:spChg chg="mod">
+          <ac:chgData name="Hou, Bowen" userId="cbd36780-c17d-4782-a6cd-6dd8a1dcdc2c" providerId="ADAL" clId="{C9303CD7-D17E-4514-AC6E-4EFA4FDCDEDB}" dt="2025-02-28T00:24:31.754" v="695" actId="165"/>
+          <ac:spMkLst>
+            <pc:docMk/>
+            <pc:sldMk cId="340494126" sldId="257"/>
+            <ac:spMk id="311" creationId="{A9A5D1FD-5BF7-732A-6402-8F48EA4196AF}"/>
+          </ac:spMkLst>
+        </pc:spChg>
+        <pc:spChg chg="mod">
+          <ac:chgData name="Hou, Bowen" userId="cbd36780-c17d-4782-a6cd-6dd8a1dcdc2c" providerId="ADAL" clId="{C9303CD7-D17E-4514-AC6E-4EFA4FDCDEDB}" dt="2025-02-28T00:24:31.754" v="695" actId="165"/>
+          <ac:spMkLst>
+            <pc:docMk/>
+            <pc:sldMk cId="340494126" sldId="257"/>
+            <ac:spMk id="326" creationId="{C7B3C6E1-93D0-85C4-A636-6963E9C97B40}"/>
+          </ac:spMkLst>
+        </pc:spChg>
+        <pc:spChg chg="mod">
           <ac:chgData name="Hou, Bowen" userId="cbd36780-c17d-4782-a6cd-6dd8a1dcdc2c" providerId="ADAL" clId="{C9303CD7-D17E-4514-AC6E-4EFA4FDCDEDB}" dt="2025-02-25T14:14:05.095" v="235" actId="207"/>
           <ac:spMkLst>
             <pc:docMk/>
@@ -3168,19 +1975,43 @@
           </ac:spMkLst>
         </pc:spChg>
         <pc:spChg chg="mod">
-          <ac:chgData name="Hou, Bowen" userId="cbd36780-c17d-4782-a6cd-6dd8a1dcdc2c" providerId="ADAL" clId="{C9303CD7-D17E-4514-AC6E-4EFA4FDCDEDB}" dt="2025-02-25T14:32:36.684" v="513" actId="1037"/>
+          <ac:chgData name="Hou, Bowen" userId="cbd36780-c17d-4782-a6cd-6dd8a1dcdc2c" providerId="ADAL" clId="{C9303CD7-D17E-4514-AC6E-4EFA4FDCDEDB}" dt="2025-02-28T00:24:10.029" v="690" actId="1076"/>
           <ac:spMkLst>
             <pc:docMk/>
             <pc:sldMk cId="340494126" sldId="257"/>
-            <ac:spMk id="391" creationId="{08CBBD54-F122-B9EE-2F64-72965E2F6F8C}"/>
+            <ac:spMk id="379" creationId="{E6FD305B-4694-C297-5269-98E6444AE78A}"/>
           </ac:spMkLst>
         </pc:spChg>
-        <pc:spChg chg="del mod">
-          <ac:chgData name="Hou, Bowen" userId="cbd36780-c17d-4782-a6cd-6dd8a1dcdc2c" providerId="ADAL" clId="{C9303CD7-D17E-4514-AC6E-4EFA4FDCDEDB}" dt="2025-02-25T14:30:47.917" v="465" actId="478"/>
+        <pc:spChg chg="mod">
+          <ac:chgData name="Hou, Bowen" userId="cbd36780-c17d-4782-a6cd-6dd8a1dcdc2c" providerId="ADAL" clId="{C9303CD7-D17E-4514-AC6E-4EFA4FDCDEDB}" dt="2025-02-28T00:24:14.208" v="692" actId="1076"/>
           <ac:spMkLst>
             <pc:docMk/>
             <pc:sldMk cId="340494126" sldId="257"/>
-            <ac:spMk id="416" creationId="{2A1A8879-D3E2-8747-3B60-DECBA6FE064F}"/>
+            <ac:spMk id="388" creationId="{6A626E0B-30F4-2057-245F-68BE5CB03595}"/>
+          </ac:spMkLst>
+        </pc:spChg>
+        <pc:spChg chg="mod">
+          <ac:chgData name="Hou, Bowen" userId="cbd36780-c17d-4782-a6cd-6dd8a1dcdc2c" providerId="ADAL" clId="{C9303CD7-D17E-4514-AC6E-4EFA4FDCDEDB}" dt="2025-02-28T00:31:15.862" v="810" actId="1076"/>
+          <ac:spMkLst>
+            <pc:docMk/>
+            <pc:sldMk cId="340494126" sldId="257"/>
+            <ac:spMk id="397" creationId="{71154FBF-B145-3CA8-602F-179ACF8684C0}"/>
+          </ac:spMkLst>
+        </pc:spChg>
+        <pc:spChg chg="mod">
+          <ac:chgData name="Hou, Bowen" userId="cbd36780-c17d-4782-a6cd-6dd8a1dcdc2c" providerId="ADAL" clId="{C9303CD7-D17E-4514-AC6E-4EFA4FDCDEDB}" dt="2025-02-28T00:31:24.743" v="813" actId="1076"/>
+          <ac:spMkLst>
+            <pc:docMk/>
+            <pc:sldMk cId="340494126" sldId="257"/>
+            <ac:spMk id="399" creationId="{C0175FE5-EEEC-EC26-8C7B-8BFF79C5B3DE}"/>
+          </ac:spMkLst>
+        </pc:spChg>
+        <pc:spChg chg="mod">
+          <ac:chgData name="Hou, Bowen" userId="cbd36780-c17d-4782-a6cd-6dd8a1dcdc2c" providerId="ADAL" clId="{C9303CD7-D17E-4514-AC6E-4EFA4FDCDEDB}" dt="2025-02-28T00:24:31.754" v="695" actId="165"/>
+          <ac:spMkLst>
+            <pc:docMk/>
+            <pc:sldMk cId="340494126" sldId="257"/>
+            <ac:spMk id="403" creationId="{91027269-C574-2A36-0E09-1F757DA45F43}"/>
           </ac:spMkLst>
         </pc:spChg>
         <pc:spChg chg="mod">
@@ -3271,16 +2102,16 @@
             <ac:spMk id="470" creationId="{1B50F32C-A2A9-EC60-09D7-8D9918C9B028}"/>
           </ac:spMkLst>
         </pc:spChg>
-        <pc:spChg chg="del mod">
-          <ac:chgData name="Hou, Bowen" userId="cbd36780-c17d-4782-a6cd-6dd8a1dcdc2c" providerId="ADAL" clId="{C9303CD7-D17E-4514-AC6E-4EFA4FDCDEDB}" dt="2025-02-25T14:21:05.705" v="330" actId="478"/>
+        <pc:spChg chg="mod">
+          <ac:chgData name="Hou, Bowen" userId="cbd36780-c17d-4782-a6cd-6dd8a1dcdc2c" providerId="ADAL" clId="{C9303CD7-D17E-4514-AC6E-4EFA4FDCDEDB}" dt="2025-02-28T00:24:11.599" v="691" actId="1076"/>
           <ac:spMkLst>
             <pc:docMk/>
             <pc:sldMk cId="340494126" sldId="257"/>
-            <ac:spMk id="485" creationId="{BC2F83A9-5141-BF26-65D0-92315BB8C368}"/>
+            <ac:spMk id="474" creationId="{E0440752-5FD2-DE53-3FBD-451916B4C794}"/>
           </ac:spMkLst>
         </pc:spChg>
         <pc:spChg chg="mod">
-          <ac:chgData name="Hou, Bowen" userId="cbd36780-c17d-4782-a6cd-6dd8a1dcdc2c" providerId="ADAL" clId="{C9303CD7-D17E-4514-AC6E-4EFA4FDCDEDB}" dt="2025-02-25T19:05:28.695" v="517" actId="164"/>
+          <ac:chgData name="Hou, Bowen" userId="cbd36780-c17d-4782-a6cd-6dd8a1dcdc2c" providerId="ADAL" clId="{C9303CD7-D17E-4514-AC6E-4EFA4FDCDEDB}" dt="2025-02-28T00:23:09.855" v="684" actId="207"/>
           <ac:spMkLst>
             <pc:docMk/>
             <pc:sldMk cId="340494126" sldId="257"/>
@@ -3351,14 +2182,14 @@
             <ac:spMk id="506" creationId="{5FE162A5-B544-2FFE-334A-DED267386014}"/>
           </ac:spMkLst>
         </pc:spChg>
-        <pc:grpChg chg="mod">
-          <ac:chgData name="Hou, Bowen" userId="cbd36780-c17d-4782-a6cd-6dd8a1dcdc2c" providerId="ADAL" clId="{C9303CD7-D17E-4514-AC6E-4EFA4FDCDEDB}" dt="2025-02-25T19:05:51.046" v="528" actId="1035"/>
-          <ac:grpSpMkLst>
+        <pc:spChg chg="mod">
+          <ac:chgData name="Hou, Bowen" userId="cbd36780-c17d-4782-a6cd-6dd8a1dcdc2c" providerId="ADAL" clId="{C9303CD7-D17E-4514-AC6E-4EFA4FDCDEDB}" dt="2025-02-28T00:24:21.283" v="694" actId="1076"/>
+          <ac:spMkLst>
             <pc:docMk/>
             <pc:sldMk cId="340494126" sldId="257"/>
-            <ac:grpSpMk id="2" creationId="{5DB604DC-2545-0741-A64A-583ED78D1080}"/>
-          </ac:grpSpMkLst>
-        </pc:grpChg>
+            <ac:spMk id="507" creationId="{3AA4A90A-D383-EFA9-CF64-E947EB1D1704}"/>
+          </ac:spMkLst>
+        </pc:spChg>
         <pc:grpChg chg="add mod">
           <ac:chgData name="Hou, Bowen" userId="cbd36780-c17d-4782-a6cd-6dd8a1dcdc2c" providerId="ADAL" clId="{C9303CD7-D17E-4514-AC6E-4EFA4FDCDEDB}" dt="2025-02-25T19:07:15.769" v="564" actId="1076"/>
           <ac:grpSpMkLst>
@@ -3415,20 +2246,36 @@
             <ac:grpSpMk id="60" creationId="{85E54C70-7A0F-8EEC-4A71-496BCF2307C0}"/>
           </ac:grpSpMkLst>
         </pc:grpChg>
-        <pc:grpChg chg="del mod">
-          <ac:chgData name="Hou, Bowen" userId="cbd36780-c17d-4782-a6cd-6dd8a1dcdc2c" providerId="ADAL" clId="{C9303CD7-D17E-4514-AC6E-4EFA4FDCDEDB}" dt="2025-02-25T14:21:03.445" v="329" actId="478"/>
+        <pc:grpChg chg="mod">
+          <ac:chgData name="Hou, Bowen" userId="cbd36780-c17d-4782-a6cd-6dd8a1dcdc2c" providerId="ADAL" clId="{C9303CD7-D17E-4514-AC6E-4EFA4FDCDEDB}" dt="2025-02-28T00:24:18.674" v="693" actId="1076"/>
           <ac:grpSpMkLst>
             <pc:docMk/>
             <pc:sldMk cId="340494126" sldId="257"/>
-            <ac:grpSpMk id="87" creationId="{8F3F49B6-3DC1-EFA3-574C-39771027856A}"/>
+            <ac:grpSpMk id="136" creationId="{AC8BFD86-6545-3E15-47FE-0F2CFEAF9C4C}"/>
           </ac:grpSpMkLst>
         </pc:grpChg>
-        <pc:grpChg chg="del mod">
-          <ac:chgData name="Hou, Bowen" userId="cbd36780-c17d-4782-a6cd-6dd8a1dcdc2c" providerId="ADAL" clId="{C9303CD7-D17E-4514-AC6E-4EFA4FDCDEDB}" dt="2025-02-25T14:21:01.788" v="328" actId="478"/>
+        <pc:grpChg chg="mod">
+          <ac:chgData name="Hou, Bowen" userId="cbd36780-c17d-4782-a6cd-6dd8a1dcdc2c" providerId="ADAL" clId="{C9303CD7-D17E-4514-AC6E-4EFA4FDCDEDB}" dt="2025-02-28T00:24:31.754" v="695" actId="165"/>
           <ac:grpSpMkLst>
             <pc:docMk/>
             <pc:sldMk cId="340494126" sldId="257"/>
-            <ac:grpSpMk id="197" creationId="{D5AE39B5-5794-80DB-A6A0-7A3BF7664A1A}"/>
+            <ac:grpSpMk id="372" creationId="{802BDA95-E8FC-CB2E-6652-FBB28A340BF8}"/>
+          </ac:grpSpMkLst>
+        </pc:grpChg>
+        <pc:grpChg chg="mod">
+          <ac:chgData name="Hou, Bowen" userId="cbd36780-c17d-4782-a6cd-6dd8a1dcdc2c" providerId="ADAL" clId="{C9303CD7-D17E-4514-AC6E-4EFA4FDCDEDB}" dt="2025-02-28T00:21:27.414" v="646" actId="1076"/>
+          <ac:grpSpMkLst>
+            <pc:docMk/>
+            <pc:sldMk cId="340494126" sldId="257"/>
+            <ac:grpSpMk id="405" creationId="{04375840-4445-180F-3480-1A4A89EE6B7F}"/>
+          </ac:grpSpMkLst>
+        </pc:grpChg>
+        <pc:grpChg chg="del">
+          <ac:chgData name="Hou, Bowen" userId="cbd36780-c17d-4782-a6cd-6dd8a1dcdc2c" providerId="ADAL" clId="{C9303CD7-D17E-4514-AC6E-4EFA4FDCDEDB}" dt="2025-02-28T00:24:31.754" v="695" actId="165"/>
+          <ac:grpSpMkLst>
+            <pc:docMk/>
+            <pc:sldMk cId="340494126" sldId="257"/>
+            <ac:grpSpMk id="422" creationId="{44D403D0-1FC5-87D7-34F8-190E7D499046}"/>
           </ac:grpSpMkLst>
         </pc:grpChg>
         <pc:grpChg chg="mod">
@@ -3447,36 +2294,36 @@
             <ac:grpSpMk id="438" creationId="{AAEF922B-6891-AFA8-D634-6EEDB31C4469}"/>
           </ac:grpSpMkLst>
         </pc:grpChg>
+        <pc:picChg chg="mod">
+          <ac:chgData name="Hou, Bowen" userId="cbd36780-c17d-4782-a6cd-6dd8a1dcdc2c" providerId="ADAL" clId="{C9303CD7-D17E-4514-AC6E-4EFA4FDCDEDB}" dt="2025-02-28T00:24:31.754" v="695" actId="165"/>
+          <ac:picMkLst>
+            <pc:docMk/>
+            <pc:sldMk cId="340494126" sldId="257"/>
+            <ac:picMk id="349" creationId="{6FB1B4BA-9EA2-A270-410D-539905735DA9}"/>
+          </ac:picMkLst>
+        </pc:picChg>
         <pc:cxnChg chg="add mod">
-          <ac:chgData name="Hou, Bowen" userId="cbd36780-c17d-4782-a6cd-6dd8a1dcdc2c" providerId="ADAL" clId="{C9303CD7-D17E-4514-AC6E-4EFA4FDCDEDB}" dt="2025-02-25T14:27:30.953" v="424" actId="14100"/>
+          <ac:chgData name="Hou, Bowen" userId="cbd36780-c17d-4782-a6cd-6dd8a1dcdc2c" providerId="ADAL" clId="{C9303CD7-D17E-4514-AC6E-4EFA4FDCDEDB}" dt="2025-02-28T00:21:31.698" v="648" actId="1076"/>
           <ac:cxnSpMkLst>
             <pc:docMk/>
             <pc:sldMk cId="340494126" sldId="257"/>
-            <ac:cxnSpMk id="4" creationId="{DBA78B91-A67A-F8A5-FF22-4103FC6ED99C}"/>
-          </ac:cxnSpMkLst>
-        </pc:cxnChg>
-        <pc:cxnChg chg="add del mod">
-          <ac:chgData name="Hou, Bowen" userId="cbd36780-c17d-4782-a6cd-6dd8a1dcdc2c" providerId="ADAL" clId="{C9303CD7-D17E-4514-AC6E-4EFA4FDCDEDB}" dt="2025-02-25T14:16:45.594" v="275" actId="478"/>
-          <ac:cxnSpMkLst>
-            <pc:docMk/>
-            <pc:sldMk cId="340494126" sldId="257"/>
-            <ac:cxnSpMk id="32" creationId="{1C1CCD88-E3E7-A545-108F-91B2211765A2}"/>
+            <ac:cxnSpMk id="10" creationId="{ACAFA4DC-D77D-2FCA-3CB6-B115A5C7DE34}"/>
           </ac:cxnSpMkLst>
         </pc:cxnChg>
         <pc:cxnChg chg="add mod">
-          <ac:chgData name="Hou, Bowen" userId="cbd36780-c17d-4782-a6cd-6dd8a1dcdc2c" providerId="ADAL" clId="{C9303CD7-D17E-4514-AC6E-4EFA4FDCDEDB}" dt="2025-02-25T14:27:32.571" v="427" actId="1036"/>
+          <ac:chgData name="Hou, Bowen" userId="cbd36780-c17d-4782-a6cd-6dd8a1dcdc2c" providerId="ADAL" clId="{C9303CD7-D17E-4514-AC6E-4EFA4FDCDEDB}" dt="2025-02-28T00:25:01.023" v="702" actId="1076"/>
           <ac:cxnSpMkLst>
             <pc:docMk/>
             <pc:sldMk cId="340494126" sldId="257"/>
-            <ac:cxnSpMk id="44" creationId="{66731AEF-24A9-3031-50EB-31D78AF2A853}"/>
+            <ac:cxnSpMk id="15" creationId="{DDC32ED0-8976-983F-6F91-5D68FFDB6D8B}"/>
           </ac:cxnSpMkLst>
         </pc:cxnChg>
-        <pc:cxnChg chg="add mod">
-          <ac:chgData name="Hou, Bowen" userId="cbd36780-c17d-4782-a6cd-6dd8a1dcdc2c" providerId="ADAL" clId="{C9303CD7-D17E-4514-AC6E-4EFA4FDCDEDB}" dt="2025-02-25T14:27:14.082" v="414" actId="14100"/>
+        <pc:cxnChg chg="mod">
+          <ac:chgData name="Hou, Bowen" userId="cbd36780-c17d-4782-a6cd-6dd8a1dcdc2c" providerId="ADAL" clId="{C9303CD7-D17E-4514-AC6E-4EFA4FDCDEDB}" dt="2025-02-28T00:20:24.216" v="628" actId="14100"/>
           <ac:cxnSpMkLst>
             <pc:docMk/>
             <pc:sldMk cId="340494126" sldId="257"/>
-            <ac:cxnSpMk id="45" creationId="{69B95CF9-B93F-ED3A-A5DB-268D62AF9F8D}"/>
+            <ac:cxnSpMk id="155" creationId="{7B458638-A7D9-9FA1-681B-910D0A71FE13}"/>
           </ac:cxnSpMkLst>
         </pc:cxnChg>
         <pc:cxnChg chg="mod">
@@ -3488,11 +2335,59 @@
           </ac:cxnSpMkLst>
         </pc:cxnChg>
         <pc:cxnChg chg="mod">
-          <ac:chgData name="Hou, Bowen" userId="cbd36780-c17d-4782-a6cd-6dd8a1dcdc2c" providerId="ADAL" clId="{C9303CD7-D17E-4514-AC6E-4EFA4FDCDEDB}" dt="2025-02-25T14:32:36.684" v="513" actId="1037"/>
+          <ac:chgData name="Hou, Bowen" userId="cbd36780-c17d-4782-a6cd-6dd8a1dcdc2c" providerId="ADAL" clId="{C9303CD7-D17E-4514-AC6E-4EFA4FDCDEDB}" dt="2025-02-28T00:24:41.855" v="696" actId="1076"/>
+          <ac:cxnSpMkLst>
+            <pc:docMk/>
+            <pc:sldMk cId="340494126" sldId="257"/>
+            <ac:cxnSpMk id="278" creationId="{BBAD5C3D-1DB5-1E90-61A7-7355BD0D336F}"/>
+          </ac:cxnSpMkLst>
+        </pc:cxnChg>
+        <pc:cxnChg chg="mod">
+          <ac:chgData name="Hou, Bowen" userId="cbd36780-c17d-4782-a6cd-6dd8a1dcdc2c" providerId="ADAL" clId="{C9303CD7-D17E-4514-AC6E-4EFA4FDCDEDB}" dt="2025-02-28T00:25:13.301" v="706" actId="1076"/>
+          <ac:cxnSpMkLst>
+            <pc:docMk/>
+            <pc:sldMk cId="340494126" sldId="257"/>
+            <ac:cxnSpMk id="313" creationId="{D6231D78-7EF2-B6C5-A4DF-E6FE78D21AF1}"/>
+          </ac:cxnSpMkLst>
+        </pc:cxnChg>
+        <pc:cxnChg chg="mod">
+          <ac:chgData name="Hou, Bowen" userId="cbd36780-c17d-4782-a6cd-6dd8a1dcdc2c" providerId="ADAL" clId="{C9303CD7-D17E-4514-AC6E-4EFA4FDCDEDB}" dt="2025-02-28T00:24:10.029" v="690" actId="1076"/>
+          <ac:cxnSpMkLst>
+            <pc:docMk/>
+            <pc:sldMk cId="340494126" sldId="257"/>
+            <ac:cxnSpMk id="380" creationId="{97E1D96A-F27C-CDFB-7AA4-B98AB2552A4C}"/>
+          </ac:cxnSpMkLst>
+        </pc:cxnChg>
+        <pc:cxnChg chg="mod">
+          <ac:chgData name="Hou, Bowen" userId="cbd36780-c17d-4782-a6cd-6dd8a1dcdc2c" providerId="ADAL" clId="{C9303CD7-D17E-4514-AC6E-4EFA4FDCDEDB}" dt="2025-02-28T00:24:10.029" v="690" actId="1076"/>
+          <ac:cxnSpMkLst>
+            <pc:docMk/>
+            <pc:sldMk cId="340494126" sldId="257"/>
+            <ac:cxnSpMk id="382" creationId="{6E91BFDC-6FF4-3593-291A-90D107611E46}"/>
+          </ac:cxnSpMkLst>
+        </pc:cxnChg>
+        <pc:cxnChg chg="mod">
+          <ac:chgData name="Hou, Bowen" userId="cbd36780-c17d-4782-a6cd-6dd8a1dcdc2c" providerId="ADAL" clId="{C9303CD7-D17E-4514-AC6E-4EFA4FDCDEDB}" dt="2025-02-28T00:21:24.676" v="644" actId="1076"/>
           <ac:cxnSpMkLst>
             <pc:docMk/>
             <pc:sldMk cId="340494126" sldId="257"/>
             <ac:cxnSpMk id="392" creationId="{F0C90EF3-F424-E179-C7ED-2348E07B03F4}"/>
+          </ac:cxnSpMkLst>
+        </pc:cxnChg>
+        <pc:cxnChg chg="mod">
+          <ac:chgData name="Hou, Bowen" userId="cbd36780-c17d-4782-a6cd-6dd8a1dcdc2c" providerId="ADAL" clId="{C9303CD7-D17E-4514-AC6E-4EFA4FDCDEDB}" dt="2025-02-28T00:31:18.092" v="811" actId="14100"/>
+          <ac:cxnSpMkLst>
+            <pc:docMk/>
+            <pc:sldMk cId="340494126" sldId="257"/>
+            <ac:cxnSpMk id="396" creationId="{08898B0F-D15E-013B-1A3E-A3287978893A}"/>
+          </ac:cxnSpMkLst>
+        </pc:cxnChg>
+        <pc:cxnChg chg="mod">
+          <ac:chgData name="Hou, Bowen" userId="cbd36780-c17d-4782-a6cd-6dd8a1dcdc2c" providerId="ADAL" clId="{C9303CD7-D17E-4514-AC6E-4EFA4FDCDEDB}" dt="2025-02-28T00:31:22.169" v="812" actId="1076"/>
+          <ac:cxnSpMkLst>
+            <pc:docMk/>
+            <pc:sldMk cId="340494126" sldId="257"/>
+            <ac:cxnSpMk id="398" creationId="{BC8E6F6B-0DED-B720-32AC-066E125040E4}"/>
           </ac:cxnSpMkLst>
         </pc:cxnChg>
         <pc:cxnChg chg="mod">
@@ -3535,14 +2430,6 @@
             <ac:cxnSpMk id="480" creationId="{F2843A54-AFD1-349A-B1E7-95087E871562}"/>
           </ac:cxnSpMkLst>
         </pc:cxnChg>
-        <pc:cxnChg chg="del mod">
-          <ac:chgData name="Hou, Bowen" userId="cbd36780-c17d-4782-a6cd-6dd8a1dcdc2c" providerId="ADAL" clId="{C9303CD7-D17E-4514-AC6E-4EFA4FDCDEDB}" dt="2025-02-25T14:08:36.400" v="157" actId="478"/>
-          <ac:cxnSpMkLst>
-            <pc:docMk/>
-            <pc:sldMk cId="340494126" sldId="257"/>
-            <ac:cxnSpMk id="492" creationId="{826C42A9-65BC-CAB6-DD63-9D0B74DB43DB}"/>
-          </ac:cxnSpMkLst>
-        </pc:cxnChg>
         <pc:cxnChg chg="mod">
           <ac:chgData name="Hou, Bowen" userId="cbd36780-c17d-4782-a6cd-6dd8a1dcdc2c" providerId="ADAL" clId="{C9303CD7-D17E-4514-AC6E-4EFA4FDCDEDB}" dt="2025-02-25T19:05:43.300" v="523" actId="14100"/>
           <ac:cxnSpMkLst>
@@ -3557,6 +2444,221 @@
             <pc:docMk/>
             <pc:sldMk cId="340494126" sldId="257"/>
             <ac:cxnSpMk id="503" creationId="{F8668EF5-346B-0AF6-2002-3D31546E643F}"/>
+          </ac:cxnSpMkLst>
+        </pc:cxnChg>
+      </pc:sldChg>
+      <pc:sldChg chg="addSp delSp modSp mod">
+        <pc:chgData name="Hou, Bowen" userId="cbd36780-c17d-4782-a6cd-6dd8a1dcdc2c" providerId="ADAL" clId="{C9303CD7-D17E-4514-AC6E-4EFA4FDCDEDB}" dt="2025-02-28T00:33:09.347" v="820" actId="1076"/>
+        <pc:sldMkLst>
+          <pc:docMk/>
+          <pc:sldMk cId="3169227195" sldId="258"/>
+        </pc:sldMkLst>
+        <pc:spChg chg="add mod">
+          <ac:chgData name="Hou, Bowen" userId="cbd36780-c17d-4782-a6cd-6dd8a1dcdc2c" providerId="ADAL" clId="{C9303CD7-D17E-4514-AC6E-4EFA4FDCDEDB}" dt="2025-02-28T00:32:41.328" v="815" actId="207"/>
+          <ac:spMkLst>
+            <pc:docMk/>
+            <pc:sldMk cId="3169227195" sldId="258"/>
+            <ac:spMk id="2" creationId="{F8CB31D1-5317-8697-4DBD-98BFFB12F711}"/>
+          </ac:spMkLst>
+        </pc:spChg>
+        <pc:spChg chg="mod">
+          <ac:chgData name="Hou, Bowen" userId="cbd36780-c17d-4782-a6cd-6dd8a1dcdc2c" providerId="ADAL" clId="{C9303CD7-D17E-4514-AC6E-4EFA4FDCDEDB}" dt="2025-02-28T00:28:28.256" v="747" actId="1076"/>
+          <ac:spMkLst>
+            <pc:docMk/>
+            <pc:sldMk cId="3169227195" sldId="258"/>
+            <ac:spMk id="4" creationId="{FC2B2D0A-30DD-A883-114E-7DF8C68A91A0}"/>
+          </ac:spMkLst>
+        </pc:spChg>
+        <pc:spChg chg="add mod">
+          <ac:chgData name="Hou, Bowen" userId="cbd36780-c17d-4782-a6cd-6dd8a1dcdc2c" providerId="ADAL" clId="{C9303CD7-D17E-4514-AC6E-4EFA4FDCDEDB}" dt="2025-02-28T00:32:47.327" v="816" actId="207"/>
+          <ac:spMkLst>
+            <pc:docMk/>
+            <pc:sldMk cId="3169227195" sldId="258"/>
+            <ac:spMk id="33" creationId="{586F083E-EC33-A9D3-78E7-C68056DAAE93}"/>
+          </ac:spMkLst>
+        </pc:spChg>
+        <pc:spChg chg="mod">
+          <ac:chgData name="Hou, Bowen" userId="cbd36780-c17d-4782-a6cd-6dd8a1dcdc2c" providerId="ADAL" clId="{C9303CD7-D17E-4514-AC6E-4EFA4FDCDEDB}" dt="2025-02-28T00:28:28.256" v="747" actId="1076"/>
+          <ac:spMkLst>
+            <pc:docMk/>
+            <pc:sldMk cId="3169227195" sldId="258"/>
+            <ac:spMk id="35" creationId="{EB7E8058-BDD9-516D-1E16-453893CE2BCA}"/>
+          </ac:spMkLst>
+        </pc:spChg>
+        <pc:spChg chg="mod">
+          <ac:chgData name="Hou, Bowen" userId="cbd36780-c17d-4782-a6cd-6dd8a1dcdc2c" providerId="ADAL" clId="{C9303CD7-D17E-4514-AC6E-4EFA4FDCDEDB}" dt="2025-02-28T00:28:28.256" v="747" actId="1076"/>
+          <ac:spMkLst>
+            <pc:docMk/>
+            <pc:sldMk cId="3169227195" sldId="258"/>
+            <ac:spMk id="38" creationId="{B25DBE3D-7A2D-E471-5370-71D5EFF98E83}"/>
+          </ac:spMkLst>
+        </pc:spChg>
+        <pc:spChg chg="add del mod">
+          <ac:chgData name="Hou, Bowen" userId="cbd36780-c17d-4782-a6cd-6dd8a1dcdc2c" providerId="ADAL" clId="{C9303CD7-D17E-4514-AC6E-4EFA4FDCDEDB}" dt="2025-02-28T00:32:49.889" v="817" actId="478"/>
+          <ac:spMkLst>
+            <pc:docMk/>
+            <pc:sldMk cId="3169227195" sldId="258"/>
+            <ac:spMk id="42" creationId="{4960CC4C-4967-441C-CC23-3F104D1AAB9A}"/>
+          </ac:spMkLst>
+        </pc:spChg>
+        <pc:spChg chg="mod">
+          <ac:chgData name="Hou, Bowen" userId="cbd36780-c17d-4782-a6cd-6dd8a1dcdc2c" providerId="ADAL" clId="{C9303CD7-D17E-4514-AC6E-4EFA4FDCDEDB}" dt="2025-02-28T00:33:09.347" v="820" actId="1076"/>
+          <ac:spMkLst>
+            <pc:docMk/>
+            <pc:sldMk cId="3169227195" sldId="258"/>
+            <ac:spMk id="58" creationId="{3CACC550-6486-4737-4234-96D3CA9AF61A}"/>
+          </ac:spMkLst>
+        </pc:spChg>
+        <pc:spChg chg="mod">
+          <ac:chgData name="Hou, Bowen" userId="cbd36780-c17d-4782-a6cd-6dd8a1dcdc2c" providerId="ADAL" clId="{C9303CD7-D17E-4514-AC6E-4EFA4FDCDEDB}" dt="2025-02-28T00:29:48.766" v="769" actId="692"/>
+          <ac:spMkLst>
+            <pc:docMk/>
+            <pc:sldMk cId="3169227195" sldId="258"/>
+            <ac:spMk id="67" creationId="{B72D9564-FB1F-0CEE-D3D6-79085D1BA770}"/>
+          </ac:spMkLst>
+        </pc:spChg>
+        <pc:spChg chg="mod">
+          <ac:chgData name="Hou, Bowen" userId="cbd36780-c17d-4782-a6cd-6dd8a1dcdc2c" providerId="ADAL" clId="{C9303CD7-D17E-4514-AC6E-4EFA4FDCDEDB}" dt="2025-02-28T00:30:12.312" v="779" actId="1076"/>
+          <ac:spMkLst>
+            <pc:docMk/>
+            <pc:sldMk cId="3169227195" sldId="258"/>
+            <ac:spMk id="74" creationId="{13449047-5AD4-DA6A-FEA9-8BF6FC70C0AB}"/>
+          </ac:spMkLst>
+        </pc:spChg>
+        <pc:spChg chg="mod">
+          <ac:chgData name="Hou, Bowen" userId="cbd36780-c17d-4782-a6cd-6dd8a1dcdc2c" providerId="ADAL" clId="{C9303CD7-D17E-4514-AC6E-4EFA4FDCDEDB}" dt="2025-02-28T00:30:09.499" v="778" actId="1076"/>
+          <ac:spMkLst>
+            <pc:docMk/>
+            <pc:sldMk cId="3169227195" sldId="258"/>
+            <ac:spMk id="76" creationId="{A6966AE9-7AB7-650E-325A-9F53B1654C24}"/>
+          </ac:spMkLst>
+        </pc:spChg>
+        <pc:spChg chg="mod">
+          <ac:chgData name="Hou, Bowen" userId="cbd36780-c17d-4782-a6cd-6dd8a1dcdc2c" providerId="ADAL" clId="{C9303CD7-D17E-4514-AC6E-4EFA4FDCDEDB}" dt="2025-02-28T00:30:02.761" v="775" actId="1076"/>
+          <ac:spMkLst>
+            <pc:docMk/>
+            <pc:sldMk cId="3169227195" sldId="258"/>
+            <ac:spMk id="78" creationId="{41786631-8E50-8316-5C26-264E3A08C233}"/>
+          </ac:spMkLst>
+        </pc:spChg>
+        <pc:spChg chg="mod">
+          <ac:chgData name="Hou, Bowen" userId="cbd36780-c17d-4782-a6cd-6dd8a1dcdc2c" providerId="ADAL" clId="{C9303CD7-D17E-4514-AC6E-4EFA4FDCDEDB}" dt="2025-02-28T00:28:48.704" v="752" actId="1076"/>
+          <ac:spMkLst>
+            <pc:docMk/>
+            <pc:sldMk cId="3169227195" sldId="258"/>
+            <ac:spMk id="457" creationId="{A0736324-BAAE-5E7C-6EF7-9651A504355C}"/>
+          </ac:spMkLst>
+        </pc:spChg>
+        <pc:spChg chg="mod">
+          <ac:chgData name="Hou, Bowen" userId="cbd36780-c17d-4782-a6cd-6dd8a1dcdc2c" providerId="ADAL" clId="{C9303CD7-D17E-4514-AC6E-4EFA4FDCDEDB}" dt="2025-02-28T00:30:06.891" v="777" actId="1076"/>
+          <ac:spMkLst>
+            <pc:docMk/>
+            <pc:sldMk cId="3169227195" sldId="258"/>
+            <ac:spMk id="500" creationId="{641B8852-ABEF-0236-7E84-F722616EC93D}"/>
+          </ac:spMkLst>
+        </pc:spChg>
+        <pc:spChg chg="mod">
+          <ac:chgData name="Hou, Bowen" userId="cbd36780-c17d-4782-a6cd-6dd8a1dcdc2c" providerId="ADAL" clId="{C9303CD7-D17E-4514-AC6E-4EFA4FDCDEDB}" dt="2025-02-28T00:33:05.519" v="819" actId="1076"/>
+          <ac:spMkLst>
+            <pc:docMk/>
+            <pc:sldMk cId="3169227195" sldId="258"/>
+            <ac:spMk id="501" creationId="{6492E6D0-4428-2915-E547-2920A1F00DFB}"/>
+          </ac:spMkLst>
+        </pc:spChg>
+        <pc:spChg chg="mod">
+          <ac:chgData name="Hou, Bowen" userId="cbd36780-c17d-4782-a6cd-6dd8a1dcdc2c" providerId="ADAL" clId="{C9303CD7-D17E-4514-AC6E-4EFA4FDCDEDB}" dt="2025-02-28T00:30:05.389" v="776" actId="1076"/>
+          <ac:spMkLst>
+            <pc:docMk/>
+            <pc:sldMk cId="3169227195" sldId="258"/>
+            <ac:spMk id="504" creationId="{01EA5C54-D87C-BC43-804C-DB23FFB4CF1F}"/>
+          </ac:spMkLst>
+        </pc:spChg>
+        <pc:grpChg chg="mod">
+          <ac:chgData name="Hou, Bowen" userId="cbd36780-c17d-4782-a6cd-6dd8a1dcdc2c" providerId="ADAL" clId="{C9303CD7-D17E-4514-AC6E-4EFA4FDCDEDB}" dt="2025-02-28T00:28:28.256" v="747" actId="1076"/>
+          <ac:grpSpMkLst>
+            <pc:docMk/>
+            <pc:sldMk cId="3169227195" sldId="258"/>
+            <ac:grpSpMk id="10" creationId="{BC0E97EB-AEB3-DF3E-0165-083AF53BDC67}"/>
+          </ac:grpSpMkLst>
+        </pc:grpChg>
+        <pc:grpChg chg="mod">
+          <ac:chgData name="Hou, Bowen" userId="cbd36780-c17d-4782-a6cd-6dd8a1dcdc2c" providerId="ADAL" clId="{C9303CD7-D17E-4514-AC6E-4EFA4FDCDEDB}" dt="2025-02-28T00:30:01.132" v="774" actId="1076"/>
+          <ac:grpSpMkLst>
+            <pc:docMk/>
+            <pc:sldMk cId="3169227195" sldId="258"/>
+            <ac:grpSpMk id="70" creationId="{A9918B30-2787-B652-F5E9-40784A8EA8D7}"/>
+          </ac:grpSpMkLst>
+        </pc:grpChg>
+        <pc:cxnChg chg="add mod">
+          <ac:chgData name="Hou, Bowen" userId="cbd36780-c17d-4782-a6cd-6dd8a1dcdc2c" providerId="ADAL" clId="{C9303CD7-D17E-4514-AC6E-4EFA4FDCDEDB}" dt="2025-02-28T00:28:23.696" v="746" actId="1076"/>
+          <ac:cxnSpMkLst>
+            <pc:docMk/>
+            <pc:sldMk cId="3169227195" sldId="258"/>
+            <ac:cxnSpMk id="3" creationId="{463EAE0B-03B9-7301-19E2-2562E28916D0}"/>
+          </ac:cxnSpMkLst>
+        </pc:cxnChg>
+        <pc:cxnChg chg="mod">
+          <ac:chgData name="Hou, Bowen" userId="cbd36780-c17d-4782-a6cd-6dd8a1dcdc2c" providerId="ADAL" clId="{C9303CD7-D17E-4514-AC6E-4EFA4FDCDEDB}" dt="2025-02-28T00:28:19.349" v="744" actId="1076"/>
+          <ac:cxnSpMkLst>
+            <pc:docMk/>
+            <pc:sldMk cId="3169227195" sldId="258"/>
+            <ac:cxnSpMk id="5" creationId="{3EAD9C3D-56DC-BB92-E46F-4D2C51BDC65E}"/>
+          </ac:cxnSpMkLst>
+        </pc:cxnChg>
+        <pc:cxnChg chg="mod">
+          <ac:chgData name="Hou, Bowen" userId="cbd36780-c17d-4782-a6cd-6dd8a1dcdc2c" providerId="ADAL" clId="{C9303CD7-D17E-4514-AC6E-4EFA4FDCDEDB}" dt="2025-02-28T00:28:28.256" v="747" actId="1076"/>
+          <ac:cxnSpMkLst>
+            <pc:docMk/>
+            <pc:sldMk cId="3169227195" sldId="258"/>
+            <ac:cxnSpMk id="36" creationId="{6123581F-3187-9F53-1653-F517DEE7BEFD}"/>
+          </ac:cxnSpMkLst>
+        </pc:cxnChg>
+        <pc:cxnChg chg="mod">
+          <ac:chgData name="Hou, Bowen" userId="cbd36780-c17d-4782-a6cd-6dd8a1dcdc2c" providerId="ADAL" clId="{C9303CD7-D17E-4514-AC6E-4EFA4FDCDEDB}" dt="2025-02-28T00:28:28.256" v="747" actId="1076"/>
+          <ac:cxnSpMkLst>
+            <pc:docMk/>
+            <pc:sldMk cId="3169227195" sldId="258"/>
+            <ac:cxnSpMk id="37" creationId="{7D77FA08-BFB9-E61F-69AE-4825C43FABE5}"/>
+          </ac:cxnSpMkLst>
+        </pc:cxnChg>
+        <pc:cxnChg chg="mod">
+          <ac:chgData name="Hou, Bowen" userId="cbd36780-c17d-4782-a6cd-6dd8a1dcdc2c" providerId="ADAL" clId="{C9303CD7-D17E-4514-AC6E-4EFA4FDCDEDB}" dt="2025-02-28T00:28:28.256" v="747" actId="1076"/>
+          <ac:cxnSpMkLst>
+            <pc:docMk/>
+            <pc:sldMk cId="3169227195" sldId="258"/>
+            <ac:cxnSpMk id="39" creationId="{7FCFE08D-C47E-788F-5638-CD95B58DE8E9}"/>
+          </ac:cxnSpMkLst>
+        </pc:cxnChg>
+        <pc:cxnChg chg="add mod">
+          <ac:chgData name="Hou, Bowen" userId="cbd36780-c17d-4782-a6cd-6dd8a1dcdc2c" providerId="ADAL" clId="{C9303CD7-D17E-4514-AC6E-4EFA4FDCDEDB}" dt="2025-02-28T00:29:56.082" v="771" actId="1076"/>
+          <ac:cxnSpMkLst>
+            <pc:docMk/>
+            <pc:sldMk cId="3169227195" sldId="258"/>
+            <ac:cxnSpMk id="40" creationId="{BAAF43F5-1AC0-E23D-2742-D1182BF5D4F2}"/>
+          </ac:cxnSpMkLst>
+        </pc:cxnChg>
+        <pc:cxnChg chg="mod">
+          <ac:chgData name="Hou, Bowen" userId="cbd36780-c17d-4782-a6cd-6dd8a1dcdc2c" providerId="ADAL" clId="{C9303CD7-D17E-4514-AC6E-4EFA4FDCDEDB}" dt="2025-02-28T00:29:59.232" v="772" actId="14100"/>
+          <ac:cxnSpMkLst>
+            <pc:docMk/>
+            <pc:sldMk cId="3169227195" sldId="258"/>
+            <ac:cxnSpMk id="66" creationId="{3862608E-0F11-4D45-637F-65524456B73E}"/>
+          </ac:cxnSpMkLst>
+        </pc:cxnChg>
+        <pc:cxnChg chg="mod">
+          <ac:chgData name="Hou, Bowen" userId="cbd36780-c17d-4782-a6cd-6dd8a1dcdc2c" providerId="ADAL" clId="{C9303CD7-D17E-4514-AC6E-4EFA4FDCDEDB}" dt="2025-02-28T00:30:05.389" v="776" actId="1076"/>
+          <ac:cxnSpMkLst>
+            <pc:docMk/>
+            <pc:sldMk cId="3169227195" sldId="258"/>
+            <ac:cxnSpMk id="503" creationId="{50FAB047-41D7-9A4F-AF5F-75A5C7E8B883}"/>
+          </ac:cxnSpMkLst>
+        </pc:cxnChg>
+        <pc:cxnChg chg="mod">
+          <ac:chgData name="Hou, Bowen" userId="cbd36780-c17d-4782-a6cd-6dd8a1dcdc2c" providerId="ADAL" clId="{C9303CD7-D17E-4514-AC6E-4EFA4FDCDEDB}" dt="2025-02-28T00:30:05.389" v="776" actId="1076"/>
+          <ac:cxnSpMkLst>
+            <pc:docMk/>
+            <pc:sldMk cId="3169227195" sldId="258"/>
+            <ac:cxnSpMk id="505" creationId="{A5B1398F-258A-6B9E-A635-BFB04B52ED19}"/>
           </ac:cxnSpMkLst>
         </pc:cxnChg>
       </pc:sldChg>
@@ -3566,94 +2668,6 @@
           <pc:docMk/>
           <pc:sldMk cId="4217307390" sldId="258"/>
         </pc:sldMkLst>
-        <pc:spChg chg="del">
-          <ac:chgData name="Hou, Bowen" userId="cbd36780-c17d-4782-a6cd-6dd8a1dcdc2c" providerId="ADAL" clId="{C9303CD7-D17E-4514-AC6E-4EFA4FDCDEDB}" dt="2025-02-25T14:03:25.132" v="84" actId="478"/>
-          <ac:spMkLst>
-            <pc:docMk/>
-            <pc:sldMk cId="4217307390" sldId="258"/>
-            <ac:spMk id="2" creationId="{7808CDCF-4AC4-3E36-1146-32A47DA4A7F3}"/>
-          </ac:spMkLst>
-        </pc:spChg>
-        <pc:spChg chg="del">
-          <ac:chgData name="Hou, Bowen" userId="cbd36780-c17d-4782-a6cd-6dd8a1dcdc2c" providerId="ADAL" clId="{C9303CD7-D17E-4514-AC6E-4EFA4FDCDEDB}" dt="2025-02-25T14:03:25.132" v="84" actId="478"/>
-          <ac:spMkLst>
-            <pc:docMk/>
-            <pc:sldMk cId="4217307390" sldId="258"/>
-            <ac:spMk id="3" creationId="{25C2203F-AE9D-A1CA-18BE-1BBF8BBCDE5A}"/>
-          </ac:spMkLst>
-        </pc:spChg>
-        <pc:spChg chg="add mod ord">
-          <ac:chgData name="Hou, Bowen" userId="cbd36780-c17d-4782-a6cd-6dd8a1dcdc2c" providerId="ADAL" clId="{C9303CD7-D17E-4514-AC6E-4EFA4FDCDEDB}" dt="2025-02-25T14:09:37.045" v="174" actId="1076"/>
-          <ac:spMkLst>
-            <pc:docMk/>
-            <pc:sldMk cId="4217307390" sldId="258"/>
-            <ac:spMk id="4" creationId="{0A17E8BA-BEAB-EE99-BA54-0F10CFCB6161}"/>
-          </ac:spMkLst>
-        </pc:spChg>
-        <pc:spChg chg="add del mod">
-          <ac:chgData name="Hou, Bowen" userId="cbd36780-c17d-4782-a6cd-6dd8a1dcdc2c" providerId="ADAL" clId="{C9303CD7-D17E-4514-AC6E-4EFA4FDCDEDB}" dt="2025-02-25T14:06:58.878" v="113" actId="478"/>
-          <ac:spMkLst>
-            <pc:docMk/>
-            <pc:sldMk cId="4217307390" sldId="258"/>
-            <ac:spMk id="5" creationId="{9B9C4A32-0E20-CAB4-D1EA-F08A86FEB3F4}"/>
-          </ac:spMkLst>
-        </pc:spChg>
-        <pc:spChg chg="add mod ord">
-          <ac:chgData name="Hou, Bowen" userId="cbd36780-c17d-4782-a6cd-6dd8a1dcdc2c" providerId="ADAL" clId="{C9303CD7-D17E-4514-AC6E-4EFA4FDCDEDB}" dt="2025-02-25T14:07:11.445" v="119" actId="164"/>
-          <ac:spMkLst>
-            <pc:docMk/>
-            <pc:sldMk cId="4217307390" sldId="258"/>
-            <ac:spMk id="6" creationId="{6F73FFDF-D49C-4590-02B6-65CC37677716}"/>
-          </ac:spMkLst>
-        </pc:spChg>
-        <pc:spChg chg="add mod ord">
-          <ac:chgData name="Hou, Bowen" userId="cbd36780-c17d-4782-a6cd-6dd8a1dcdc2c" providerId="ADAL" clId="{C9303CD7-D17E-4514-AC6E-4EFA4FDCDEDB}" dt="2025-02-25T14:09:37.045" v="174" actId="1076"/>
-          <ac:spMkLst>
-            <pc:docMk/>
-            <pc:sldMk cId="4217307390" sldId="258"/>
-            <ac:spMk id="7" creationId="{A748ED72-6D00-0755-3E6B-C5684D692283}"/>
-          </ac:spMkLst>
-        </pc:spChg>
-        <pc:spChg chg="add mod">
-          <ac:chgData name="Hou, Bowen" userId="cbd36780-c17d-4782-a6cd-6dd8a1dcdc2c" providerId="ADAL" clId="{C9303CD7-D17E-4514-AC6E-4EFA4FDCDEDB}" dt="2025-02-25T14:15:21.094" v="246" actId="207"/>
-          <ac:spMkLst>
-            <pc:docMk/>
-            <pc:sldMk cId="4217307390" sldId="258"/>
-            <ac:spMk id="9" creationId="{FD3FBC6B-496F-E7B4-EAF7-B820C4B9E1E5}"/>
-          </ac:spMkLst>
-        </pc:spChg>
-        <pc:spChg chg="add mod ord">
-          <ac:chgData name="Hou, Bowen" userId="cbd36780-c17d-4782-a6cd-6dd8a1dcdc2c" providerId="ADAL" clId="{C9303CD7-D17E-4514-AC6E-4EFA4FDCDEDB}" dt="2025-02-25T14:15:28.648" v="251" actId="167"/>
-          <ac:spMkLst>
-            <pc:docMk/>
-            <pc:sldMk cId="4217307390" sldId="258"/>
-            <ac:spMk id="10" creationId="{D5F7F35C-B18A-4091-D401-C56315E9DAD5}"/>
-          </ac:spMkLst>
-        </pc:spChg>
-        <pc:spChg chg="add mod">
-          <ac:chgData name="Hou, Bowen" userId="cbd36780-c17d-4782-a6cd-6dd8a1dcdc2c" providerId="ADAL" clId="{C9303CD7-D17E-4514-AC6E-4EFA4FDCDEDB}" dt="2025-02-25T14:10:35.266" v="193" actId="1076"/>
-          <ac:spMkLst>
-            <pc:docMk/>
-            <pc:sldMk cId="4217307390" sldId="258"/>
-            <ac:spMk id="11" creationId="{CF41E452-6903-FA6B-53C8-E8CDDD9BA523}"/>
-          </ac:spMkLst>
-        </pc:spChg>
-        <pc:spChg chg="add mod ord">
-          <ac:chgData name="Hou, Bowen" userId="cbd36780-c17d-4782-a6cd-6dd8a1dcdc2c" providerId="ADAL" clId="{C9303CD7-D17E-4514-AC6E-4EFA4FDCDEDB}" dt="2025-02-25T14:15:33.364" v="252" actId="1036"/>
-          <ac:spMkLst>
-            <pc:docMk/>
-            <pc:sldMk cId="4217307390" sldId="258"/>
-            <ac:spMk id="12" creationId="{5AAA92D8-B72D-8F49-DB68-7619F25F981D}"/>
-          </ac:spMkLst>
-        </pc:spChg>
-        <pc:grpChg chg="add mod">
-          <ac:chgData name="Hou, Bowen" userId="cbd36780-c17d-4782-a6cd-6dd8a1dcdc2c" providerId="ADAL" clId="{C9303CD7-D17E-4514-AC6E-4EFA4FDCDEDB}" dt="2025-02-25T14:07:15.860" v="121" actId="1076"/>
-          <ac:grpSpMkLst>
-            <pc:docMk/>
-            <pc:sldMk cId="4217307390" sldId="258"/>
-            <ac:grpSpMk id="8" creationId="{D4111246-8C3C-6887-0970-962EFB523ED2}"/>
-          </ac:grpSpMkLst>
-        </pc:grpChg>
       </pc:sldChg>
     </pc:docChg>
   </pc:docChgLst>
@@ -3809,7 +2823,7 @@
           <a:p>
             <a:fld id="{3CC26049-C0F2-49D4-8CC1-1C79E76B9D77}" type="datetimeFigureOut">
               <a:rPr lang="zh-CN" altLang="en-US" smtClean="0"/>
-              <a:t>2025/2/25</a:t>
+              <a:t>2025/2/27</a:t>
             </a:fld>
             <a:endParaRPr lang="zh-CN" altLang="en-US"/>
           </a:p>
@@ -4009,7 +3023,7 @@
           <a:p>
             <a:fld id="{3CC26049-C0F2-49D4-8CC1-1C79E76B9D77}" type="datetimeFigureOut">
               <a:rPr lang="zh-CN" altLang="en-US" smtClean="0"/>
-              <a:t>2025/2/25</a:t>
+              <a:t>2025/2/27</a:t>
             </a:fld>
             <a:endParaRPr lang="zh-CN" altLang="en-US"/>
           </a:p>
@@ -4219,7 +3233,7 @@
           <a:p>
             <a:fld id="{3CC26049-C0F2-49D4-8CC1-1C79E76B9D77}" type="datetimeFigureOut">
               <a:rPr lang="zh-CN" altLang="en-US" smtClean="0"/>
-              <a:t>2025/2/25</a:t>
+              <a:t>2025/2/27</a:t>
             </a:fld>
             <a:endParaRPr lang="zh-CN" altLang="en-US"/>
           </a:p>
@@ -4419,7 +3433,7 @@
           <a:p>
             <a:fld id="{3CC26049-C0F2-49D4-8CC1-1C79E76B9D77}" type="datetimeFigureOut">
               <a:rPr lang="zh-CN" altLang="en-US" smtClean="0"/>
-              <a:t>2025/2/25</a:t>
+              <a:t>2025/2/27</a:t>
             </a:fld>
             <a:endParaRPr lang="zh-CN" altLang="en-US"/>
           </a:p>
@@ -4695,7 +3709,7 @@
           <a:p>
             <a:fld id="{3CC26049-C0F2-49D4-8CC1-1C79E76B9D77}" type="datetimeFigureOut">
               <a:rPr lang="zh-CN" altLang="en-US" smtClean="0"/>
-              <a:t>2025/2/25</a:t>
+              <a:t>2025/2/27</a:t>
             </a:fld>
             <a:endParaRPr lang="zh-CN" altLang="en-US"/>
           </a:p>
@@ -4963,7 +3977,7 @@
           <a:p>
             <a:fld id="{3CC26049-C0F2-49D4-8CC1-1C79E76B9D77}" type="datetimeFigureOut">
               <a:rPr lang="zh-CN" altLang="en-US" smtClean="0"/>
-              <a:t>2025/2/25</a:t>
+              <a:t>2025/2/27</a:t>
             </a:fld>
             <a:endParaRPr lang="zh-CN" altLang="en-US"/>
           </a:p>
@@ -5378,7 +4392,7 @@
           <a:p>
             <a:fld id="{3CC26049-C0F2-49D4-8CC1-1C79E76B9D77}" type="datetimeFigureOut">
               <a:rPr lang="zh-CN" altLang="en-US" smtClean="0"/>
-              <a:t>2025/2/25</a:t>
+              <a:t>2025/2/27</a:t>
             </a:fld>
             <a:endParaRPr lang="zh-CN" altLang="en-US"/>
           </a:p>
@@ -5520,7 +4534,7 @@
           <a:p>
             <a:fld id="{3CC26049-C0F2-49D4-8CC1-1C79E76B9D77}" type="datetimeFigureOut">
               <a:rPr lang="zh-CN" altLang="en-US" smtClean="0"/>
-              <a:t>2025/2/25</a:t>
+              <a:t>2025/2/27</a:t>
             </a:fld>
             <a:endParaRPr lang="zh-CN" altLang="en-US"/>
           </a:p>
@@ -5633,7 +4647,7 @@
           <a:p>
             <a:fld id="{3CC26049-C0F2-49D4-8CC1-1C79E76B9D77}" type="datetimeFigureOut">
               <a:rPr lang="zh-CN" altLang="en-US" smtClean="0"/>
-              <a:t>2025/2/25</a:t>
+              <a:t>2025/2/27</a:t>
             </a:fld>
             <a:endParaRPr lang="zh-CN" altLang="en-US"/>
           </a:p>
@@ -5946,7 +4960,7 @@
           <a:p>
             <a:fld id="{3CC26049-C0F2-49D4-8CC1-1C79E76B9D77}" type="datetimeFigureOut">
               <a:rPr lang="zh-CN" altLang="en-US" smtClean="0"/>
-              <a:t>2025/2/25</a:t>
+              <a:t>2025/2/27</a:t>
             </a:fld>
             <a:endParaRPr lang="zh-CN" altLang="en-US"/>
           </a:p>
@@ -6235,7 +5249,7 @@
           <a:p>
             <a:fld id="{3CC26049-C0F2-49D4-8CC1-1C79E76B9D77}" type="datetimeFigureOut">
               <a:rPr lang="zh-CN" altLang="en-US" smtClean="0"/>
-              <a:t>2025/2/25</a:t>
+              <a:t>2025/2/27</a:t>
             </a:fld>
             <a:endParaRPr lang="zh-CN" altLang="en-US"/>
           </a:p>
@@ -6478,7 +5492,7 @@
           <a:p>
             <a:fld id="{3CC26049-C0F2-49D4-8CC1-1C79E76B9D77}" type="datetimeFigureOut">
               <a:rPr lang="zh-CN" altLang="en-US" smtClean="0"/>
-              <a:t>2025/2/25</a:t>
+              <a:t>2025/2/27</a:t>
             </a:fld>
             <a:endParaRPr lang="zh-CN" altLang="en-US"/>
           </a:p>
@@ -6909,10 +5923,10 @@
         </p:nvGrpSpPr>
         <p:grpSpPr>
           <a:xfrm>
-            <a:off x="1782570" y="18164"/>
-            <a:ext cx="1445368" cy="3410836"/>
-            <a:chOff x="2954272" y="1802807"/>
-            <a:chExt cx="1445368" cy="3410836"/>
+            <a:off x="1845348" y="57908"/>
+            <a:ext cx="1422711" cy="3321158"/>
+            <a:chOff x="3023983" y="1842551"/>
+            <a:chExt cx="1422711" cy="3321158"/>
           </a:xfrm>
         </p:grpSpPr>
         <p:sp>
@@ -7088,8 +6102,8 @@
               </a:prstGeom>
             </p:spPr>
           </p:pic>
-          <mc:AlternateContent xmlns:mc="http://schemas.openxmlformats.org/markup-compatibility/2006">
-            <mc:Choice xmlns:a14="http://schemas.microsoft.com/office/drawing/2010/main" Requires="a14">
+          <mc:AlternateContent xmlns:mc="http://schemas.openxmlformats.org/markup-compatibility/2006" xmlns:a14="http://schemas.microsoft.com/office/drawing/2010/main">
+            <mc:Choice Requires="a14">
               <p:sp>
                 <p:nvSpPr>
                   <p:cNvPr id="377" name="TextBox 376">
@@ -7155,7 +6169,7 @@
                 </p:txBody>
               </p:sp>
             </mc:Choice>
-            <mc:Fallback>
+            <mc:Fallback xmlns="">
               <p:sp>
                 <p:nvSpPr>
                   <p:cNvPr id="377" name="TextBox 376">
@@ -7295,7 +6309,7 @@
           </p:nvSpPr>
           <p:spPr>
             <a:xfrm>
-              <a:off x="3137809" y="4188405"/>
+              <a:off x="3137809" y="4144583"/>
               <a:ext cx="1234051" cy="376642"/>
             </a:xfrm>
             <a:prstGeom prst="roundRect">
@@ -7377,7 +6391,7 @@
           </p:nvCxnSpPr>
           <p:spPr>
             <a:xfrm flipV="1">
-              <a:off x="3754835" y="4565047"/>
+              <a:off x="3754835" y="4521225"/>
               <a:ext cx="0" cy="127920"/>
             </a:xfrm>
             <a:prstGeom prst="straightConnector1">
@@ -7424,7 +6438,7 @@
           <p:spPr>
             <a:xfrm flipH="1" flipV="1">
               <a:off x="3751660" y="3880143"/>
-              <a:ext cx="3175" cy="308262"/>
+              <a:ext cx="3175" cy="264440"/>
             </a:xfrm>
             <a:prstGeom prst="straightConnector1">
               <a:avLst/>
@@ -7465,7 +6479,7 @@
           </p:nvSpPr>
           <p:spPr>
             <a:xfrm>
-              <a:off x="3165589" y="4936644"/>
+              <a:off x="3212643" y="4886710"/>
               <a:ext cx="1234051" cy="276999"/>
             </a:xfrm>
             <a:prstGeom prst="rect">
@@ -7508,13 +6522,14 @@
             </p:cNvPr>
             <p:cNvCxnSpPr>
               <a:cxnSpLocks/>
+              <a:endCxn id="5" idx="2"/>
             </p:cNvCxnSpPr>
             <p:nvPr/>
           </p:nvCxnSpPr>
           <p:spPr>
-            <a:xfrm flipV="1">
-              <a:off x="4184441" y="2404839"/>
-              <a:ext cx="0" cy="354463"/>
+            <a:xfrm flipH="1" flipV="1">
+              <a:off x="4141199" y="2417201"/>
+              <a:ext cx="6576" cy="328903"/>
             </a:xfrm>
             <a:prstGeom prst="straightConnector1">
               <a:avLst/>
@@ -7558,8 +6573,8 @@
           </p:nvCxnSpPr>
           <p:spPr>
             <a:xfrm flipV="1">
-              <a:off x="3370410" y="2404839"/>
-              <a:ext cx="0" cy="330241"/>
+              <a:off x="3363069" y="2417765"/>
+              <a:ext cx="0" cy="328339"/>
             </a:xfrm>
             <a:prstGeom prst="straightConnector1">
               <a:avLst/>
@@ -7600,8 +6615,8 @@
           </p:nvSpPr>
           <p:spPr>
             <a:xfrm>
-              <a:off x="2954272" y="2140256"/>
-              <a:ext cx="832275" cy="264583"/>
+              <a:off x="3023983" y="2214896"/>
+              <a:ext cx="678172" cy="202869"/>
             </a:xfrm>
             <a:prstGeom prst="roundRect">
               <a:avLst/>
@@ -7668,7 +6683,7 @@
           </p:nvCxnSpPr>
           <p:spPr>
             <a:xfrm flipV="1">
-              <a:off x="3382441" y="2015832"/>
+              <a:off x="3354672" y="2086037"/>
               <a:ext cx="0" cy="124424"/>
             </a:xfrm>
             <a:prstGeom prst="straightConnector1">
@@ -7710,7 +6725,7 @@
           </p:nvSpPr>
           <p:spPr>
             <a:xfrm>
-              <a:off x="3085815" y="1802807"/>
+              <a:off x="3068878" y="1842551"/>
               <a:ext cx="611065" cy="276999"/>
             </a:xfrm>
             <a:prstGeom prst="rect">
@@ -7733,12 +6748,58 @@
           </p:txBody>
         </p:sp>
       </p:grpSp>
+      <p:sp>
+        <p:nvSpPr>
+          <p:cNvPr id="277" name="TextBox 276">
+            <a:extLst>
+              <a:ext uri="{FF2B5EF4-FFF2-40B4-BE49-F238E27FC236}">
+                <a16:creationId xmlns:a16="http://schemas.microsoft.com/office/drawing/2014/main" id="{5CD9A01B-A7EE-DE12-A993-866631CA1799}"/>
+              </a:ext>
+            </a:extLst>
+          </p:cNvPr>
+          <p:cNvSpPr txBox="1"/>
+          <p:nvPr/>
+        </p:nvSpPr>
+        <p:spPr>
+          <a:xfrm>
+            <a:off x="67190" y="3285686"/>
+            <a:ext cx="2065206" cy="276999"/>
+          </a:xfrm>
+          <a:prstGeom prst="rect">
+            <a:avLst/>
+          </a:prstGeom>
+          <a:noFill/>
+          <a:ln>
+            <a:noFill/>
+          </a:ln>
+        </p:spPr>
+        <p:txBody>
+          <a:bodyPr wrap="square" rtlCol="0">
+            <a:spAutoFit/>
+          </a:bodyPr>
+          <a:lstStyle/>
+          <a:p>
+            <a:pPr algn="ctr"/>
+            <a:r>
+              <a:rPr lang="en-US" altLang="zh-CN" sz="1200" dirty="0">
+                <a:latin typeface="Arial" panose="020B0604020202020204" pitchFamily="34" charset="0"/>
+                <a:cs typeface="Arial" panose="020B0604020202020204" pitchFamily="34" charset="0"/>
+              </a:rPr>
+              <a:t>Input Ground-State</a:t>
+            </a:r>
+            <a:endParaRPr lang="zh-CN" altLang="en-US" sz="1200" dirty="0">
+              <a:latin typeface="Arial" panose="020B0604020202020204" pitchFamily="34" charset="0"/>
+              <a:cs typeface="Arial" panose="020B0604020202020204" pitchFamily="34" charset="0"/>
+            </a:endParaRPr>
+          </a:p>
+        </p:txBody>
+      </p:sp>
       <p:grpSp>
         <p:nvGrpSpPr>
-          <p:cNvPr id="422" name="Group 421">
+          <p:cNvPr id="404" name="Group 403">
             <a:extLst>
               <a:ext uri="{FF2B5EF4-FFF2-40B4-BE49-F238E27FC236}">
-                <a16:creationId xmlns:a16="http://schemas.microsoft.com/office/drawing/2014/main" id="{44D403D0-1FC5-87D7-34F8-190E7D499046}"/>
+                <a16:creationId xmlns:a16="http://schemas.microsoft.com/office/drawing/2014/main" id="{3937236D-324E-8EA8-ADC7-4222B216D4BA}"/>
               </a:ext>
             </a:extLst>
           </p:cNvPr>
@@ -7747,64 +6808,633 @@
         </p:nvGrpSpPr>
         <p:grpSpPr>
           <a:xfrm>
-            <a:off x="17750" y="965013"/>
-            <a:ext cx="2065206" cy="2558013"/>
-            <a:chOff x="17750" y="965013"/>
-            <a:chExt cx="2065206" cy="2558013"/>
+            <a:off x="322794" y="965013"/>
+            <a:ext cx="1632878" cy="2400845"/>
+            <a:chOff x="1494496" y="2749656"/>
+            <a:chExt cx="1632878" cy="2400845"/>
           </a:xfrm>
         </p:grpSpPr>
         <p:sp>
           <p:nvSpPr>
-            <p:cNvPr id="277" name="TextBox 276">
+            <p:cNvPr id="276" name="Rectangle: Rounded Corners 275">
               <a:extLst>
                 <a:ext uri="{FF2B5EF4-FFF2-40B4-BE49-F238E27FC236}">
-                  <a16:creationId xmlns:a16="http://schemas.microsoft.com/office/drawing/2014/main" id="{5CD9A01B-A7EE-DE12-A993-866631CA1799}"/>
+                  <a16:creationId xmlns:a16="http://schemas.microsoft.com/office/drawing/2014/main" id="{107C6BC6-8318-4427-3B18-6B3B446F4AEE}"/>
                 </a:ext>
               </a:extLst>
             </p:cNvPr>
-            <p:cNvSpPr txBox="1"/>
+            <p:cNvSpPr/>
             <p:nvPr/>
           </p:nvSpPr>
           <p:spPr>
             <a:xfrm>
-              <a:off x="17750" y="3061361"/>
-              <a:ext cx="2065206" cy="461665"/>
+              <a:off x="1603303" y="4379591"/>
+              <a:ext cx="1234051" cy="373345"/>
             </a:xfrm>
-            <a:prstGeom prst="rect">
+            <a:prstGeom prst="roundRect">
               <a:avLst/>
             </a:prstGeom>
-            <a:noFill/>
+            <a:solidFill>
+              <a:srgbClr val="FCE1E0">
+                <a:alpha val="60000"/>
+              </a:srgbClr>
+            </a:solidFill>
             <a:ln>
-              <a:noFill/>
+              <a:solidFill>
+                <a:srgbClr val="393333"/>
+              </a:solidFill>
             </a:ln>
           </p:spPr>
+          <p:style>
+            <a:lnRef idx="2">
+              <a:schemeClr val="accent1">
+                <a:shade val="15000"/>
+              </a:schemeClr>
+            </a:lnRef>
+            <a:fillRef idx="1">
+              <a:schemeClr val="accent1"/>
+            </a:fillRef>
+            <a:effectRef idx="0">
+              <a:schemeClr val="accent1"/>
+            </a:effectRef>
+            <a:fontRef idx="minor">
+              <a:schemeClr val="lt1"/>
+            </a:fontRef>
+          </p:style>
           <p:txBody>
-            <a:bodyPr wrap="square" rtlCol="0">
-              <a:spAutoFit/>
-            </a:bodyPr>
+            <a:bodyPr rtlCol="0" anchor="ctr"/>
             <a:lstStyle/>
             <a:p>
               <a:pPr algn="ctr"/>
               <a:r>
                 <a:rPr lang="en-US" altLang="zh-CN" sz="1200" dirty="0">
-                  <a:latin typeface="Arial" panose="020B0604020202020204" pitchFamily="34" charset="0"/>
-                  <a:cs typeface="Arial" panose="020B0604020202020204" pitchFamily="34" charset="0"/>
+                  <a:solidFill>
+                    <a:schemeClr val="tx1"/>
+                  </a:solidFill>
                 </a:rPr>
-                <a:t>Input Ground-State Electronic Properties</a:t>
+                <a:t>Embedder &amp;</a:t>
+              </a:r>
+            </a:p>
+            <a:p>
+              <a:pPr algn="ctr"/>
+              <a:r>
+                <a:rPr lang="en-US" altLang="zh-CN" sz="1200" dirty="0">
+                  <a:solidFill>
+                    <a:schemeClr val="tx1"/>
+                  </a:solidFill>
+                </a:rPr>
+                <a:t>Basis Assembly</a:t>
               </a:r>
               <a:endParaRPr lang="zh-CN" altLang="en-US" sz="1200" dirty="0">
-                <a:latin typeface="Arial" panose="020B0604020202020204" pitchFamily="34" charset="0"/>
-                <a:cs typeface="Arial" panose="020B0604020202020204" pitchFamily="34" charset="0"/>
+                <a:solidFill>
+                  <a:schemeClr val="tx1"/>
+                </a:solidFill>
               </a:endParaRPr>
             </a:p>
           </p:txBody>
         </p:sp>
+        <p:cxnSp>
+          <p:nvCxnSpPr>
+            <p:cNvPr id="278" name="Straight Arrow Connector 277">
+              <a:extLst>
+                <a:ext uri="{FF2B5EF4-FFF2-40B4-BE49-F238E27FC236}">
+                  <a16:creationId xmlns:a16="http://schemas.microsoft.com/office/drawing/2014/main" id="{BBAD5C3D-1DB5-1E90-61A7-7355BD0D336F}"/>
+                </a:ext>
+              </a:extLst>
+            </p:cNvPr>
+            <p:cNvCxnSpPr>
+              <a:cxnSpLocks/>
+            </p:cNvCxnSpPr>
+            <p:nvPr/>
+          </p:nvCxnSpPr>
+          <p:spPr>
+            <a:xfrm flipV="1">
+              <a:off x="2207057" y="4761560"/>
+              <a:ext cx="0" cy="141256"/>
+            </a:xfrm>
+            <a:prstGeom prst="straightConnector1">
+              <a:avLst/>
+            </a:prstGeom>
+            <a:ln>
+              <a:solidFill>
+                <a:schemeClr val="tx1"/>
+              </a:solidFill>
+              <a:tailEnd type="triangle"/>
+            </a:ln>
+          </p:spPr>
+          <p:style>
+            <a:lnRef idx="2">
+              <a:schemeClr val="accent1"/>
+            </a:lnRef>
+            <a:fillRef idx="0">
+              <a:schemeClr val="accent1"/>
+            </a:fillRef>
+            <a:effectRef idx="1">
+              <a:schemeClr val="accent1"/>
+            </a:effectRef>
+            <a:fontRef idx="minor">
+              <a:schemeClr val="tx1"/>
+            </a:fontRef>
+          </p:style>
+        </p:cxnSp>
+        <p:sp>
+          <p:nvSpPr>
+            <p:cNvPr id="279" name="Rectangle: Rounded Corners 278">
+              <a:extLst>
+                <a:ext uri="{FF2B5EF4-FFF2-40B4-BE49-F238E27FC236}">
+                  <a16:creationId xmlns:a16="http://schemas.microsoft.com/office/drawing/2014/main" id="{574EDFEF-4450-4CB4-44A9-D48615D386B5}"/>
+                </a:ext>
+              </a:extLst>
+            </p:cNvPr>
+            <p:cNvSpPr/>
+            <p:nvPr/>
+          </p:nvSpPr>
+          <p:spPr>
+            <a:xfrm>
+              <a:off x="1601877" y="3462593"/>
+              <a:ext cx="1234051" cy="422963"/>
+            </a:xfrm>
+            <a:prstGeom prst="roundRect">
+              <a:avLst/>
+            </a:prstGeom>
+            <a:solidFill>
+              <a:srgbClr val="F7FEFF"/>
+            </a:solidFill>
+            <a:ln>
+              <a:solidFill>
+                <a:srgbClr val="393333"/>
+              </a:solidFill>
+            </a:ln>
+          </p:spPr>
+          <p:style>
+            <a:lnRef idx="2">
+              <a:schemeClr val="accent1">
+                <a:shade val="15000"/>
+              </a:schemeClr>
+            </a:lnRef>
+            <a:fillRef idx="1">
+              <a:schemeClr val="accent1"/>
+            </a:fillRef>
+            <a:effectRef idx="0">
+              <a:schemeClr val="accent1"/>
+            </a:effectRef>
+            <a:fontRef idx="minor">
+              <a:schemeClr val="lt1"/>
+            </a:fontRef>
+          </p:style>
+          <p:txBody>
+            <a:bodyPr rtlCol="0" anchor="ctr"/>
+            <a:lstStyle/>
+            <a:p>
+              <a:pPr algn="ctr"/>
+              <a:r>
+                <a:rPr lang="en-US" altLang="zh-CN" sz="1200" dirty="0">
+                  <a:solidFill>
+                    <a:schemeClr val="tx1"/>
+                  </a:solidFill>
+                </a:rPr>
+                <a:t>Ground-State</a:t>
+              </a:r>
+            </a:p>
+            <a:p>
+              <a:pPr algn="ctr"/>
+              <a:r>
+                <a:rPr lang="en-US" altLang="zh-CN" sz="1200" dirty="0">
+                  <a:solidFill>
+                    <a:schemeClr val="tx1"/>
+                  </a:solidFill>
+                </a:rPr>
+                <a:t>Encoder</a:t>
+              </a:r>
+              <a:endParaRPr lang="zh-CN" altLang="en-US" sz="1200" dirty="0">
+                <a:solidFill>
+                  <a:schemeClr val="tx1"/>
+                </a:solidFill>
+              </a:endParaRPr>
+            </a:p>
+          </p:txBody>
+        </p:sp>
+        <mc:AlternateContent xmlns:mc="http://schemas.openxmlformats.org/markup-compatibility/2006">
+          <mc:Choice xmlns:a14="http://schemas.microsoft.com/office/drawing/2010/main" Requires="a14">
+            <p:sp>
+              <p:nvSpPr>
+                <p:cNvPr id="303" name="TextBox 302">
+                  <a:extLst>
+                    <a:ext uri="{FF2B5EF4-FFF2-40B4-BE49-F238E27FC236}">
+                      <a16:creationId xmlns:a16="http://schemas.microsoft.com/office/drawing/2014/main" id="{BEEB7131-D278-90ED-E182-0D46B982A4F0}"/>
+                    </a:ext>
+                  </a:extLst>
+                </p:cNvPr>
+                <p:cNvSpPr txBox="1"/>
+                <p:nvPr/>
+              </p:nvSpPr>
+              <p:spPr>
+                <a:xfrm>
+                  <a:off x="1494496" y="4842724"/>
+                  <a:ext cx="1426895" cy="307777"/>
+                </a:xfrm>
+                <a:prstGeom prst="rect">
+                  <a:avLst/>
+                </a:prstGeom>
+                <a:noFill/>
+              </p:spPr>
+              <p:txBody>
+                <a:bodyPr wrap="square">
+                  <a:spAutoFit/>
+                </a:bodyPr>
+                <a:lstStyle/>
+                <a:p>
+                  <a:pPr/>
+                  <a14:m>
+                    <m:oMathPara xmlns:m="http://schemas.openxmlformats.org/officeDocument/2006/math">
+                      <m:oMathParaPr>
+                        <m:jc m:val="centerGroup"/>
+                      </m:oMathParaPr>
+                      <m:oMath xmlns:m="http://schemas.openxmlformats.org/officeDocument/2006/math">
+                        <m:d>
+                          <m:dPr>
+                            <m:begChr m:val="{"/>
+                            <m:endChr m:val="}"/>
+                            <m:ctrlPr>
+                              <a:rPr lang="en-US" altLang="zh-CN" sz="1400" b="0" i="1" smtClean="0">
+                                <a:latin typeface="Cambria Math" panose="02040503050406030204" pitchFamily="18" charset="0"/>
+                              </a:rPr>
+                            </m:ctrlPr>
+                          </m:dPr>
+                          <m:e>
+                            <m:r>
+                              <a:rPr lang="en-US" altLang="zh-CN" sz="1400" b="0" i="1" smtClean="0">
+                                <a:latin typeface="Cambria Math" panose="02040503050406030204" pitchFamily="18" charset="0"/>
+                              </a:rPr>
+                              <m:t> </m:t>
+                            </m:r>
+                          </m:e>
+                          <m:e>
+                            <m:sSub>
+                              <m:sSubPr>
+                                <m:ctrlPr>
+                                  <a:rPr lang="en-US" altLang="zh-CN" sz="1400" b="0" i="1" smtClean="0">
+                                    <a:latin typeface="Cambria Math" panose="02040503050406030204" pitchFamily="18" charset="0"/>
+                                  </a:rPr>
+                                </m:ctrlPr>
+                              </m:sSubPr>
+                              <m:e>
+                                <m:r>
+                                  <a:rPr lang="zh-CN" altLang="en-US" sz="1400" b="0" i="1" smtClean="0">
+                                    <a:latin typeface="Cambria Math" panose="02040503050406030204" pitchFamily="18" charset="0"/>
+                                  </a:rPr>
+                                  <m:t>𝜑</m:t>
+                                </m:r>
+                              </m:e>
+                              <m:sub>
+                                <m:r>
+                                  <a:rPr lang="en-US" altLang="zh-CN" sz="1400" b="0" i="1" smtClean="0">
+                                    <a:latin typeface="Cambria Math" panose="02040503050406030204" pitchFamily="18" charset="0"/>
+                                  </a:rPr>
+                                  <m:t>𝑛𝑘</m:t>
+                                </m:r>
+                              </m:sub>
+                            </m:sSub>
+                            <m:r>
+                              <a:rPr lang="zh-CN" altLang="en-US" sz="1400" b="0" i="1" smtClean="0">
+                                <a:latin typeface="Cambria Math" panose="02040503050406030204" pitchFamily="18" charset="0"/>
+                              </a:rPr>
+                              <m:t> </m:t>
+                            </m:r>
+                            <m:d>
+                              <m:dPr>
+                                <m:ctrlPr>
+                                  <a:rPr lang="en-US" altLang="zh-CN" sz="1400" b="0" i="1" smtClean="0">
+                                    <a:latin typeface="Cambria Math" panose="02040503050406030204" pitchFamily="18" charset="0"/>
+                                  </a:rPr>
+                                </m:ctrlPr>
+                              </m:dPr>
+                              <m:e>
+                                <m:r>
+                                  <a:rPr lang="en-US" altLang="zh-CN" sz="1400" b="1" i="1" smtClean="0">
+                                    <a:latin typeface="Cambria Math" panose="02040503050406030204" pitchFamily="18" charset="0"/>
+                                  </a:rPr>
+                                  <m:t>𝒓</m:t>
+                                </m:r>
+                              </m:e>
+                            </m:d>
+                            <m:sSup>
+                              <m:sSupPr>
+                                <m:ctrlPr>
+                                  <a:rPr lang="en-US" altLang="zh-CN" sz="1400" b="0" i="1" smtClean="0">
+                                    <a:latin typeface="Cambria Math" panose="02040503050406030204" pitchFamily="18" charset="0"/>
+                                  </a:rPr>
+                                </m:ctrlPr>
+                              </m:sSupPr>
+                              <m:e>
+                                <m:r>
+                                  <a:rPr lang="en-US" altLang="zh-CN" sz="1400" b="0" i="1" smtClean="0">
+                                    <a:latin typeface="Cambria Math" panose="02040503050406030204" pitchFamily="18" charset="0"/>
+                                  </a:rPr>
+                                  <m:t>|</m:t>
+                                </m:r>
+                              </m:e>
+                              <m:sup>
+                                <m:r>
+                                  <a:rPr lang="en-US" altLang="zh-CN" sz="1400" b="0" i="1" smtClean="0">
+                                    <a:latin typeface="Cambria Math" panose="02040503050406030204" pitchFamily="18" charset="0"/>
+                                  </a:rPr>
+                                  <m:t>2</m:t>
+                                </m:r>
+                              </m:sup>
+                            </m:sSup>
+                          </m:e>
+                        </m:d>
+                        <m:r>
+                          <a:rPr lang="en-US" altLang="zh-CN" sz="1400" b="0" i="0" smtClean="0">
+                            <a:latin typeface="Cambria Math" panose="02040503050406030204" pitchFamily="18" charset="0"/>
+                          </a:rPr>
+                          <m:t>, </m:t>
+                        </m:r>
+                        <m:sSub>
+                          <m:sSubPr>
+                            <m:ctrlPr>
+                              <a:rPr lang="en-US" altLang="zh-CN" sz="1400" b="0" i="1" smtClean="0">
+                                <a:latin typeface="Cambria Math" panose="02040503050406030204" pitchFamily="18" charset="0"/>
+                              </a:rPr>
+                            </m:ctrlPr>
+                          </m:sSubPr>
+                          <m:e>
+                            <m:r>
+                              <a:rPr lang="en-US" altLang="zh-CN" sz="1400" b="0" i="1" smtClean="0">
+                                <a:latin typeface="Cambria Math" panose="02040503050406030204" pitchFamily="18" charset="0"/>
+                              </a:rPr>
+                              <m:t>𝑛</m:t>
+                            </m:r>
+                          </m:e>
+                          <m:sub>
+                            <m:r>
+                              <a:rPr lang="en-US" altLang="zh-CN" sz="1400" b="0" i="1" smtClean="0">
+                                <a:latin typeface="Cambria Math" panose="02040503050406030204" pitchFamily="18" charset="0"/>
+                              </a:rPr>
+                              <m:t> </m:t>
+                            </m:r>
+                          </m:sub>
+                        </m:sSub>
+                        <m:r>
+                          <a:rPr lang="en-US" altLang="zh-CN" sz="1400" b="0" i="1" smtClean="0">
+                            <a:latin typeface="Cambria Math" panose="02040503050406030204" pitchFamily="18" charset="0"/>
+                          </a:rPr>
+                          <m:t>,</m:t>
+                        </m:r>
+                        <m:sSub>
+                          <m:sSubPr>
+                            <m:ctrlPr>
+                              <a:rPr lang="en-US" altLang="zh-CN" sz="1400" b="0" i="1" smtClean="0">
+                                <a:latin typeface="Cambria Math" panose="02040503050406030204" pitchFamily="18" charset="0"/>
+                              </a:rPr>
+                            </m:ctrlPr>
+                          </m:sSubPr>
+                          <m:e>
+                            <m:r>
+                              <a:rPr lang="en-US" altLang="zh-CN" sz="1400" b="1" i="1" smtClean="0">
+                                <a:latin typeface="Cambria Math" panose="02040503050406030204" pitchFamily="18" charset="0"/>
+                              </a:rPr>
+                              <m:t>𝒌</m:t>
+                            </m:r>
+                          </m:e>
+                          <m:sub>
+                            <m:r>
+                              <a:rPr lang="en-US" altLang="zh-CN" sz="1400" b="0" i="1" smtClean="0">
+                                <a:latin typeface="Cambria Math" panose="02040503050406030204" pitchFamily="18" charset="0"/>
+                              </a:rPr>
+                              <m:t> </m:t>
+                            </m:r>
+                          </m:sub>
+                        </m:sSub>
+                      </m:oMath>
+                    </m:oMathPara>
+                  </a14:m>
+                  <a:endParaRPr lang="zh-CN" altLang="en-US" sz="1400" dirty="0"/>
+                </a:p>
+              </p:txBody>
+            </p:sp>
+          </mc:Choice>
+          <mc:Fallback>
+            <p:sp>
+              <p:nvSpPr>
+                <p:cNvPr id="303" name="TextBox 302">
+                  <a:extLst>
+                    <a:ext uri="{FF2B5EF4-FFF2-40B4-BE49-F238E27FC236}">
+                      <a16:creationId xmlns:a16="http://schemas.microsoft.com/office/drawing/2014/main" id="{BEEB7131-D278-90ED-E182-0D46B982A4F0}"/>
+                    </a:ext>
+                  </a:extLst>
+                </p:cNvPr>
+                <p:cNvSpPr txBox="1">
+                  <a:spLocks noRot="1" noChangeAspect="1" noMove="1" noResize="1" noEditPoints="1" noAdjustHandles="1" noChangeArrowheads="1" noChangeShapeType="1" noTextEdit="1"/>
+                </p:cNvSpPr>
+                <p:nvPr/>
+              </p:nvSpPr>
+              <p:spPr>
+                <a:xfrm>
+                  <a:off x="1494496" y="4842724"/>
+                  <a:ext cx="1426895" cy="307777"/>
+                </a:xfrm>
+                <a:prstGeom prst="rect">
+                  <a:avLst/>
+                </a:prstGeom>
+                <a:blipFill>
+                  <a:blip r:embed="rId4"/>
+                  <a:stretch>
+                    <a:fillRect r="-4274" b="-8000"/>
+                  </a:stretch>
+                </a:blipFill>
+              </p:spPr>
+              <p:txBody>
+                <a:bodyPr/>
+                <a:lstStyle/>
+                <a:p>
+                  <a:r>
+                    <a:rPr lang="zh-CN" altLang="en-US">
+                      <a:noFill/>
+                    </a:rPr>
+                    <a:t> </a:t>
+                  </a:r>
+                </a:p>
+              </p:txBody>
+            </p:sp>
+          </mc:Fallback>
+        </mc:AlternateContent>
+        <p:sp>
+          <p:nvSpPr>
+            <p:cNvPr id="311" name="Rectangle: Rounded Corners 310">
+              <a:extLst>
+                <a:ext uri="{FF2B5EF4-FFF2-40B4-BE49-F238E27FC236}">
+                  <a16:creationId xmlns:a16="http://schemas.microsoft.com/office/drawing/2014/main" id="{A9A5D1FD-5BF7-732A-6402-8F48EA4196AF}"/>
+                </a:ext>
+              </a:extLst>
+            </p:cNvPr>
+            <p:cNvSpPr/>
+            <p:nvPr/>
+          </p:nvSpPr>
+          <p:spPr>
+            <a:xfrm>
+              <a:off x="1598863" y="2749656"/>
+              <a:ext cx="1234051" cy="388133"/>
+            </a:xfrm>
+            <a:prstGeom prst="roundRect">
+              <a:avLst/>
+            </a:prstGeom>
+            <a:solidFill>
+              <a:srgbClr val="F7FEFF"/>
+            </a:solidFill>
+            <a:ln>
+              <a:solidFill>
+                <a:srgbClr val="393333"/>
+              </a:solidFill>
+            </a:ln>
+          </p:spPr>
+          <p:style>
+            <a:lnRef idx="2">
+              <a:schemeClr val="accent1">
+                <a:shade val="15000"/>
+              </a:schemeClr>
+            </a:lnRef>
+            <a:fillRef idx="1">
+              <a:schemeClr val="accent1"/>
+            </a:fillRef>
+            <a:effectRef idx="0">
+              <a:schemeClr val="accent1"/>
+            </a:effectRef>
+            <a:fontRef idx="minor">
+              <a:schemeClr val="lt1"/>
+            </a:fontRef>
+          </p:style>
+          <p:txBody>
+            <a:bodyPr rtlCol="0" anchor="ctr"/>
+            <a:lstStyle/>
+            <a:p>
+              <a:pPr algn="ctr"/>
+              <a:r>
+                <a:rPr lang="en-US" altLang="zh-CN" sz="1200" dirty="0">
+                  <a:solidFill>
+                    <a:schemeClr val="tx1"/>
+                  </a:solidFill>
+                </a:rPr>
+                <a:t>Ground-State</a:t>
+              </a:r>
+            </a:p>
+            <a:p>
+              <a:pPr algn="ctr"/>
+              <a:r>
+                <a:rPr lang="en-US" altLang="zh-CN" sz="1200" dirty="0">
+                  <a:solidFill>
+                    <a:schemeClr val="tx1"/>
+                  </a:solidFill>
+                </a:rPr>
+                <a:t>Encoder</a:t>
+              </a:r>
+              <a:endParaRPr lang="zh-CN" altLang="en-US" sz="1200" dirty="0">
+                <a:solidFill>
+                  <a:schemeClr val="tx1"/>
+                </a:solidFill>
+              </a:endParaRPr>
+            </a:p>
+          </p:txBody>
+        </p:sp>
+        <p:cxnSp>
+          <p:nvCxnSpPr>
+            <p:cNvPr id="313" name="Straight Arrow Connector 312">
+              <a:extLst>
+                <a:ext uri="{FF2B5EF4-FFF2-40B4-BE49-F238E27FC236}">
+                  <a16:creationId xmlns:a16="http://schemas.microsoft.com/office/drawing/2014/main" id="{D6231D78-7EF2-B6C5-A4DF-E6FE78D21AF1}"/>
+                </a:ext>
+              </a:extLst>
+            </p:cNvPr>
+            <p:cNvCxnSpPr>
+              <a:cxnSpLocks/>
+              <a:stCxn id="13" idx="0"/>
+              <a:endCxn id="279" idx="2"/>
+            </p:cNvCxnSpPr>
+            <p:nvPr/>
+          </p:nvCxnSpPr>
+          <p:spPr>
+            <a:xfrm flipV="1">
+              <a:off x="2215888" y="3885556"/>
+              <a:ext cx="3015" cy="168447"/>
+            </a:xfrm>
+            <a:prstGeom prst="straightConnector1">
+              <a:avLst/>
+            </a:prstGeom>
+            <a:ln>
+              <a:solidFill>
+                <a:schemeClr val="tx1"/>
+              </a:solidFill>
+              <a:tailEnd type="triangle"/>
+            </a:ln>
+          </p:spPr>
+          <p:style>
+            <a:lnRef idx="2">
+              <a:schemeClr val="accent1"/>
+            </a:lnRef>
+            <a:fillRef idx="0">
+              <a:schemeClr val="accent1"/>
+            </a:fillRef>
+            <a:effectRef idx="1">
+              <a:schemeClr val="accent1"/>
+            </a:effectRef>
+            <a:fontRef idx="minor">
+              <a:schemeClr val="tx1"/>
+            </a:fontRef>
+          </p:style>
+        </p:cxnSp>
+        <p:cxnSp>
+          <p:nvCxnSpPr>
+            <p:cNvPr id="328" name="Straight Arrow Connector 327">
+              <a:extLst>
+                <a:ext uri="{FF2B5EF4-FFF2-40B4-BE49-F238E27FC236}">
+                  <a16:creationId xmlns:a16="http://schemas.microsoft.com/office/drawing/2014/main" id="{34727B9A-1988-6A26-A6D0-581581FE6889}"/>
+                </a:ext>
+              </a:extLst>
+            </p:cNvPr>
+            <p:cNvCxnSpPr>
+              <a:cxnSpLocks/>
+              <a:stCxn id="279" idx="0"/>
+              <a:endCxn id="311" idx="2"/>
+            </p:cNvCxnSpPr>
+            <p:nvPr/>
+          </p:nvCxnSpPr>
+          <p:spPr>
+            <a:xfrm flipH="1" flipV="1">
+              <a:off x="2215889" y="3137789"/>
+              <a:ext cx="3014" cy="324804"/>
+            </a:xfrm>
+            <a:prstGeom prst="straightConnector1">
+              <a:avLst/>
+            </a:prstGeom>
+            <a:ln>
+              <a:solidFill>
+                <a:schemeClr val="tx1"/>
+              </a:solidFill>
+              <a:tailEnd type="triangle"/>
+            </a:ln>
+          </p:spPr>
+          <p:style>
+            <a:lnRef idx="2">
+              <a:schemeClr val="accent1"/>
+            </a:lnRef>
+            <a:fillRef idx="0">
+              <a:schemeClr val="accent1"/>
+            </a:fillRef>
+            <a:effectRef idx="1">
+              <a:schemeClr val="accent1"/>
+            </a:effectRef>
+            <a:fontRef idx="minor">
+              <a:schemeClr val="tx1"/>
+            </a:fontRef>
+          </p:style>
+        </p:cxnSp>
         <p:grpSp>
           <p:nvGrpSpPr>
-            <p:cNvPr id="404" name="Group 403">
+            <p:cNvPr id="350" name="Group 349">
               <a:extLst>
                 <a:ext uri="{FF2B5EF4-FFF2-40B4-BE49-F238E27FC236}">
-                  <a16:creationId xmlns:a16="http://schemas.microsoft.com/office/drawing/2014/main" id="{3937236D-324E-8EA8-ADC7-4222B216D4BA}"/>
+                  <a16:creationId xmlns:a16="http://schemas.microsoft.com/office/drawing/2014/main" id="{CA82C9A9-AE31-C9DC-6036-1069777EFCCE}"/>
                 </a:ext>
               </a:extLst>
             </p:cNvPr>
@@ -7813,220 +7443,50 @@
           </p:nvGrpSpPr>
           <p:grpSpPr>
             <a:xfrm>
-              <a:off x="335179" y="965013"/>
-              <a:ext cx="1620493" cy="2186988"/>
-              <a:chOff x="1506881" y="2749656"/>
-              <a:chExt cx="1620493" cy="2186988"/>
+              <a:off x="1873301" y="3172671"/>
+              <a:ext cx="752443" cy="276999"/>
+              <a:chOff x="2518371" y="3355007"/>
+              <a:chExt cx="752443" cy="276999"/>
             </a:xfrm>
           </p:grpSpPr>
-          <p:sp>
-            <p:nvSpPr>
-              <p:cNvPr id="276" name="Rectangle: Rounded Corners 275">
+          <p:pic>
+            <p:nvPicPr>
+              <p:cNvPr id="349" name="Picture 348">
                 <a:extLst>
                   <a:ext uri="{FF2B5EF4-FFF2-40B4-BE49-F238E27FC236}">
-                    <a16:creationId xmlns:a16="http://schemas.microsoft.com/office/drawing/2014/main" id="{107C6BC6-8318-4427-3B18-6B3B446F4AEE}"/>
+                    <a16:creationId xmlns:a16="http://schemas.microsoft.com/office/drawing/2014/main" id="{6FB1B4BA-9EA2-A270-410D-539905735DA9}"/>
                   </a:ext>
                 </a:extLst>
               </p:cNvPr>
-              <p:cNvSpPr/>
+              <p:cNvPicPr>
+                <a:picLocks noChangeAspect="1"/>
+              </p:cNvPicPr>
               <p:nvPr/>
-            </p:nvSpPr>
+            </p:nvPicPr>
+            <p:blipFill>
+              <a:blip r:embed="rId2"/>
+              <a:stretch>
+                <a:fillRect/>
+              </a:stretch>
+            </p:blipFill>
             <p:spPr>
               <a:xfrm>
-                <a:off x="1603303" y="4178593"/>
-                <a:ext cx="1234051" cy="373345"/>
+                <a:off x="2678834" y="3444390"/>
+                <a:ext cx="466725" cy="143853"/>
               </a:xfrm>
-              <a:prstGeom prst="roundRect">
+              <a:prstGeom prst="rect">
                 <a:avLst/>
               </a:prstGeom>
-              <a:solidFill>
-                <a:srgbClr val="FCE1E0">
-                  <a:alpha val="60000"/>
-                </a:srgbClr>
-              </a:solidFill>
-              <a:ln>
-                <a:solidFill>
-                  <a:srgbClr val="393333"/>
-                </a:solidFill>
-              </a:ln>
             </p:spPr>
-            <p:style>
-              <a:lnRef idx="2">
-                <a:schemeClr val="accent1">
-                  <a:shade val="15000"/>
-                </a:schemeClr>
-              </a:lnRef>
-              <a:fillRef idx="1">
-                <a:schemeClr val="accent1"/>
-              </a:fillRef>
-              <a:effectRef idx="0">
-                <a:schemeClr val="accent1"/>
-              </a:effectRef>
-              <a:fontRef idx="minor">
-                <a:schemeClr val="lt1"/>
-              </a:fontRef>
-            </p:style>
-            <p:txBody>
-              <a:bodyPr rtlCol="0" anchor="ctr"/>
-              <a:lstStyle/>
-              <a:p>
-                <a:pPr algn="ctr"/>
-                <a:r>
-                  <a:rPr lang="en-US" altLang="zh-CN" sz="1200" dirty="0">
-                    <a:solidFill>
-                      <a:schemeClr val="tx1"/>
-                    </a:solidFill>
-                  </a:rPr>
-                  <a:t>Embedder &amp;</a:t>
-                </a:r>
-              </a:p>
-              <a:p>
-                <a:pPr algn="ctr"/>
-                <a:r>
-                  <a:rPr lang="en-US" altLang="zh-CN" sz="1200" dirty="0">
-                    <a:solidFill>
-                      <a:schemeClr val="tx1"/>
-                    </a:solidFill>
-                  </a:rPr>
-                  <a:t>Basis Assembly</a:t>
-                </a:r>
-                <a:endParaRPr lang="zh-CN" altLang="en-US" sz="1200" dirty="0">
-                  <a:solidFill>
-                    <a:schemeClr val="tx1"/>
-                  </a:solidFill>
-                </a:endParaRPr>
-              </a:p>
-            </p:txBody>
-          </p:sp>
-          <p:cxnSp>
-            <p:nvCxnSpPr>
-              <p:cNvPr id="278" name="Straight Arrow Connector 277">
-                <a:extLst>
-                  <a:ext uri="{FF2B5EF4-FFF2-40B4-BE49-F238E27FC236}">
-                    <a16:creationId xmlns:a16="http://schemas.microsoft.com/office/drawing/2014/main" id="{BBAD5C3D-1DB5-1E90-61A7-7355BD0D336F}"/>
-                  </a:ext>
-                </a:extLst>
-              </p:cNvPr>
-              <p:cNvCxnSpPr>
-                <a:cxnSpLocks/>
-              </p:cNvCxnSpPr>
-              <p:nvPr/>
-            </p:nvCxnSpPr>
-            <p:spPr>
-              <a:xfrm flipV="1">
-                <a:off x="2207057" y="4560562"/>
-                <a:ext cx="0" cy="141256"/>
-              </a:xfrm>
-              <a:prstGeom prst="straightConnector1">
-                <a:avLst/>
-              </a:prstGeom>
-              <a:ln>
-                <a:solidFill>
-                  <a:schemeClr val="tx1"/>
-                </a:solidFill>
-                <a:tailEnd type="triangle"/>
-              </a:ln>
-            </p:spPr>
-            <p:style>
-              <a:lnRef idx="2">
-                <a:schemeClr val="accent1"/>
-              </a:lnRef>
-              <a:fillRef idx="0">
-                <a:schemeClr val="accent1"/>
-              </a:fillRef>
-              <a:effectRef idx="1">
-                <a:schemeClr val="accent1"/>
-              </a:effectRef>
-              <a:fontRef idx="minor">
-                <a:schemeClr val="tx1"/>
-              </a:fontRef>
-            </p:style>
-          </p:cxnSp>
-          <p:sp>
-            <p:nvSpPr>
-              <p:cNvPr id="279" name="Rectangle: Rounded Corners 278">
-                <a:extLst>
-                  <a:ext uri="{FF2B5EF4-FFF2-40B4-BE49-F238E27FC236}">
-                    <a16:creationId xmlns:a16="http://schemas.microsoft.com/office/drawing/2014/main" id="{574EDFEF-4450-4CB4-44A9-D48615D386B5}"/>
-                  </a:ext>
-                </a:extLst>
-              </p:cNvPr>
-              <p:cNvSpPr/>
-              <p:nvPr/>
-            </p:nvSpPr>
-            <p:spPr>
-              <a:xfrm>
-                <a:off x="1601877" y="3462593"/>
-                <a:ext cx="1234051" cy="422963"/>
-              </a:xfrm>
-              <a:prstGeom prst="roundRect">
-                <a:avLst/>
-              </a:prstGeom>
-              <a:solidFill>
-                <a:srgbClr val="F7FEFF"/>
-              </a:solidFill>
-              <a:ln>
-                <a:solidFill>
-                  <a:srgbClr val="393333"/>
-                </a:solidFill>
-              </a:ln>
-            </p:spPr>
-            <p:style>
-              <a:lnRef idx="2">
-                <a:schemeClr val="accent1">
-                  <a:shade val="15000"/>
-                </a:schemeClr>
-              </a:lnRef>
-              <a:fillRef idx="1">
-                <a:schemeClr val="accent1"/>
-              </a:fillRef>
-              <a:effectRef idx="0">
-                <a:schemeClr val="accent1"/>
-              </a:effectRef>
-              <a:fontRef idx="minor">
-                <a:schemeClr val="lt1"/>
-              </a:fontRef>
-            </p:style>
-            <p:txBody>
-              <a:bodyPr rtlCol="0" anchor="ctr"/>
-              <a:lstStyle/>
-              <a:p>
-                <a:pPr algn="ctr"/>
-                <a:r>
-                  <a:rPr lang="en-US" altLang="zh-CN" sz="1200" dirty="0">
-                    <a:solidFill>
-                      <a:schemeClr val="tx1"/>
-                    </a:solidFill>
-                  </a:rPr>
-                  <a:t>Ground-State</a:t>
-                </a:r>
-              </a:p>
-              <a:p>
-                <a:pPr algn="ctr"/>
-                <a:r>
-                  <a:rPr lang="en-US" altLang="zh-CN" sz="1200" dirty="0">
-                    <a:solidFill>
-                      <a:schemeClr val="tx1"/>
-                    </a:solidFill>
-                  </a:rPr>
-                  <a:t>Encoder</a:t>
-                </a:r>
-                <a:endParaRPr lang="zh-CN" altLang="en-US" sz="1200" dirty="0">
-                  <a:solidFill>
-                    <a:schemeClr val="tx1"/>
-                  </a:solidFill>
-                </a:endParaRPr>
-              </a:p>
-            </p:txBody>
-          </p:sp>
-          <mc:AlternateContent xmlns:mc="http://schemas.openxmlformats.org/markup-compatibility/2006">
-            <mc:Choice xmlns:a14="http://schemas.microsoft.com/office/drawing/2010/main" Requires="a14">
+          </p:pic>
+          <mc:AlternateContent xmlns:mc="http://schemas.openxmlformats.org/markup-compatibility/2006" xmlns:a14="http://schemas.microsoft.com/office/drawing/2010/main">
+            <mc:Choice Requires="a14">
               <p:sp>
                 <p:nvSpPr>
-                  <p:cNvPr id="303" name="TextBox 302">
+                  <p:cNvPr id="326" name="TextBox 325">
                     <a:extLst>
                       <a:ext uri="{FF2B5EF4-FFF2-40B4-BE49-F238E27FC236}">
-                        <a16:creationId xmlns:a16="http://schemas.microsoft.com/office/drawing/2014/main" id="{BEEB7131-D278-90ED-E182-0D46B982A4F0}"/>
+                        <a16:creationId xmlns:a16="http://schemas.microsoft.com/office/drawing/2014/main" id="{C7B3C6E1-93D0-85C4-A636-6963E9C97B40}"/>
                       </a:ext>
                     </a:extLst>
                   </p:cNvPr>
@@ -8035,198 +7495,64 @@
                 </p:nvSpPr>
                 <p:spPr>
                   <a:xfrm>
-                    <a:off x="1506881" y="4628867"/>
-                    <a:ext cx="1426895" cy="307777"/>
+                    <a:off x="2518371" y="3355007"/>
+                    <a:ext cx="752443" cy="276999"/>
                   </a:xfrm>
                   <a:prstGeom prst="rect">
                     <a:avLst/>
                   </a:prstGeom>
                   <a:noFill/>
+                  <a:ln>
+                    <a:noFill/>
+                  </a:ln>
                 </p:spPr>
                 <p:txBody>
-                  <a:bodyPr wrap="square">
+                  <a:bodyPr wrap="square" rtlCol="0">
                     <a:spAutoFit/>
                   </a:bodyPr>
                   <a:lstStyle/>
                   <a:p>
-                    <a:pPr/>
+                    <a:pPr algn="ctr"/>
                     <a14:m>
                       <m:oMathPara xmlns:m="http://schemas.openxmlformats.org/officeDocument/2006/math">
                         <m:oMathParaPr>
                           <m:jc m:val="centerGroup"/>
                         </m:oMathParaPr>
                         <m:oMath xmlns:m="http://schemas.openxmlformats.org/officeDocument/2006/math">
-                          <m:d>
-                            <m:dPr>
-                              <m:begChr m:val="{"/>
-                              <m:endChr m:val="}"/>
-                              <m:ctrlPr>
-                                <a:rPr lang="en-US" altLang="zh-CN" sz="1400" b="0" i="1" smtClean="0">
-                                  <a:latin typeface="Cambria Math" panose="02040503050406030204" pitchFamily="18" charset="0"/>
-                                </a:rPr>
-                              </m:ctrlPr>
-                            </m:dPr>
-                            <m:e>
-                              <m:r>
-                                <a:rPr lang="en-US" altLang="zh-CN" sz="1400" b="0" i="1" smtClean="0">
-                                  <a:latin typeface="Cambria Math" panose="02040503050406030204" pitchFamily="18" charset="0"/>
-                                </a:rPr>
-                                <m:t> </m:t>
-                              </m:r>
-                            </m:e>
-                            <m:e>
-                              <m:sSub>
-                                <m:sSubPr>
-                                  <m:ctrlPr>
-                                    <a:rPr lang="en-US" altLang="zh-CN" sz="1400" b="0" i="1" smtClean="0">
-                                      <a:latin typeface="Cambria Math" panose="02040503050406030204" pitchFamily="18" charset="0"/>
-                                    </a:rPr>
-                                  </m:ctrlPr>
-                                </m:sSubPr>
-                                <m:e>
-                                  <m:r>
-                                    <a:rPr lang="zh-CN" altLang="en-US" sz="1400" b="0" i="1" smtClean="0">
-                                      <a:latin typeface="Cambria Math" panose="02040503050406030204" pitchFamily="18" charset="0"/>
-                                    </a:rPr>
-                                    <m:t>𝜑</m:t>
-                                  </m:r>
-                                </m:e>
-                                <m:sub>
-                                  <m:r>
-                                    <a:rPr lang="en-US" altLang="zh-CN" sz="1400" b="0" i="1" smtClean="0">
-                                      <a:latin typeface="Cambria Math" panose="02040503050406030204" pitchFamily="18" charset="0"/>
-                                    </a:rPr>
-                                    <m:t>𝑛𝑘</m:t>
-                                  </m:r>
-                                </m:sub>
-                              </m:sSub>
-                              <m:r>
-                                <a:rPr lang="zh-CN" altLang="en-US" sz="1400" b="0" i="1" smtClean="0">
-                                  <a:latin typeface="Cambria Math" panose="02040503050406030204" pitchFamily="18" charset="0"/>
-                                </a:rPr>
-                                <m:t> </m:t>
-                              </m:r>
-                              <m:d>
-                                <m:dPr>
-                                  <m:ctrlPr>
-                                    <a:rPr lang="en-US" altLang="zh-CN" sz="1400" b="0" i="1" smtClean="0">
-                                      <a:latin typeface="Cambria Math" panose="02040503050406030204" pitchFamily="18" charset="0"/>
-                                    </a:rPr>
-                                  </m:ctrlPr>
-                                </m:dPr>
-                                <m:e>
-                                  <m:r>
-                                    <a:rPr lang="en-US" altLang="zh-CN" sz="1400" b="1" i="1" smtClean="0">
-                                      <a:latin typeface="Cambria Math" panose="02040503050406030204" pitchFamily="18" charset="0"/>
-                                    </a:rPr>
-                                    <m:t>𝒓</m:t>
-                                  </m:r>
-                                </m:e>
-                              </m:d>
-                              <m:sSup>
-                                <m:sSupPr>
-                                  <m:ctrlPr>
-                                    <a:rPr lang="en-US" altLang="zh-CN" sz="1400" b="0" i="1" smtClean="0">
-                                      <a:latin typeface="Cambria Math" panose="02040503050406030204" pitchFamily="18" charset="0"/>
-                                    </a:rPr>
-                                  </m:ctrlPr>
-                                </m:sSupPr>
-                                <m:e>
-                                  <m:r>
-                                    <a:rPr lang="en-US" altLang="zh-CN" sz="1400" b="0" i="1" smtClean="0">
-                                      <a:latin typeface="Cambria Math" panose="02040503050406030204" pitchFamily="18" charset="0"/>
-                                    </a:rPr>
-                                    <m:t>|</m:t>
-                                  </m:r>
-                                </m:e>
-                                <m:sup>
-                                  <m:r>
-                                    <a:rPr lang="en-US" altLang="zh-CN" sz="1400" b="0" i="1" smtClean="0">
-                                      <a:latin typeface="Cambria Math" panose="02040503050406030204" pitchFamily="18" charset="0"/>
-                                    </a:rPr>
-                                    <m:t>2</m:t>
-                                  </m:r>
-                                </m:sup>
-                              </m:sSup>
-                            </m:e>
-                          </m:d>
                           <m:r>
-                            <a:rPr lang="en-US" altLang="zh-CN" sz="1400" b="0" i="0" smtClean="0">
+                            <a:rPr lang="en-US" altLang="zh-CN" sz="1200" i="1" smtClean="0">
                               <a:latin typeface="Cambria Math" panose="02040503050406030204" pitchFamily="18" charset="0"/>
+                              <a:ea typeface="Cambria Math" panose="02040503050406030204" pitchFamily="18" charset="0"/>
+                              <a:cs typeface="Arial" panose="020B0604020202020204" pitchFamily="34" charset="0"/>
                             </a:rPr>
-                            <m:t>, </m:t>
+                            <m:t>×</m:t>
                           </m:r>
-                          <m:sSub>
-                            <m:sSubPr>
-                              <m:ctrlPr>
-                                <a:rPr lang="en-US" altLang="zh-CN" sz="1400" b="0" i="1" smtClean="0">
-                                  <a:latin typeface="Cambria Math" panose="02040503050406030204" pitchFamily="18" charset="0"/>
-                                </a:rPr>
-                              </m:ctrlPr>
-                            </m:sSubPr>
-                            <m:e>
-                              <m:r>
-                                <a:rPr lang="en-US" altLang="zh-CN" sz="1400" b="0" i="1" smtClean="0">
-                                  <a:latin typeface="Cambria Math" panose="02040503050406030204" pitchFamily="18" charset="0"/>
-                                </a:rPr>
-                                <m:t>𝑛</m:t>
-                              </m:r>
-                            </m:e>
-                            <m:sub>
-                              <m:r>
-                                <a:rPr lang="en-US" altLang="zh-CN" sz="1400" b="0" i="1" smtClean="0">
-                                  <a:latin typeface="Cambria Math" panose="02040503050406030204" pitchFamily="18" charset="0"/>
-                                </a:rPr>
-                                <m:t> </m:t>
-                              </m:r>
-                            </m:sub>
-                          </m:sSub>
                           <m:r>
-                            <a:rPr lang="en-US" altLang="zh-CN" sz="1400" b="0" i="1" smtClean="0">
+                            <a:rPr lang="en-US" altLang="zh-CN" sz="1200" b="0" i="1" smtClean="0">
                               <a:latin typeface="Cambria Math" panose="02040503050406030204" pitchFamily="18" charset="0"/>
+                              <a:ea typeface="Cambria Math" panose="02040503050406030204" pitchFamily="18" charset="0"/>
+                              <a:cs typeface="Arial" panose="020B0604020202020204" pitchFamily="34" charset="0"/>
                             </a:rPr>
-                            <m:t>,</m:t>
+                            <m:t>𝑁</m:t>
                           </m:r>
-                          <m:sSub>
-                            <m:sSubPr>
-                              <m:ctrlPr>
-                                <a:rPr lang="en-US" altLang="zh-CN" sz="1400" b="0" i="1" smtClean="0">
-                                  <a:latin typeface="Cambria Math" panose="02040503050406030204" pitchFamily="18" charset="0"/>
-                                </a:rPr>
-                              </m:ctrlPr>
-                            </m:sSubPr>
-                            <m:e>
-                              <m:r>
-                                <a:rPr lang="en-US" altLang="zh-CN" sz="1400" b="1" i="1" smtClean="0">
-                                  <a:latin typeface="Cambria Math" panose="02040503050406030204" pitchFamily="18" charset="0"/>
-                                </a:rPr>
-                                <m:t>𝒌</m:t>
-                              </m:r>
-                            </m:e>
-                            <m:sub>
-                              <m:r>
-                                <a:rPr lang="en-US" altLang="zh-CN" sz="1400" b="0" i="1" smtClean="0">
-                                  <a:latin typeface="Cambria Math" panose="02040503050406030204" pitchFamily="18" charset="0"/>
-                                </a:rPr>
-                                <m:t> </m:t>
-                              </m:r>
-                            </m:sub>
-                          </m:sSub>
                         </m:oMath>
                       </m:oMathPara>
                     </a14:m>
-                    <a:endParaRPr lang="zh-CN" altLang="en-US" sz="1400" dirty="0"/>
+                    <a:endParaRPr lang="zh-CN" altLang="en-US" sz="1200" dirty="0">
+                      <a:latin typeface="Arial" panose="020B0604020202020204" pitchFamily="34" charset="0"/>
+                      <a:cs typeface="Arial" panose="020B0604020202020204" pitchFamily="34" charset="0"/>
+                    </a:endParaRPr>
                   </a:p>
                 </p:txBody>
               </p:sp>
             </mc:Choice>
-            <mc:Fallback>
+            <mc:Fallback xmlns="">
               <p:sp>
                 <p:nvSpPr>
-                  <p:cNvPr id="303" name="TextBox 302">
+                  <p:cNvPr id="326" name="TextBox 325">
                     <a:extLst>
                       <a:ext uri="{FF2B5EF4-FFF2-40B4-BE49-F238E27FC236}">
-                        <a16:creationId xmlns:a16="http://schemas.microsoft.com/office/drawing/2014/main" id="{BEEB7131-D278-90ED-E182-0D46B982A4F0}"/>
+                        <a16:creationId xmlns:a16="http://schemas.microsoft.com/office/drawing/2014/main" id="{C7B3C6E1-93D0-85C4-A636-6963E9C97B40}"/>
                       </a:ext>
                     </a:extLst>
                   </p:cNvPr>
@@ -8237,18 +7563,21 @@
                 </p:nvSpPr>
                 <p:spPr>
                   <a:xfrm>
-                    <a:off x="1506881" y="4628867"/>
-                    <a:ext cx="1426895" cy="307777"/>
+                    <a:off x="2518371" y="3355007"/>
+                    <a:ext cx="752443" cy="276999"/>
                   </a:xfrm>
                   <a:prstGeom prst="rect">
                     <a:avLst/>
                   </a:prstGeom>
                   <a:blipFill>
-                    <a:blip r:embed="rId4"/>
+                    <a:blip r:embed="rId5"/>
                     <a:stretch>
-                      <a:fillRect r="-4274" b="-8000"/>
+                      <a:fillRect/>
                     </a:stretch>
                   </a:blipFill>
+                  <a:ln>
+                    <a:noFill/>
+                  </a:ln>
                 </p:spPr>
                 <p:txBody>
                   <a:bodyPr/>
@@ -8265,179 +7594,33 @@
               </p:sp>
             </mc:Fallback>
           </mc:AlternateContent>
-          <p:sp>
-            <p:nvSpPr>
-              <p:cNvPr id="311" name="Rectangle: Rounded Corners 310">
+        </p:grpSp>
+        <p:grpSp>
+          <p:nvGrpSpPr>
+            <p:cNvPr id="372" name="Group 371">
+              <a:extLst>
+                <a:ext uri="{FF2B5EF4-FFF2-40B4-BE49-F238E27FC236}">
+                  <a16:creationId xmlns:a16="http://schemas.microsoft.com/office/drawing/2014/main" id="{802BDA95-E8FC-CB2E-6652-FBB28A340BF8}"/>
+                </a:ext>
+              </a:extLst>
+            </p:cNvPr>
+            <p:cNvGrpSpPr/>
+            <p:nvPr/>
+          </p:nvGrpSpPr>
+          <p:grpSpPr>
+            <a:xfrm rot="5400000">
+              <a:off x="2540547" y="3164442"/>
+              <a:ext cx="876692" cy="296963"/>
+              <a:chOff x="3671556" y="3118056"/>
+              <a:chExt cx="621935" cy="558829"/>
+            </a:xfrm>
+          </p:grpSpPr>
+          <p:grpSp>
+            <p:nvGrpSpPr>
+              <p:cNvPr id="370" name="Group 369">
                 <a:extLst>
                   <a:ext uri="{FF2B5EF4-FFF2-40B4-BE49-F238E27FC236}">
-                    <a16:creationId xmlns:a16="http://schemas.microsoft.com/office/drawing/2014/main" id="{A9A5D1FD-5BF7-732A-6402-8F48EA4196AF}"/>
-                  </a:ext>
-                </a:extLst>
-              </p:cNvPr>
-              <p:cNvSpPr/>
-              <p:nvPr/>
-            </p:nvSpPr>
-            <p:spPr>
-              <a:xfrm>
-                <a:off x="1598863" y="2749656"/>
-                <a:ext cx="1234051" cy="388133"/>
-              </a:xfrm>
-              <a:prstGeom prst="roundRect">
-                <a:avLst/>
-              </a:prstGeom>
-              <a:solidFill>
-                <a:srgbClr val="F7FEFF"/>
-              </a:solidFill>
-              <a:ln>
-                <a:solidFill>
-                  <a:srgbClr val="393333"/>
-                </a:solidFill>
-              </a:ln>
-            </p:spPr>
-            <p:style>
-              <a:lnRef idx="2">
-                <a:schemeClr val="accent1">
-                  <a:shade val="15000"/>
-                </a:schemeClr>
-              </a:lnRef>
-              <a:fillRef idx="1">
-                <a:schemeClr val="accent1"/>
-              </a:fillRef>
-              <a:effectRef idx="0">
-                <a:schemeClr val="accent1"/>
-              </a:effectRef>
-              <a:fontRef idx="minor">
-                <a:schemeClr val="lt1"/>
-              </a:fontRef>
-            </p:style>
-            <p:txBody>
-              <a:bodyPr rtlCol="0" anchor="ctr"/>
-              <a:lstStyle/>
-              <a:p>
-                <a:pPr algn="ctr"/>
-                <a:r>
-                  <a:rPr lang="en-US" altLang="zh-CN" sz="1200" dirty="0">
-                    <a:solidFill>
-                      <a:schemeClr val="tx1"/>
-                    </a:solidFill>
-                  </a:rPr>
-                  <a:t>Ground-State</a:t>
-                </a:r>
-              </a:p>
-              <a:p>
-                <a:pPr algn="ctr"/>
-                <a:r>
-                  <a:rPr lang="en-US" altLang="zh-CN" sz="1200" dirty="0">
-                    <a:solidFill>
-                      <a:schemeClr val="tx1"/>
-                    </a:solidFill>
-                  </a:rPr>
-                  <a:t>Encoder</a:t>
-                </a:r>
-                <a:endParaRPr lang="zh-CN" altLang="en-US" sz="1200" dirty="0">
-                  <a:solidFill>
-                    <a:schemeClr val="tx1"/>
-                  </a:solidFill>
-                </a:endParaRPr>
-              </a:p>
-            </p:txBody>
-          </p:sp>
-          <p:cxnSp>
-            <p:nvCxnSpPr>
-              <p:cNvPr id="313" name="Straight Arrow Connector 312">
-                <a:extLst>
-                  <a:ext uri="{FF2B5EF4-FFF2-40B4-BE49-F238E27FC236}">
-                    <a16:creationId xmlns:a16="http://schemas.microsoft.com/office/drawing/2014/main" id="{D6231D78-7EF2-B6C5-A4DF-E6FE78D21AF1}"/>
-                  </a:ext>
-                </a:extLst>
-              </p:cNvPr>
-              <p:cNvCxnSpPr>
-                <a:cxnSpLocks/>
-              </p:cNvCxnSpPr>
-              <p:nvPr/>
-            </p:nvCxnSpPr>
-            <p:spPr>
-              <a:xfrm flipH="1" flipV="1">
-                <a:off x="2211800" y="3880143"/>
-                <a:ext cx="1426" cy="286606"/>
-              </a:xfrm>
-              <a:prstGeom prst="straightConnector1">
-                <a:avLst/>
-              </a:prstGeom>
-              <a:ln>
-                <a:solidFill>
-                  <a:schemeClr val="tx1"/>
-                </a:solidFill>
-                <a:tailEnd type="triangle"/>
-              </a:ln>
-            </p:spPr>
-            <p:style>
-              <a:lnRef idx="2">
-                <a:schemeClr val="accent1"/>
-              </a:lnRef>
-              <a:fillRef idx="0">
-                <a:schemeClr val="accent1"/>
-              </a:fillRef>
-              <a:effectRef idx="1">
-                <a:schemeClr val="accent1"/>
-              </a:effectRef>
-              <a:fontRef idx="minor">
-                <a:schemeClr val="tx1"/>
-              </a:fontRef>
-            </p:style>
-          </p:cxnSp>
-          <p:cxnSp>
-            <p:nvCxnSpPr>
-              <p:cNvPr id="328" name="Straight Arrow Connector 327">
-                <a:extLst>
-                  <a:ext uri="{FF2B5EF4-FFF2-40B4-BE49-F238E27FC236}">
-                    <a16:creationId xmlns:a16="http://schemas.microsoft.com/office/drawing/2014/main" id="{34727B9A-1988-6A26-A6D0-581581FE6889}"/>
-                  </a:ext>
-                </a:extLst>
-              </p:cNvPr>
-              <p:cNvCxnSpPr>
-                <a:cxnSpLocks/>
-                <a:stCxn id="279" idx="0"/>
-                <a:endCxn id="311" idx="2"/>
-              </p:cNvCxnSpPr>
-              <p:nvPr/>
-            </p:nvCxnSpPr>
-            <p:spPr>
-              <a:xfrm flipH="1" flipV="1">
-                <a:off x="2215889" y="3137789"/>
-                <a:ext cx="3014" cy="324804"/>
-              </a:xfrm>
-              <a:prstGeom prst="straightConnector1">
-                <a:avLst/>
-              </a:prstGeom>
-              <a:ln>
-                <a:solidFill>
-                  <a:schemeClr val="tx1"/>
-                </a:solidFill>
-                <a:tailEnd type="triangle"/>
-              </a:ln>
-            </p:spPr>
-            <p:style>
-              <a:lnRef idx="2">
-                <a:schemeClr val="accent1"/>
-              </a:lnRef>
-              <a:fillRef idx="0">
-                <a:schemeClr val="accent1"/>
-              </a:fillRef>
-              <a:effectRef idx="1">
-                <a:schemeClr val="accent1"/>
-              </a:effectRef>
-              <a:fontRef idx="minor">
-                <a:schemeClr val="tx1"/>
-              </a:fontRef>
-            </p:style>
-          </p:cxnSp>
-          <p:grpSp>
-            <p:nvGrpSpPr>
-              <p:cNvPr id="350" name="Group 349">
-                <a:extLst>
-                  <a:ext uri="{FF2B5EF4-FFF2-40B4-BE49-F238E27FC236}">
-                    <a16:creationId xmlns:a16="http://schemas.microsoft.com/office/drawing/2014/main" id="{CA82C9A9-AE31-C9DC-6036-1069777EFCCE}"/>
+                    <a16:creationId xmlns:a16="http://schemas.microsoft.com/office/drawing/2014/main" id="{8FE9330B-B5FA-13B0-112A-2F8E2FC088F4}"/>
                   </a:ext>
                 </a:extLst>
               </p:cNvPr>
@@ -8446,291 +7629,18 @@
             </p:nvGrpSpPr>
             <p:grpSpPr>
               <a:xfrm>
-                <a:off x="1873301" y="3172671"/>
-                <a:ext cx="752443" cy="276999"/>
-                <a:chOff x="2518371" y="3355007"/>
-                <a:chExt cx="752443" cy="276999"/>
+                <a:off x="3671556" y="3388370"/>
+                <a:ext cx="621935" cy="288515"/>
+                <a:chOff x="3671556" y="3388370"/>
+                <a:chExt cx="621935" cy="288515"/>
               </a:xfrm>
             </p:grpSpPr>
-            <p:pic>
-              <p:nvPicPr>
-                <p:cNvPr id="349" name="Picture 348">
+            <p:cxnSp>
+              <p:nvCxnSpPr>
+                <p:cNvPr id="364" name="Straight Connector 363">
                   <a:extLst>
                     <a:ext uri="{FF2B5EF4-FFF2-40B4-BE49-F238E27FC236}">
-                      <a16:creationId xmlns:a16="http://schemas.microsoft.com/office/drawing/2014/main" id="{6FB1B4BA-9EA2-A270-410D-539905735DA9}"/>
-                    </a:ext>
-                  </a:extLst>
-                </p:cNvPr>
-                <p:cNvPicPr>
-                  <a:picLocks noChangeAspect="1"/>
-                </p:cNvPicPr>
-                <p:nvPr/>
-              </p:nvPicPr>
-              <p:blipFill>
-                <a:blip r:embed="rId2"/>
-                <a:stretch>
-                  <a:fillRect/>
-                </a:stretch>
-              </p:blipFill>
-              <p:spPr>
-                <a:xfrm>
-                  <a:off x="2678834" y="3444390"/>
-                  <a:ext cx="466725" cy="143853"/>
-                </a:xfrm>
-                <a:prstGeom prst="rect">
-                  <a:avLst/>
-                </a:prstGeom>
-              </p:spPr>
-            </p:pic>
-            <mc:AlternateContent xmlns:mc="http://schemas.openxmlformats.org/markup-compatibility/2006">
-              <mc:Choice xmlns:a14="http://schemas.microsoft.com/office/drawing/2010/main" Requires="a14">
-                <p:sp>
-                  <p:nvSpPr>
-                    <p:cNvPr id="326" name="TextBox 325">
-                      <a:extLst>
-                        <a:ext uri="{FF2B5EF4-FFF2-40B4-BE49-F238E27FC236}">
-                          <a16:creationId xmlns:a16="http://schemas.microsoft.com/office/drawing/2014/main" id="{C7B3C6E1-93D0-85C4-A636-6963E9C97B40}"/>
-                        </a:ext>
-                      </a:extLst>
-                    </p:cNvPr>
-                    <p:cNvSpPr txBox="1"/>
-                    <p:nvPr/>
-                  </p:nvSpPr>
-                  <p:spPr>
-                    <a:xfrm>
-                      <a:off x="2518371" y="3355007"/>
-                      <a:ext cx="752443" cy="276999"/>
-                    </a:xfrm>
-                    <a:prstGeom prst="rect">
-                      <a:avLst/>
-                    </a:prstGeom>
-                    <a:noFill/>
-                    <a:ln>
-                      <a:noFill/>
-                    </a:ln>
-                  </p:spPr>
-                  <p:txBody>
-                    <a:bodyPr wrap="square" rtlCol="0">
-                      <a:spAutoFit/>
-                    </a:bodyPr>
-                    <a:lstStyle/>
-                    <a:p>
-                      <a:pPr algn="ctr"/>
-                      <a14:m>
-                        <m:oMathPara xmlns:m="http://schemas.openxmlformats.org/officeDocument/2006/math">
-                          <m:oMathParaPr>
-                            <m:jc m:val="centerGroup"/>
-                          </m:oMathParaPr>
-                          <m:oMath xmlns:m="http://schemas.openxmlformats.org/officeDocument/2006/math">
-                            <m:r>
-                              <a:rPr lang="en-US" altLang="zh-CN" sz="1200" i="1" smtClean="0">
-                                <a:latin typeface="Cambria Math" panose="02040503050406030204" pitchFamily="18" charset="0"/>
-                                <a:ea typeface="Cambria Math" panose="02040503050406030204" pitchFamily="18" charset="0"/>
-                                <a:cs typeface="Arial" panose="020B0604020202020204" pitchFamily="34" charset="0"/>
-                              </a:rPr>
-                              <m:t>×</m:t>
-                            </m:r>
-                            <m:r>
-                              <a:rPr lang="en-US" altLang="zh-CN" sz="1200" b="0" i="1" smtClean="0">
-                                <a:latin typeface="Cambria Math" panose="02040503050406030204" pitchFamily="18" charset="0"/>
-                                <a:ea typeface="Cambria Math" panose="02040503050406030204" pitchFamily="18" charset="0"/>
-                                <a:cs typeface="Arial" panose="020B0604020202020204" pitchFamily="34" charset="0"/>
-                              </a:rPr>
-                              <m:t>𝑁</m:t>
-                            </m:r>
-                          </m:oMath>
-                        </m:oMathPara>
-                      </a14:m>
-                      <a:endParaRPr lang="zh-CN" altLang="en-US" sz="1200" dirty="0">
-                        <a:latin typeface="Arial" panose="020B0604020202020204" pitchFamily="34" charset="0"/>
-                        <a:cs typeface="Arial" panose="020B0604020202020204" pitchFamily="34" charset="0"/>
-                      </a:endParaRPr>
-                    </a:p>
-                  </p:txBody>
-                </p:sp>
-              </mc:Choice>
-              <mc:Fallback>
-                <p:sp>
-                  <p:nvSpPr>
-                    <p:cNvPr id="326" name="TextBox 325">
-                      <a:extLst>
-                        <a:ext uri="{FF2B5EF4-FFF2-40B4-BE49-F238E27FC236}">
-                          <a16:creationId xmlns:a16="http://schemas.microsoft.com/office/drawing/2014/main" id="{C7B3C6E1-93D0-85C4-A636-6963E9C97B40}"/>
-                        </a:ext>
-                      </a:extLst>
-                    </p:cNvPr>
-                    <p:cNvSpPr txBox="1">
-                      <a:spLocks noRot="1" noChangeAspect="1" noMove="1" noResize="1" noEditPoints="1" noAdjustHandles="1" noChangeArrowheads="1" noChangeShapeType="1" noTextEdit="1"/>
-                    </p:cNvSpPr>
-                    <p:nvPr/>
-                  </p:nvSpPr>
-                  <p:spPr>
-                    <a:xfrm>
-                      <a:off x="2518371" y="3355007"/>
-                      <a:ext cx="752443" cy="276999"/>
-                    </a:xfrm>
-                    <a:prstGeom prst="rect">
-                      <a:avLst/>
-                    </a:prstGeom>
-                    <a:blipFill>
-                      <a:blip r:embed="rId5"/>
-                      <a:stretch>
-                        <a:fillRect/>
-                      </a:stretch>
-                    </a:blipFill>
-                    <a:ln>
-                      <a:noFill/>
-                    </a:ln>
-                  </p:spPr>
-                  <p:txBody>
-                    <a:bodyPr/>
-                    <a:lstStyle/>
-                    <a:p>
-                      <a:r>
-                        <a:rPr lang="zh-CN" altLang="en-US">
-                          <a:noFill/>
-                        </a:rPr>
-                        <a:t> </a:t>
-                      </a:r>
-                    </a:p>
-                  </p:txBody>
-                </p:sp>
-              </mc:Fallback>
-            </mc:AlternateContent>
-          </p:grpSp>
-          <p:grpSp>
-            <p:nvGrpSpPr>
-              <p:cNvPr id="372" name="Group 371">
-                <a:extLst>
-                  <a:ext uri="{FF2B5EF4-FFF2-40B4-BE49-F238E27FC236}">
-                    <a16:creationId xmlns:a16="http://schemas.microsoft.com/office/drawing/2014/main" id="{802BDA95-E8FC-CB2E-6652-FBB28A340BF8}"/>
-                  </a:ext>
-                </a:extLst>
-              </p:cNvPr>
-              <p:cNvGrpSpPr/>
-              <p:nvPr/>
-            </p:nvGrpSpPr>
-            <p:grpSpPr>
-              <a:xfrm rot="5400000">
-                <a:off x="2540547" y="3164442"/>
-                <a:ext cx="876692" cy="296963"/>
-                <a:chOff x="3671556" y="3118056"/>
-                <a:chExt cx="621935" cy="558829"/>
-              </a:xfrm>
-            </p:grpSpPr>
-            <p:grpSp>
-              <p:nvGrpSpPr>
-                <p:cNvPr id="370" name="Group 369">
-                  <a:extLst>
-                    <a:ext uri="{FF2B5EF4-FFF2-40B4-BE49-F238E27FC236}">
-                      <a16:creationId xmlns:a16="http://schemas.microsoft.com/office/drawing/2014/main" id="{8FE9330B-B5FA-13B0-112A-2F8E2FC088F4}"/>
-                    </a:ext>
-                  </a:extLst>
-                </p:cNvPr>
-                <p:cNvGrpSpPr/>
-                <p:nvPr/>
-              </p:nvGrpSpPr>
-              <p:grpSpPr>
-                <a:xfrm>
-                  <a:off x="3671556" y="3388370"/>
-                  <a:ext cx="621935" cy="288515"/>
-                  <a:chOff x="3671556" y="3388370"/>
-                  <a:chExt cx="621935" cy="288515"/>
-                </a:xfrm>
-              </p:grpSpPr>
-              <p:cxnSp>
-                <p:nvCxnSpPr>
-                  <p:cNvPr id="364" name="Straight Connector 363">
-                    <a:extLst>
-                      <a:ext uri="{FF2B5EF4-FFF2-40B4-BE49-F238E27FC236}">
-                        <a16:creationId xmlns:a16="http://schemas.microsoft.com/office/drawing/2014/main" id="{B1AD391A-68EA-1390-0650-D7E1B8984D88}"/>
-                      </a:ext>
-                    </a:extLst>
-                  </p:cNvPr>
-                  <p:cNvCxnSpPr>
-                    <a:cxnSpLocks/>
-                  </p:cNvCxnSpPr>
-                  <p:nvPr/>
-                </p:nvCxnSpPr>
-                <p:spPr>
-                  <a:xfrm>
-                    <a:off x="3671558" y="3398021"/>
-                    <a:ext cx="621933" cy="2"/>
-                  </a:xfrm>
-                  <a:prstGeom prst="line">
-                    <a:avLst/>
-                  </a:prstGeom>
-                  <a:ln>
-                    <a:solidFill>
-                      <a:schemeClr val="tx1"/>
-                    </a:solidFill>
-                  </a:ln>
-                </p:spPr>
-                <p:style>
-                  <a:lnRef idx="2">
-                    <a:schemeClr val="accent1"/>
-                  </a:lnRef>
-                  <a:fillRef idx="0">
-                    <a:schemeClr val="accent1"/>
-                  </a:fillRef>
-                  <a:effectRef idx="1">
-                    <a:schemeClr val="accent1"/>
-                  </a:effectRef>
-                  <a:fontRef idx="minor">
-                    <a:schemeClr val="tx1"/>
-                  </a:fontRef>
-                </p:style>
-              </p:cxnSp>
-              <p:cxnSp>
-                <p:nvCxnSpPr>
-                  <p:cNvPr id="365" name="Straight Connector 364">
-                    <a:extLst>
-                      <a:ext uri="{FF2B5EF4-FFF2-40B4-BE49-F238E27FC236}">
-                        <a16:creationId xmlns:a16="http://schemas.microsoft.com/office/drawing/2014/main" id="{B7CDDBCB-9377-3540-28C4-79A4D7004969}"/>
-                      </a:ext>
-                    </a:extLst>
-                  </p:cNvPr>
-                  <p:cNvCxnSpPr>
-                    <a:cxnSpLocks/>
-                  </p:cNvCxnSpPr>
-                  <p:nvPr/>
-                </p:nvCxnSpPr>
-                <p:spPr>
-                  <a:xfrm>
-                    <a:off x="3671556" y="3388370"/>
-                    <a:ext cx="0" cy="288515"/>
-                  </a:xfrm>
-                  <a:prstGeom prst="line">
-                    <a:avLst/>
-                  </a:prstGeom>
-                  <a:ln>
-                    <a:solidFill>
-                      <a:schemeClr val="tx1"/>
-                    </a:solidFill>
-                  </a:ln>
-                </p:spPr>
-                <p:style>
-                  <a:lnRef idx="2">
-                    <a:schemeClr val="accent1"/>
-                  </a:lnRef>
-                  <a:fillRef idx="0">
-                    <a:schemeClr val="accent1"/>
-                  </a:fillRef>
-                  <a:effectRef idx="1">
-                    <a:schemeClr val="accent1"/>
-                  </a:effectRef>
-                  <a:fontRef idx="minor">
-                    <a:schemeClr val="tx1"/>
-                  </a:fontRef>
-                </p:style>
-              </p:cxnSp>
-            </p:grpSp>
-            <p:cxnSp>
-              <p:nvCxnSpPr>
-                <p:cNvPr id="371" name="Straight Connector 370">
-                  <a:extLst>
-                    <a:ext uri="{FF2B5EF4-FFF2-40B4-BE49-F238E27FC236}">
-                      <a16:creationId xmlns:a16="http://schemas.microsoft.com/office/drawing/2014/main" id="{534C91C6-F5EB-E742-3DEC-D3C1FB5629A0}"/>
+                      <a16:creationId xmlns:a16="http://schemas.microsoft.com/office/drawing/2014/main" id="{B1AD391A-68EA-1390-0650-D7E1B8984D88}"/>
                     </a:ext>
                   </a:extLst>
                 </p:cNvPr>
@@ -8741,7 +7651,50 @@
               </p:nvCxnSpPr>
               <p:spPr>
                 <a:xfrm>
-                  <a:off x="4287027" y="3118056"/>
+                  <a:off x="3671558" y="3398021"/>
+                  <a:ext cx="621933" cy="2"/>
+                </a:xfrm>
+                <a:prstGeom prst="line">
+                  <a:avLst/>
+                </a:prstGeom>
+                <a:ln>
+                  <a:solidFill>
+                    <a:schemeClr val="tx1"/>
+                  </a:solidFill>
+                </a:ln>
+              </p:spPr>
+              <p:style>
+                <a:lnRef idx="2">
+                  <a:schemeClr val="accent1"/>
+                </a:lnRef>
+                <a:fillRef idx="0">
+                  <a:schemeClr val="accent1"/>
+                </a:fillRef>
+                <a:effectRef idx="1">
+                  <a:schemeClr val="accent1"/>
+                </a:effectRef>
+                <a:fontRef idx="minor">
+                  <a:schemeClr val="tx1"/>
+                </a:fontRef>
+              </p:style>
+            </p:cxnSp>
+            <p:cxnSp>
+              <p:nvCxnSpPr>
+                <p:cNvPr id="365" name="Straight Connector 364">
+                  <a:extLst>
+                    <a:ext uri="{FF2B5EF4-FFF2-40B4-BE49-F238E27FC236}">
+                      <a16:creationId xmlns:a16="http://schemas.microsoft.com/office/drawing/2014/main" id="{B7CDDBCB-9377-3540-28C4-79A4D7004969}"/>
+                    </a:ext>
+                  </a:extLst>
+                </p:cNvPr>
+                <p:cNvCxnSpPr>
+                  <a:cxnSpLocks/>
+                </p:cNvCxnSpPr>
+                <p:nvPr/>
+              </p:nvCxnSpPr>
+              <p:spPr>
+                <a:xfrm>
+                  <a:off x="3671556" y="3388370"/>
                   <a:ext cx="0" cy="288515"/>
                 </a:xfrm>
                 <a:prstGeom prst="line">
@@ -8751,7 +7704,6 @@
                   <a:solidFill>
                     <a:schemeClr val="tx1"/>
                   </a:solidFill>
-                  <a:headEnd type="triangle"/>
                 </a:ln>
               </p:spPr>
               <p:style>
@@ -8770,168 +7722,212 @@
               </p:style>
             </p:cxnSp>
           </p:grpSp>
-          <p:sp>
-            <p:nvSpPr>
-              <p:cNvPr id="403" name="Rectangle 107">
+          <p:cxnSp>
+            <p:nvCxnSpPr>
+              <p:cNvPr id="371" name="Straight Connector 370">
                 <a:extLst>
                   <a:ext uri="{FF2B5EF4-FFF2-40B4-BE49-F238E27FC236}">
-                    <a16:creationId xmlns:a16="http://schemas.microsoft.com/office/drawing/2014/main" id="{91027269-C574-2A36-0E09-1F757DA45F43}"/>
+                    <a16:creationId xmlns:a16="http://schemas.microsoft.com/office/drawing/2014/main" id="{534C91C6-F5EB-E742-3DEC-D3C1FB5629A0}"/>
                   </a:ext>
                 </a:extLst>
               </p:cNvPr>
-              <p:cNvSpPr/>
+              <p:cNvCxnSpPr>
+                <a:cxnSpLocks/>
+              </p:cNvCxnSpPr>
               <p:nvPr/>
-            </p:nvSpPr>
+            </p:nvCxnSpPr>
             <p:spPr>
-              <a:xfrm rot="5400000">
-                <a:off x="2916602" y="3304894"/>
-                <a:ext cx="257672" cy="134175"/>
+              <a:xfrm>
+                <a:off x="4287027" y="3118056"/>
+                <a:ext cx="0" cy="288515"/>
               </a:xfrm>
-              <a:custGeom>
+              <a:prstGeom prst="line">
                 <a:avLst/>
-                <a:gdLst>
-                  <a:gd name="connsiteX0" fmla="*/ 0 w 1063961"/>
-                  <a:gd name="connsiteY0" fmla="*/ 0 h 733578"/>
-                  <a:gd name="connsiteX1" fmla="*/ 1063961 w 1063961"/>
-                  <a:gd name="connsiteY1" fmla="*/ 0 h 733578"/>
-                  <a:gd name="connsiteX2" fmla="*/ 1063961 w 1063961"/>
-                  <a:gd name="connsiteY2" fmla="*/ 733578 h 733578"/>
-                  <a:gd name="connsiteX3" fmla="*/ 0 w 1063961"/>
-                  <a:gd name="connsiteY3" fmla="*/ 733578 h 733578"/>
-                  <a:gd name="connsiteX4" fmla="*/ 0 w 1063961"/>
-                  <a:gd name="connsiteY4" fmla="*/ 0 h 733578"/>
-                  <a:gd name="connsiteX0" fmla="*/ 1063961 w 1063961"/>
-                  <a:gd name="connsiteY0" fmla="*/ 0 h 733578"/>
-                  <a:gd name="connsiteX1" fmla="*/ 1063961 w 1063961"/>
-                  <a:gd name="connsiteY1" fmla="*/ 733578 h 733578"/>
-                  <a:gd name="connsiteX2" fmla="*/ 0 w 1063961"/>
-                  <a:gd name="connsiteY2" fmla="*/ 733578 h 733578"/>
-                  <a:gd name="connsiteX3" fmla="*/ 91440 w 1063961"/>
-                  <a:gd name="connsiteY3" fmla="*/ 91440 h 733578"/>
-                  <a:gd name="connsiteX0" fmla="*/ 1063961 w 1063961"/>
-                  <a:gd name="connsiteY0" fmla="*/ 0 h 733578"/>
-                  <a:gd name="connsiteX1" fmla="*/ 1063961 w 1063961"/>
-                  <a:gd name="connsiteY1" fmla="*/ 733578 h 733578"/>
-                  <a:gd name="connsiteX2" fmla="*/ 0 w 1063961"/>
-                  <a:gd name="connsiteY2" fmla="*/ 733578 h 733578"/>
-                  <a:gd name="connsiteX3" fmla="*/ 2540 w 1063961"/>
-                  <a:gd name="connsiteY3" fmla="*/ 49106 h 733578"/>
-                  <a:gd name="connsiteX0" fmla="*/ 1063961 w 1063961"/>
-                  <a:gd name="connsiteY0" fmla="*/ 3991 h 737569"/>
-                  <a:gd name="connsiteX1" fmla="*/ 1063961 w 1063961"/>
-                  <a:gd name="connsiteY1" fmla="*/ 737569 h 737569"/>
-                  <a:gd name="connsiteX2" fmla="*/ 0 w 1063961"/>
-                  <a:gd name="connsiteY2" fmla="*/ 737569 h 737569"/>
-                  <a:gd name="connsiteX3" fmla="*/ 6790 w 1063961"/>
-                  <a:gd name="connsiteY3" fmla="*/ 0 h 737569"/>
-                  <a:gd name="connsiteX0" fmla="*/ 1063961 w 1063961"/>
-                  <a:gd name="connsiteY0" fmla="*/ 2180 h 735758"/>
-                  <a:gd name="connsiteX1" fmla="*/ 1063961 w 1063961"/>
-                  <a:gd name="connsiteY1" fmla="*/ 735758 h 735758"/>
-                  <a:gd name="connsiteX2" fmla="*/ 0 w 1063961"/>
-                  <a:gd name="connsiteY2" fmla="*/ 735758 h 735758"/>
-                  <a:gd name="connsiteX3" fmla="*/ 415 w 1063961"/>
-                  <a:gd name="connsiteY3" fmla="*/ 0 h 735758"/>
-                  <a:gd name="connsiteX0" fmla="*/ 1063961 w 1063961"/>
-                  <a:gd name="connsiteY0" fmla="*/ 197473 h 931051"/>
-                  <a:gd name="connsiteX1" fmla="*/ 1063961 w 1063961"/>
-                  <a:gd name="connsiteY1" fmla="*/ 931051 h 931051"/>
-                  <a:gd name="connsiteX2" fmla="*/ 0 w 1063961"/>
-                  <a:gd name="connsiteY2" fmla="*/ 931051 h 931051"/>
-                  <a:gd name="connsiteX3" fmla="*/ 415 w 1063961"/>
-                  <a:gd name="connsiteY3" fmla="*/ 0 h 931051"/>
-                  <a:gd name="connsiteX0" fmla="*/ 1064986 w 1064986"/>
-                  <a:gd name="connsiteY0" fmla="*/ 407377 h 1140955"/>
-                  <a:gd name="connsiteX1" fmla="*/ 1064986 w 1064986"/>
-                  <a:gd name="connsiteY1" fmla="*/ 1140955 h 1140955"/>
-                  <a:gd name="connsiteX2" fmla="*/ 1025 w 1064986"/>
-                  <a:gd name="connsiteY2" fmla="*/ 1140955 h 1140955"/>
-                  <a:gd name="connsiteX3" fmla="*/ 0 w 1064986"/>
-                  <a:gd name="connsiteY3" fmla="*/ 0 h 1140955"/>
-                  <a:gd name="connsiteX0" fmla="*/ 1067155 w 1067155"/>
-                  <a:gd name="connsiteY0" fmla="*/ -1 h 733577"/>
-                  <a:gd name="connsiteX1" fmla="*/ 1067155 w 1067155"/>
-                  <a:gd name="connsiteY1" fmla="*/ 733577 h 733577"/>
-                  <a:gd name="connsiteX2" fmla="*/ 3194 w 1067155"/>
-                  <a:gd name="connsiteY2" fmla="*/ 733577 h 733577"/>
-                  <a:gd name="connsiteX3" fmla="*/ 0 w 1067155"/>
-                  <a:gd name="connsiteY3" fmla="*/ 84111 h 733577"/>
-                  <a:gd name="connsiteX0" fmla="*/ 1067155 w 1067155"/>
-                  <a:gd name="connsiteY0" fmla="*/ 8990 h 742568"/>
-                  <a:gd name="connsiteX1" fmla="*/ 1067155 w 1067155"/>
-                  <a:gd name="connsiteY1" fmla="*/ 742568 h 742568"/>
-                  <a:gd name="connsiteX2" fmla="*/ 3194 w 1067155"/>
-                  <a:gd name="connsiteY2" fmla="*/ 742568 h 742568"/>
-                  <a:gd name="connsiteX3" fmla="*/ 0 w 1067155"/>
-                  <a:gd name="connsiteY3" fmla="*/ 0 h 742568"/>
-                </a:gdLst>
-                <a:ahLst/>
-                <a:cxnLst>
-                  <a:cxn ang="0">
-                    <a:pos x="connsiteX0" y="connsiteY0"/>
-                  </a:cxn>
-                  <a:cxn ang="0">
-                    <a:pos x="connsiteX1" y="connsiteY1"/>
-                  </a:cxn>
-                  <a:cxn ang="0">
-                    <a:pos x="connsiteX2" y="connsiteY2"/>
-                  </a:cxn>
-                  <a:cxn ang="0">
-                    <a:pos x="connsiteX3" y="connsiteY3"/>
-                  </a:cxn>
-                </a:cxnLst>
-                <a:rect l="l" t="t" r="r" b="b"/>
-                <a:pathLst>
-                  <a:path w="1067155" h="742568">
-                    <a:moveTo>
-                      <a:pt x="1067155" y="8990"/>
-                    </a:moveTo>
-                    <a:lnTo>
-                      <a:pt x="1067155" y="742568"/>
-                    </a:lnTo>
-                    <a:lnTo>
-                      <a:pt x="3194" y="742568"/>
-                    </a:lnTo>
-                    <a:cubicBezTo>
-                      <a:pt x="3194" y="498042"/>
-                      <a:pt x="0" y="0"/>
-                      <a:pt x="0" y="0"/>
-                    </a:cubicBezTo>
-                  </a:path>
-                </a:pathLst>
-              </a:custGeom>
-              <a:noFill/>
+              </a:prstGeom>
               <a:ln>
+                <a:solidFill>
+                  <a:schemeClr val="tx1"/>
+                </a:solidFill>
                 <a:headEnd type="triangle"/>
-                <a:tailEnd type="triangle"/>
               </a:ln>
             </p:spPr>
             <p:style>
               <a:lnRef idx="2">
-                <a:schemeClr val="accent1">
-                  <a:shade val="15000"/>
-                </a:schemeClr>
+                <a:schemeClr val="accent1"/>
               </a:lnRef>
-              <a:fillRef idx="1">
+              <a:fillRef idx="0">
                 <a:schemeClr val="accent1"/>
               </a:fillRef>
-              <a:effectRef idx="0">
+              <a:effectRef idx="1">
                 <a:schemeClr val="accent1"/>
               </a:effectRef>
               <a:fontRef idx="minor">
-                <a:schemeClr val="lt1"/>
+                <a:schemeClr val="tx1"/>
               </a:fontRef>
             </p:style>
-            <p:txBody>
-              <a:bodyPr rtlCol="0" anchor="ctr"/>
-              <a:lstStyle/>
-              <a:p>
-                <a:pPr algn="ctr"/>
-                <a:endParaRPr lang="zh-CN" altLang="en-US"/>
-              </a:p>
-            </p:txBody>
-          </p:sp>
+          </p:cxnSp>
         </p:grpSp>
+        <p:sp>
+          <p:nvSpPr>
+            <p:cNvPr id="403" name="Rectangle 107">
+              <a:extLst>
+                <a:ext uri="{FF2B5EF4-FFF2-40B4-BE49-F238E27FC236}">
+                  <a16:creationId xmlns:a16="http://schemas.microsoft.com/office/drawing/2014/main" id="{91027269-C574-2A36-0E09-1F757DA45F43}"/>
+                </a:ext>
+              </a:extLst>
+            </p:cNvPr>
+            <p:cNvSpPr/>
+            <p:nvPr/>
+          </p:nvSpPr>
+          <p:spPr>
+            <a:xfrm rot="5400000">
+              <a:off x="2916602" y="3304894"/>
+              <a:ext cx="257672" cy="134175"/>
+            </a:xfrm>
+            <a:custGeom>
+              <a:avLst/>
+              <a:gdLst>
+                <a:gd name="connsiteX0" fmla="*/ 0 w 1063961"/>
+                <a:gd name="connsiteY0" fmla="*/ 0 h 733578"/>
+                <a:gd name="connsiteX1" fmla="*/ 1063961 w 1063961"/>
+                <a:gd name="connsiteY1" fmla="*/ 0 h 733578"/>
+                <a:gd name="connsiteX2" fmla="*/ 1063961 w 1063961"/>
+                <a:gd name="connsiteY2" fmla="*/ 733578 h 733578"/>
+                <a:gd name="connsiteX3" fmla="*/ 0 w 1063961"/>
+                <a:gd name="connsiteY3" fmla="*/ 733578 h 733578"/>
+                <a:gd name="connsiteX4" fmla="*/ 0 w 1063961"/>
+                <a:gd name="connsiteY4" fmla="*/ 0 h 733578"/>
+                <a:gd name="connsiteX0" fmla="*/ 1063961 w 1063961"/>
+                <a:gd name="connsiteY0" fmla="*/ 0 h 733578"/>
+                <a:gd name="connsiteX1" fmla="*/ 1063961 w 1063961"/>
+                <a:gd name="connsiteY1" fmla="*/ 733578 h 733578"/>
+                <a:gd name="connsiteX2" fmla="*/ 0 w 1063961"/>
+                <a:gd name="connsiteY2" fmla="*/ 733578 h 733578"/>
+                <a:gd name="connsiteX3" fmla="*/ 91440 w 1063961"/>
+                <a:gd name="connsiteY3" fmla="*/ 91440 h 733578"/>
+                <a:gd name="connsiteX0" fmla="*/ 1063961 w 1063961"/>
+                <a:gd name="connsiteY0" fmla="*/ 0 h 733578"/>
+                <a:gd name="connsiteX1" fmla="*/ 1063961 w 1063961"/>
+                <a:gd name="connsiteY1" fmla="*/ 733578 h 733578"/>
+                <a:gd name="connsiteX2" fmla="*/ 0 w 1063961"/>
+                <a:gd name="connsiteY2" fmla="*/ 733578 h 733578"/>
+                <a:gd name="connsiteX3" fmla="*/ 2540 w 1063961"/>
+                <a:gd name="connsiteY3" fmla="*/ 49106 h 733578"/>
+                <a:gd name="connsiteX0" fmla="*/ 1063961 w 1063961"/>
+                <a:gd name="connsiteY0" fmla="*/ 3991 h 737569"/>
+                <a:gd name="connsiteX1" fmla="*/ 1063961 w 1063961"/>
+                <a:gd name="connsiteY1" fmla="*/ 737569 h 737569"/>
+                <a:gd name="connsiteX2" fmla="*/ 0 w 1063961"/>
+                <a:gd name="connsiteY2" fmla="*/ 737569 h 737569"/>
+                <a:gd name="connsiteX3" fmla="*/ 6790 w 1063961"/>
+                <a:gd name="connsiteY3" fmla="*/ 0 h 737569"/>
+                <a:gd name="connsiteX0" fmla="*/ 1063961 w 1063961"/>
+                <a:gd name="connsiteY0" fmla="*/ 2180 h 735758"/>
+                <a:gd name="connsiteX1" fmla="*/ 1063961 w 1063961"/>
+                <a:gd name="connsiteY1" fmla="*/ 735758 h 735758"/>
+                <a:gd name="connsiteX2" fmla="*/ 0 w 1063961"/>
+                <a:gd name="connsiteY2" fmla="*/ 735758 h 735758"/>
+                <a:gd name="connsiteX3" fmla="*/ 415 w 1063961"/>
+                <a:gd name="connsiteY3" fmla="*/ 0 h 735758"/>
+                <a:gd name="connsiteX0" fmla="*/ 1063961 w 1063961"/>
+                <a:gd name="connsiteY0" fmla="*/ 197473 h 931051"/>
+                <a:gd name="connsiteX1" fmla="*/ 1063961 w 1063961"/>
+                <a:gd name="connsiteY1" fmla="*/ 931051 h 931051"/>
+                <a:gd name="connsiteX2" fmla="*/ 0 w 1063961"/>
+                <a:gd name="connsiteY2" fmla="*/ 931051 h 931051"/>
+                <a:gd name="connsiteX3" fmla="*/ 415 w 1063961"/>
+                <a:gd name="connsiteY3" fmla="*/ 0 h 931051"/>
+                <a:gd name="connsiteX0" fmla="*/ 1064986 w 1064986"/>
+                <a:gd name="connsiteY0" fmla="*/ 407377 h 1140955"/>
+                <a:gd name="connsiteX1" fmla="*/ 1064986 w 1064986"/>
+                <a:gd name="connsiteY1" fmla="*/ 1140955 h 1140955"/>
+                <a:gd name="connsiteX2" fmla="*/ 1025 w 1064986"/>
+                <a:gd name="connsiteY2" fmla="*/ 1140955 h 1140955"/>
+                <a:gd name="connsiteX3" fmla="*/ 0 w 1064986"/>
+                <a:gd name="connsiteY3" fmla="*/ 0 h 1140955"/>
+                <a:gd name="connsiteX0" fmla="*/ 1067155 w 1067155"/>
+                <a:gd name="connsiteY0" fmla="*/ -1 h 733577"/>
+                <a:gd name="connsiteX1" fmla="*/ 1067155 w 1067155"/>
+                <a:gd name="connsiteY1" fmla="*/ 733577 h 733577"/>
+                <a:gd name="connsiteX2" fmla="*/ 3194 w 1067155"/>
+                <a:gd name="connsiteY2" fmla="*/ 733577 h 733577"/>
+                <a:gd name="connsiteX3" fmla="*/ 0 w 1067155"/>
+                <a:gd name="connsiteY3" fmla="*/ 84111 h 733577"/>
+                <a:gd name="connsiteX0" fmla="*/ 1067155 w 1067155"/>
+                <a:gd name="connsiteY0" fmla="*/ 8990 h 742568"/>
+                <a:gd name="connsiteX1" fmla="*/ 1067155 w 1067155"/>
+                <a:gd name="connsiteY1" fmla="*/ 742568 h 742568"/>
+                <a:gd name="connsiteX2" fmla="*/ 3194 w 1067155"/>
+                <a:gd name="connsiteY2" fmla="*/ 742568 h 742568"/>
+                <a:gd name="connsiteX3" fmla="*/ 0 w 1067155"/>
+                <a:gd name="connsiteY3" fmla="*/ 0 h 742568"/>
+              </a:gdLst>
+              <a:ahLst/>
+              <a:cxnLst>
+                <a:cxn ang="0">
+                  <a:pos x="connsiteX0" y="connsiteY0"/>
+                </a:cxn>
+                <a:cxn ang="0">
+                  <a:pos x="connsiteX1" y="connsiteY1"/>
+                </a:cxn>
+                <a:cxn ang="0">
+                  <a:pos x="connsiteX2" y="connsiteY2"/>
+                </a:cxn>
+                <a:cxn ang="0">
+                  <a:pos x="connsiteX3" y="connsiteY3"/>
+                </a:cxn>
+              </a:cxnLst>
+              <a:rect l="l" t="t" r="r" b="b"/>
+              <a:pathLst>
+                <a:path w="1067155" h="742568">
+                  <a:moveTo>
+                    <a:pt x="1067155" y="8990"/>
+                  </a:moveTo>
+                  <a:lnTo>
+                    <a:pt x="1067155" y="742568"/>
+                  </a:lnTo>
+                  <a:lnTo>
+                    <a:pt x="3194" y="742568"/>
+                  </a:lnTo>
+                  <a:cubicBezTo>
+                    <a:pt x="3194" y="498042"/>
+                    <a:pt x="0" y="0"/>
+                    <a:pt x="0" y="0"/>
+                  </a:cubicBezTo>
+                </a:path>
+              </a:pathLst>
+            </a:custGeom>
+            <a:noFill/>
+            <a:ln>
+              <a:headEnd type="triangle"/>
+              <a:tailEnd type="triangle"/>
+            </a:ln>
+          </p:spPr>
+          <p:style>
+            <a:lnRef idx="2">
+              <a:schemeClr val="accent1">
+                <a:shade val="15000"/>
+              </a:schemeClr>
+            </a:lnRef>
+            <a:fillRef idx="1">
+              <a:schemeClr val="accent1"/>
+            </a:fillRef>
+            <a:effectRef idx="0">
+              <a:schemeClr val="accent1"/>
+            </a:effectRef>
+            <a:fontRef idx="minor">
+              <a:schemeClr val="lt1"/>
+            </a:fontRef>
+          </p:style>
+          <p:txBody>
+            <a:bodyPr rtlCol="0" anchor="ctr"/>
+            <a:lstStyle/>
+            <a:p>
+              <a:pPr algn="ctr"/>
+              <a:endParaRPr lang="zh-CN" altLang="en-US"/>
+            </a:p>
+          </p:txBody>
+        </p:sp>
       </p:grpSp>
       <p:sp>
         <p:nvSpPr>
@@ -8985,7 +7981,7 @@
             </p:nvSpPr>
             <p:spPr>
               <a:xfrm>
-                <a:off x="1883337" y="2892366"/>
+                <a:off x="1883337" y="2829471"/>
                 <a:ext cx="1426895" cy="376642"/>
               </a:xfrm>
               <a:prstGeom prst="rect">
@@ -9122,13 +8118,7 @@
                         <a:rPr lang="en-US" altLang="zh-CN" sz="1400" b="0" i="0" smtClean="0">
                           <a:latin typeface="Cambria Math" panose="02040503050406030204" pitchFamily="18" charset="0"/>
                         </a:rPr>
-                        <m:t>}</m:t>
-                      </m:r>
-                      <m:r>
-                        <a:rPr lang="en-US" altLang="zh-CN" sz="1400" b="0" i="0" smtClean="0">
-                          <a:latin typeface="Cambria Math" panose="02040503050406030204" pitchFamily="18" charset="0"/>
-                        </a:rPr>
-                        <m:t>, </m:t>
+                        <m:t>}, </m:t>
                       </m:r>
                       <m:sSub>
                         <m:sSubPr>
@@ -9211,7 +8201,7 @@
             </p:nvSpPr>
             <p:spPr>
               <a:xfrm>
-                <a:off x="1883337" y="2892366"/>
+                <a:off x="1883337" y="2829471"/>
                 <a:ext cx="1426895" cy="376642"/>
               </a:xfrm>
               <a:prstGeom prst="rect">
@@ -9253,7 +8243,7 @@
         </p:nvSpPr>
         <p:spPr>
           <a:xfrm>
-            <a:off x="86338" y="3499932"/>
+            <a:off x="86338" y="3533371"/>
             <a:ext cx="396262" cy="307777"/>
           </a:xfrm>
           <a:prstGeom prst="rect">
@@ -9290,9 +8280,9 @@
         <p:grpSpPr>
           <a:xfrm>
             <a:off x="5392971" y="127250"/>
-            <a:ext cx="2463078" cy="4842645"/>
+            <a:ext cx="2567548" cy="4842645"/>
             <a:chOff x="5480772" y="28190"/>
-            <a:chExt cx="2463078" cy="4842645"/>
+            <a:chExt cx="2567548" cy="4842645"/>
           </a:xfrm>
         </p:grpSpPr>
         <p:grpSp>
@@ -9494,7 +8484,7 @@
           <p:spPr>
             <a:xfrm>
               <a:off x="7638607" y="3875352"/>
-              <a:ext cx="305243" cy="0"/>
+              <a:ext cx="409713" cy="0"/>
             </a:xfrm>
             <a:prstGeom prst="straightConnector1">
               <a:avLst/>
@@ -11252,8 +10242,8 @@
             </a:fontRef>
           </p:style>
         </p:cxnSp>
-        <mc:AlternateContent xmlns:mc="http://schemas.openxmlformats.org/markup-compatibility/2006">
-          <mc:Choice xmlns:a14="http://schemas.microsoft.com/office/drawing/2010/main" Requires="a14">
+        <mc:AlternateContent xmlns:mc="http://schemas.openxmlformats.org/markup-compatibility/2006" xmlns:a14="http://schemas.microsoft.com/office/drawing/2010/main">
+          <mc:Choice Requires="a14">
             <p:sp>
               <p:nvSpPr>
                 <p:cNvPr id="306" name="TextBox 305">
@@ -11342,7 +10332,7 @@
               </p:txBody>
             </p:sp>
           </mc:Choice>
-          <mc:Fallback>
+          <mc:Fallback xmlns="">
             <p:sp>
               <p:nvSpPr>
                 <p:cNvPr id="306" name="TextBox 305">
@@ -12929,8 +11919,8 @@
             </a:fontRef>
           </p:style>
         </p:cxnSp>
-        <mc:AlternateContent xmlns:mc="http://schemas.openxmlformats.org/markup-compatibility/2006">
-          <mc:Choice xmlns:a14="http://schemas.microsoft.com/office/drawing/2010/main" Requires="a14">
+        <mc:AlternateContent xmlns:mc="http://schemas.openxmlformats.org/markup-compatibility/2006" xmlns:a14="http://schemas.microsoft.com/office/drawing/2010/main">
+          <mc:Choice Requires="a14">
             <p:sp>
               <p:nvSpPr>
                 <p:cNvPr id="273" name="TextBox 272">
@@ -13019,7 +12009,7 @@
               </p:txBody>
             </p:sp>
           </mc:Choice>
-          <mc:Fallback>
+          <mc:Fallback xmlns="">
             <p:sp>
               <p:nvSpPr>
                 <p:cNvPr id="273" name="TextBox 272">
@@ -13397,9 +12387,9 @@
             <p:grpSpPr>
               <a:xfrm>
                 <a:off x="8368179" y="550689"/>
-                <a:ext cx="2129152" cy="3979987"/>
+                <a:ext cx="2129152" cy="3986935"/>
                 <a:chOff x="11004292" y="1407347"/>
-                <a:chExt cx="2129152" cy="3979987"/>
+                <a:chExt cx="2129152" cy="3986935"/>
               </a:xfrm>
             </p:grpSpPr>
             <p:sp>
@@ -13416,7 +12406,7 @@
               </p:nvSpPr>
               <p:spPr>
                 <a:xfrm>
-                  <a:off x="11004765" y="4701241"/>
+                  <a:off x="11004765" y="4716481"/>
                   <a:ext cx="669438" cy="677801"/>
                 </a:xfrm>
                 <a:prstGeom prst="rtTriangle">
@@ -14773,8 +13763,8 @@
               </a:fontRef>
             </p:style>
           </p:cxnSp>
-          <mc:AlternateContent xmlns:mc="http://schemas.openxmlformats.org/markup-compatibility/2006">
-            <mc:Choice xmlns:a14="http://schemas.microsoft.com/office/drawing/2010/main" Requires="a14">
+          <mc:AlternateContent xmlns:mc="http://schemas.openxmlformats.org/markup-compatibility/2006" xmlns:a14="http://schemas.microsoft.com/office/drawing/2010/main">
+            <mc:Choice Requires="a14">
               <p:sp>
                 <p:nvSpPr>
                   <p:cNvPr id="470" name="TextBox 469">
@@ -14863,7 +13853,7 @@
                 </p:txBody>
               </p:sp>
             </mc:Choice>
-            <mc:Fallback>
+            <mc:Fallback xmlns="">
               <p:sp>
                 <p:nvSpPr>
                   <p:cNvPr id="470" name="TextBox 469">
@@ -15231,14 +14221,14 @@
         </p:nvGrpSpPr>
         <p:grpSpPr>
           <a:xfrm>
-            <a:off x="-30889" y="3497742"/>
-            <a:ext cx="5935210" cy="1207503"/>
+            <a:off x="-30889" y="3587346"/>
+            <a:ext cx="5935210" cy="1198027"/>
             <a:chOff x="-30889" y="3588252"/>
-            <a:chExt cx="5935210" cy="1207503"/>
+            <a:chExt cx="5935210" cy="1198027"/>
           </a:xfrm>
         </p:grpSpPr>
-        <mc:AlternateContent xmlns:mc="http://schemas.openxmlformats.org/markup-compatibility/2006">
-          <mc:Choice xmlns:a14="http://schemas.microsoft.com/office/drawing/2010/main" Requires="a14">
+        <mc:AlternateContent xmlns:mc="http://schemas.openxmlformats.org/markup-compatibility/2006" xmlns:a14="http://schemas.microsoft.com/office/drawing/2010/main">
+          <mc:Choice Requires="a14">
             <p:sp>
               <p:nvSpPr>
                 <p:cNvPr id="500" name="TextBox 499">
@@ -15312,7 +14302,7 @@
               </p:txBody>
             </p:sp>
           </mc:Choice>
-          <mc:Fallback>
+          <mc:Fallback xmlns="">
             <p:sp>
               <p:nvSpPr>
                 <p:cNvPr id="500" name="TextBox 499">
@@ -15371,14 +14361,14 @@
           </p:nvGrpSpPr>
           <p:grpSpPr>
             <a:xfrm>
-              <a:off x="-30889" y="3644287"/>
-              <a:ext cx="5935210" cy="1151468"/>
-              <a:chOff x="-30889" y="3644287"/>
-              <a:chExt cx="5935210" cy="1151468"/>
+              <a:off x="-30889" y="3644286"/>
+              <a:ext cx="5935210" cy="1141993"/>
+              <a:chOff x="-30889" y="3644286"/>
+              <a:chExt cx="5935210" cy="1141993"/>
             </a:xfrm>
           </p:grpSpPr>
-          <mc:AlternateContent xmlns:mc="http://schemas.openxmlformats.org/markup-compatibility/2006">
-            <mc:Choice xmlns:a14="http://schemas.microsoft.com/office/drawing/2010/main" Requires="a14">
+          <mc:AlternateContent xmlns:mc="http://schemas.openxmlformats.org/markup-compatibility/2006" xmlns:a14="http://schemas.microsoft.com/office/drawing/2010/main">
+            <mc:Choice Requires="a14">
               <p:sp>
                 <p:nvSpPr>
                   <p:cNvPr id="498" name="TextBox 497">
@@ -15467,7 +14457,7 @@
                 </p:txBody>
               </p:sp>
             </mc:Choice>
-            <mc:Fallback>
+            <mc:Fallback xmlns="">
               <p:sp>
                 <p:nvSpPr>
                   <p:cNvPr id="498" name="TextBox 497">
@@ -15526,10 +14516,10 @@
             </p:nvGrpSpPr>
             <p:grpSpPr>
               <a:xfrm>
-                <a:off x="1080390" y="3644287"/>
-                <a:ext cx="3100025" cy="1151468"/>
+                <a:off x="1080390" y="3644286"/>
+                <a:ext cx="3100025" cy="1141993"/>
                 <a:chOff x="1962809" y="4077100"/>
-                <a:chExt cx="2387500" cy="1205109"/>
+                <a:chExt cx="2387500" cy="1195193"/>
               </a:xfrm>
             </p:grpSpPr>
             <p:sp>
@@ -15651,7 +14641,7 @@
               <p:spPr>
                 <a:xfrm>
                   <a:off x="1962809" y="4077100"/>
-                  <a:ext cx="2386619" cy="1205109"/>
+                  <a:ext cx="2386619" cy="1141336"/>
                 </a:xfrm>
                 <a:prstGeom prst="roundRect">
                   <a:avLst>
@@ -15761,7 +14751,7 @@
                 <a:avLst/>
               </a:prstGeom>
               <a:solidFill>
-                <a:srgbClr val="FBE1E1"/>
+                <a:srgbClr val="F8CCCC"/>
               </a:solidFill>
               <a:ln>
                 <a:solidFill>
@@ -15942,8 +14932,8 @@
               </a:p>
             </p:txBody>
           </p:sp>
-          <mc:AlternateContent xmlns:mc="http://schemas.openxmlformats.org/markup-compatibility/2006">
-            <mc:Choice xmlns:a14="http://schemas.microsoft.com/office/drawing/2010/main" Requires="a14">
+          <mc:AlternateContent xmlns:mc="http://schemas.openxmlformats.org/markup-compatibility/2006" xmlns:a14="http://schemas.microsoft.com/office/drawing/2010/main">
+            <mc:Choice Requires="a14">
               <p:sp>
                 <p:nvSpPr>
                   <p:cNvPr id="490" name="TextBox 489">
@@ -16089,7 +15079,7 @@
                 </p:txBody>
               </p:sp>
             </mc:Choice>
-            <mc:Fallback>
+            <mc:Fallback xmlns="">
               <p:sp>
                 <p:nvSpPr>
                   <p:cNvPr id="490" name="TextBox 489">
@@ -16341,8 +15331,8 @@
               </a:fontRef>
             </p:style>
           </p:cxnSp>
-          <mc:AlternateContent xmlns:mc="http://schemas.openxmlformats.org/markup-compatibility/2006">
-            <mc:Choice xmlns:a14="http://schemas.microsoft.com/office/drawing/2010/main" Requires="a14">
+          <mc:AlternateContent xmlns:mc="http://schemas.openxmlformats.org/markup-compatibility/2006" xmlns:a14="http://schemas.microsoft.com/office/drawing/2010/main">
+            <mc:Choice Requires="a14">
               <p:sp>
                 <p:nvSpPr>
                   <p:cNvPr id="502" name="TextBox 501">
@@ -16411,7 +15401,7 @@
                 </p:txBody>
               </p:sp>
             </mc:Choice>
-            <mc:Fallback>
+            <mc:Fallback xmlns="">
               <p:sp>
                 <p:nvSpPr>
                   <p:cNvPr id="502" name="TextBox 501">
@@ -16749,8 +15739,8 @@
               </a:p>
             </p:txBody>
           </p:sp>
-          <mc:AlternateContent xmlns:mc="http://schemas.openxmlformats.org/markup-compatibility/2006">
-            <mc:Choice xmlns:a14="http://schemas.microsoft.com/office/drawing/2010/main" Requires="a14">
+          <mc:AlternateContent xmlns:mc="http://schemas.openxmlformats.org/markup-compatibility/2006" xmlns:a14="http://schemas.microsoft.com/office/drawing/2010/main">
+            <mc:Choice Requires="a14">
               <p:sp>
                 <p:nvSpPr>
                   <p:cNvPr id="130" name="Rectangle: Rounded Corners 129">
@@ -16873,7 +15863,7 @@
                 </p:txBody>
               </p:sp>
             </mc:Choice>
-            <mc:Fallback>
+            <mc:Fallback xmlns="">
               <p:sp>
                 <p:nvSpPr>
                   <p:cNvPr id="130" name="Rectangle: Rounded Corners 129">
@@ -17029,8 +16019,8 @@
         </p:nvSpPr>
         <p:spPr>
           <a:xfrm>
-            <a:off x="330361" y="746924"/>
-            <a:ext cx="3015038" cy="1558377"/>
+            <a:off x="330361" y="746925"/>
+            <a:ext cx="3015038" cy="1466790"/>
           </a:xfrm>
           <a:prstGeom prst="roundRect">
             <a:avLst>
@@ -17133,7 +16123,7 @@
             </p:nvSpPr>
             <p:spPr>
               <a:xfrm>
-                <a:off x="2631003" y="328648"/>
+                <a:off x="2644540" y="48973"/>
                 <a:ext cx="811119" cy="276999"/>
               </a:xfrm>
               <a:prstGeom prst="rect">
@@ -17237,7 +16227,7 @@
             </p:nvSpPr>
             <p:spPr>
               <a:xfrm>
-                <a:off x="2631003" y="328648"/>
+                <a:off x="2644540" y="48973"/>
                 <a:ext cx="811119" cy="276999"/>
               </a:xfrm>
               <a:prstGeom prst="rect">
@@ -17246,7 +16236,7 @@
               <a:blipFill>
                 <a:blip r:embed="rId32"/>
                 <a:stretch>
-                  <a:fillRect b="-6667"/>
+                  <a:fillRect b="-8889"/>
                 </a:stretch>
               </a:blipFill>
             </p:spPr>
@@ -17280,9 +16270,9 @@
               <p:nvPr/>
             </p:nvSpPr>
             <p:spPr>
-              <a:xfrm rot="5400000">
-                <a:off x="7588989" y="3875124"/>
-                <a:ext cx="811119" cy="276999"/>
+              <a:xfrm>
+                <a:off x="7693750" y="3712703"/>
+                <a:ext cx="632930" cy="276999"/>
               </a:xfrm>
               <a:prstGeom prst="rect">
                 <a:avLst/>
@@ -17306,60 +16296,14 @@
                         <a:rPr lang="en-US" altLang="zh-CN" sz="1200" b="0" i="1" smtClean="0">
                           <a:latin typeface="Cambria Math" panose="02040503050406030204" pitchFamily="18" charset="0"/>
                         </a:rPr>
-                        <m:t>|</m:t>
+                        <m:t>𝑎𝑡𝑡𝑒𝑛</m:t>
                       </m:r>
-                      <m:d>
-                        <m:dPr>
-                          <m:begChr m:val="⟨"/>
-                          <m:endChr m:val="⟩"/>
-                          <m:ctrlPr>
-                            <a:rPr lang="en-US" altLang="zh-CN" sz="1200" i="1" smtClean="0">
-                              <a:latin typeface="Cambria Math" panose="02040503050406030204" pitchFamily="18" charset="0"/>
-                            </a:rPr>
-                          </m:ctrlPr>
-                        </m:dPr>
-                        <m:e>
-                          <m:r>
-                            <a:rPr lang="en-US" altLang="zh-CN" sz="1200" b="0" i="1" smtClean="0">
-                              <a:latin typeface="Cambria Math" panose="02040503050406030204" pitchFamily="18" charset="0"/>
-                            </a:rPr>
-                            <m:t>𝑖</m:t>
-                          </m:r>
-                        </m:e>
-                        <m:e>
-                          <m:r>
-                            <a:rPr lang="en-US" altLang="zh-CN" sz="1200" b="0" i="1" smtClean="0">
-                              <a:latin typeface="Cambria Math" panose="02040503050406030204" pitchFamily="18" charset="0"/>
-                            </a:rPr>
-                            <m:t>𝑄𝑃</m:t>
-                          </m:r>
-                        </m:e>
-                      </m:d>
-                      <m:sSup>
-                        <m:sSupPr>
-                          <m:ctrlPr>
-                            <a:rPr lang="en-US" altLang="zh-CN" sz="1200" b="0" i="1" smtClean="0">
-                              <a:latin typeface="Cambria Math" panose="02040503050406030204" pitchFamily="18" charset="0"/>
-                            </a:rPr>
-                          </m:ctrlPr>
-                        </m:sSupPr>
-                        <m:e>
-                          <m:r>
-                            <a:rPr lang="en-US" altLang="zh-CN" sz="1200" b="0" i="1" smtClean="0">
-                              <a:latin typeface="Cambria Math" panose="02040503050406030204" pitchFamily="18" charset="0"/>
-                            </a:rPr>
-                            <m:t>|</m:t>
-                          </m:r>
-                        </m:e>
-                        <m:sup>
-                          <m:r>
-                            <a:rPr lang="en-US" altLang="zh-CN" sz="1200" b="0" i="1" smtClean="0">
-                              <a:latin typeface="Cambria Math" panose="02040503050406030204" pitchFamily="18" charset="0"/>
-                            </a:rPr>
-                            <m:t>2</m:t>
-                          </m:r>
-                        </m:sup>
-                      </m:sSup>
+                      <m:r>
+                        <a:rPr lang="en-US" altLang="zh-CN" sz="1200" b="0" i="1" smtClean="0">
+                          <a:latin typeface="Cambria Math" panose="02040503050406030204" pitchFamily="18" charset="0"/>
+                        </a:rPr>
+                        <m:t>.</m:t>
+                      </m:r>
                     </m:oMath>
                   </m:oMathPara>
                 </a14:m>
@@ -17384,9 +16328,9 @@
               <p:nvPr/>
             </p:nvSpPr>
             <p:spPr>
-              <a:xfrm rot="5400000">
-                <a:off x="7588989" y="3875124"/>
-                <a:ext cx="811119" cy="276999"/>
+              <a:xfrm>
+                <a:off x="7693750" y="3712703"/>
+                <a:ext cx="632930" cy="276999"/>
               </a:xfrm>
               <a:prstGeom prst="rect">
                 <a:avLst/>
@@ -17394,7 +16338,7 @@
               <a:blipFill>
                 <a:blip r:embed="rId33"/>
                 <a:stretch>
-                  <a:fillRect l="-6667"/>
+                  <a:fillRect/>
                 </a:stretch>
               </a:blipFill>
             </p:spPr>
@@ -17413,6 +16357,233 @@
           </p:sp>
         </mc:Fallback>
       </mc:AlternateContent>
+      <p:sp>
+        <p:nvSpPr>
+          <p:cNvPr id="5" name="Rectangle: Rounded Corners 4">
+            <a:extLst>
+              <a:ext uri="{FF2B5EF4-FFF2-40B4-BE49-F238E27FC236}">
+                <a16:creationId xmlns:a16="http://schemas.microsoft.com/office/drawing/2014/main" id="{75A8F754-9EF2-DF2A-AF09-EDCA812417CC}"/>
+              </a:ext>
+            </a:extLst>
+          </p:cNvPr>
+          <p:cNvSpPr/>
+          <p:nvPr/>
+        </p:nvSpPr>
+        <p:spPr>
+          <a:xfrm>
+            <a:off x="2587355" y="429689"/>
+            <a:ext cx="764284" cy="202869"/>
+          </a:xfrm>
+          <a:prstGeom prst="roundRect">
+            <a:avLst/>
+          </a:prstGeom>
+          <a:solidFill>
+            <a:schemeClr val="accent5">
+              <a:lumMod val="20000"/>
+              <a:lumOff val="80000"/>
+              <a:alpha val="55000"/>
+            </a:schemeClr>
+          </a:solidFill>
+          <a:ln>
+            <a:solidFill>
+              <a:srgbClr val="393333"/>
+            </a:solidFill>
+          </a:ln>
+        </p:spPr>
+        <p:style>
+          <a:lnRef idx="2">
+            <a:schemeClr val="accent1">
+              <a:shade val="15000"/>
+            </a:schemeClr>
+          </a:lnRef>
+          <a:fillRef idx="1">
+            <a:schemeClr val="accent1"/>
+          </a:fillRef>
+          <a:effectRef idx="0">
+            <a:schemeClr val="accent1"/>
+          </a:effectRef>
+          <a:fontRef idx="minor">
+            <a:schemeClr val="lt1"/>
+          </a:fontRef>
+        </p:style>
+        <p:txBody>
+          <a:bodyPr rtlCol="0" anchor="ctr"/>
+          <a:lstStyle/>
+          <a:p>
+            <a:pPr algn="ctr"/>
+            <a:r>
+              <a:rPr lang="en-US" altLang="zh-CN" sz="1200" dirty="0" err="1">
+                <a:solidFill>
+                  <a:schemeClr val="tx1"/>
+                </a:solidFill>
+              </a:rPr>
+              <a:t>Softmax</a:t>
+            </a:r>
+            <a:endParaRPr lang="zh-CN" altLang="en-US" sz="1200" dirty="0">
+              <a:solidFill>
+                <a:schemeClr val="tx1"/>
+              </a:solidFill>
+            </a:endParaRPr>
+          </a:p>
+        </p:txBody>
+      </p:sp>
+      <p:cxnSp>
+        <p:nvCxnSpPr>
+          <p:cNvPr id="10" name="Straight Arrow Connector 9">
+            <a:extLst>
+              <a:ext uri="{FF2B5EF4-FFF2-40B4-BE49-F238E27FC236}">
+                <a16:creationId xmlns:a16="http://schemas.microsoft.com/office/drawing/2014/main" id="{ACAFA4DC-D77D-2FCA-3CB6-B115A5C7DE34}"/>
+              </a:ext>
+            </a:extLst>
+          </p:cNvPr>
+          <p:cNvCxnSpPr>
+            <a:cxnSpLocks/>
+          </p:cNvCxnSpPr>
+          <p:nvPr/>
+        </p:nvCxnSpPr>
+        <p:spPr>
+          <a:xfrm flipV="1">
+            <a:off x="2969140" y="299191"/>
+            <a:ext cx="0" cy="124424"/>
+          </a:xfrm>
+          <a:prstGeom prst="straightConnector1">
+            <a:avLst/>
+          </a:prstGeom>
+          <a:ln>
+            <a:solidFill>
+              <a:schemeClr val="tx1"/>
+            </a:solidFill>
+            <a:tailEnd type="triangle"/>
+          </a:ln>
+        </p:spPr>
+        <p:style>
+          <a:lnRef idx="2">
+            <a:schemeClr val="accent1"/>
+          </a:lnRef>
+          <a:fillRef idx="0">
+            <a:schemeClr val="accent1"/>
+          </a:fillRef>
+          <a:effectRef idx="1">
+            <a:schemeClr val="accent1"/>
+          </a:effectRef>
+          <a:fontRef idx="minor">
+            <a:schemeClr val="tx1"/>
+          </a:fontRef>
+        </p:style>
+      </p:cxnSp>
+      <p:sp>
+        <p:nvSpPr>
+          <p:cNvPr id="13" name="Rectangle: Rounded Corners 12">
+            <a:extLst>
+              <a:ext uri="{FF2B5EF4-FFF2-40B4-BE49-F238E27FC236}">
+                <a16:creationId xmlns:a16="http://schemas.microsoft.com/office/drawing/2014/main" id="{44666D4E-179A-0FE8-FAE4-FF07FB4E5932}"/>
+              </a:ext>
+            </a:extLst>
+          </p:cNvPr>
+          <p:cNvSpPr/>
+          <p:nvPr/>
+        </p:nvSpPr>
+        <p:spPr>
+          <a:xfrm>
+            <a:off x="540543" y="2269360"/>
+            <a:ext cx="1007286" cy="202869"/>
+          </a:xfrm>
+          <a:prstGeom prst="roundRect">
+            <a:avLst/>
+          </a:prstGeom>
+          <a:solidFill>
+            <a:schemeClr val="bg1">
+              <a:lumMod val="95000"/>
+              <a:alpha val="55000"/>
+            </a:schemeClr>
+          </a:solidFill>
+          <a:ln>
+            <a:solidFill>
+              <a:srgbClr val="393333"/>
+            </a:solidFill>
+          </a:ln>
+        </p:spPr>
+        <p:style>
+          <a:lnRef idx="2">
+            <a:schemeClr val="accent1">
+              <a:shade val="15000"/>
+            </a:schemeClr>
+          </a:lnRef>
+          <a:fillRef idx="1">
+            <a:schemeClr val="accent1"/>
+          </a:fillRef>
+          <a:effectRef idx="0">
+            <a:schemeClr val="accent1"/>
+          </a:effectRef>
+          <a:fontRef idx="minor">
+            <a:schemeClr val="lt1"/>
+          </a:fontRef>
+        </p:style>
+        <p:txBody>
+          <a:bodyPr rtlCol="0" anchor="ctr"/>
+          <a:lstStyle/>
+          <a:p>
+            <a:pPr algn="ctr"/>
+            <a:r>
+              <a:rPr lang="en-US" altLang="zh-CN" sz="1200" dirty="0">
+                <a:solidFill>
+                  <a:schemeClr val="tx1"/>
+                </a:solidFill>
+              </a:rPr>
+              <a:t>K-sampling</a:t>
+            </a:r>
+            <a:endParaRPr lang="zh-CN" altLang="en-US" sz="1200" dirty="0">
+              <a:solidFill>
+                <a:schemeClr val="tx1"/>
+              </a:solidFill>
+            </a:endParaRPr>
+          </a:p>
+        </p:txBody>
+      </p:sp>
+      <p:cxnSp>
+        <p:nvCxnSpPr>
+          <p:cNvPr id="15" name="Straight Arrow Connector 14">
+            <a:extLst>
+              <a:ext uri="{FF2B5EF4-FFF2-40B4-BE49-F238E27FC236}">
+                <a16:creationId xmlns:a16="http://schemas.microsoft.com/office/drawing/2014/main" id="{DDC32ED0-8976-983F-6F91-5D68FFDB6D8B}"/>
+              </a:ext>
+            </a:extLst>
+          </p:cNvPr>
+          <p:cNvCxnSpPr>
+            <a:cxnSpLocks/>
+          </p:cNvCxnSpPr>
+          <p:nvPr/>
+        </p:nvCxnSpPr>
+        <p:spPr>
+          <a:xfrm flipV="1">
+            <a:off x="1044186" y="2466913"/>
+            <a:ext cx="0" cy="141256"/>
+          </a:xfrm>
+          <a:prstGeom prst="straightConnector1">
+            <a:avLst/>
+          </a:prstGeom>
+          <a:ln>
+            <a:solidFill>
+              <a:schemeClr val="tx1"/>
+            </a:solidFill>
+            <a:tailEnd type="triangle"/>
+          </a:ln>
+        </p:spPr>
+        <p:style>
+          <a:lnRef idx="2">
+            <a:schemeClr val="accent1"/>
+          </a:lnRef>
+          <a:fillRef idx="0">
+            <a:schemeClr val="accent1"/>
+          </a:fillRef>
+          <a:effectRef idx="1">
+            <a:schemeClr val="accent1"/>
+          </a:effectRef>
+          <a:fontRef idx="minor">
+            <a:schemeClr val="tx1"/>
+          </a:fontRef>
+        </p:style>
+      </p:cxnSp>
     </p:spTree>
     <p:extLst>
       <p:ext uri="{BB962C8B-B14F-4D97-AF65-F5344CB8AC3E}">
@@ -17513,8 +16684,8 @@
           </a:p>
         </p:txBody>
       </p:sp>
-      <mc:AlternateContent xmlns:mc="http://schemas.openxmlformats.org/markup-compatibility/2006">
-        <mc:Choice xmlns:a14="http://schemas.microsoft.com/office/drawing/2010/main" Requires="a14">
+      <mc:AlternateContent xmlns:mc="http://schemas.openxmlformats.org/markup-compatibility/2006" xmlns:a14="http://schemas.microsoft.com/office/drawing/2010/main">
+        <mc:Choice Requires="a14">
           <p:sp>
             <p:nvSpPr>
               <p:cNvPr id="49" name="TextBox 48">
@@ -17565,13 +16736,7 @@
                             <a:rPr lang="en-US" altLang="zh-CN" sz="1400" b="0" i="1" smtClean="0">
                               <a:latin typeface="Cambria Math" panose="02040503050406030204" pitchFamily="18" charset="0"/>
                             </a:rPr>
-                            <m:t>{</m:t>
-                          </m:r>
-                          <m:r>
-                            <a:rPr lang="en-US" altLang="zh-CN" sz="1400" b="0" i="1" smtClean="0">
-                              <a:latin typeface="Cambria Math" panose="02040503050406030204" pitchFamily="18" charset="0"/>
-                            </a:rPr>
-                            <m:t>|</m:t>
+                            <m:t>{|</m:t>
                           </m:r>
                           <m:r>
                             <a:rPr lang="en-US" altLang="zh-CN" sz="1400" b="0" i="1" smtClean="0">
@@ -17626,7 +16791,7 @@
             </p:txBody>
           </p:sp>
         </mc:Choice>
-        <mc:Fallback>
+        <mc:Fallback xmlns="">
           <p:sp>
             <p:nvSpPr>
               <p:cNvPr id="49" name="TextBox 48">
@@ -17839,8 +17004,8 @@
             </p:txBody>
           </p:sp>
         </p:grpSp>
-        <mc:AlternateContent xmlns:mc="http://schemas.openxmlformats.org/markup-compatibility/2006">
-          <mc:Choice xmlns:a14="http://schemas.microsoft.com/office/drawing/2010/main" Requires="a14">
+        <mc:AlternateContent xmlns:mc="http://schemas.openxmlformats.org/markup-compatibility/2006" xmlns:a14="http://schemas.microsoft.com/office/drawing/2010/main">
+          <mc:Choice Requires="a14">
             <p:sp>
               <p:nvSpPr>
                 <p:cNvPr id="493" name="TextBox 492">
@@ -17869,6 +17034,7 @@
                 </a:bodyPr>
                 <a:lstStyle/>
                 <a:p>
+                  <a:pPr/>
                   <a14:m>
                     <m:oMathPara xmlns:m="http://schemas.openxmlformats.org/officeDocument/2006/math">
                       <m:oMathParaPr>
@@ -17921,7 +17087,7 @@
               </p:txBody>
             </p:sp>
           </mc:Choice>
-          <mc:Fallback>
+          <mc:Fallback xmlns="">
             <p:sp>
               <p:nvSpPr>
                 <p:cNvPr id="493" name="TextBox 492">
@@ -18138,8 +17304,8 @@
             </p:txBody>
           </p:sp>
         </p:grpSp>
-        <mc:AlternateContent xmlns:mc="http://schemas.openxmlformats.org/markup-compatibility/2006">
-          <mc:Choice xmlns:a14="http://schemas.microsoft.com/office/drawing/2010/main" Requires="a14">
+        <mc:AlternateContent xmlns:mc="http://schemas.openxmlformats.org/markup-compatibility/2006" xmlns:a14="http://schemas.microsoft.com/office/drawing/2010/main">
+          <mc:Choice Requires="a14">
             <p:sp>
               <p:nvSpPr>
                 <p:cNvPr id="494" name="TextBox 493">
@@ -18168,6 +17334,7 @@
                 </a:bodyPr>
                 <a:lstStyle/>
                 <a:p>
+                  <a:pPr/>
                   <a14:m>
                     <m:oMathPara xmlns:m="http://schemas.openxmlformats.org/officeDocument/2006/math">
                       <m:oMathParaPr>
@@ -18228,7 +17395,7 @@
               </p:txBody>
             </p:sp>
           </mc:Choice>
-          <mc:Fallback>
+          <mc:Fallback xmlns="">
             <p:sp>
               <p:nvSpPr>
                 <p:cNvPr id="494" name="TextBox 493">
@@ -18288,7 +17455,7 @@
         </p:nvSpPr>
         <p:spPr>
           <a:xfrm>
-            <a:off x="1830253" y="1607715"/>
+            <a:off x="1729144" y="1607715"/>
             <a:ext cx="3557433" cy="276999"/>
           </a:xfrm>
           <a:prstGeom prst="rect">
@@ -18307,7 +17474,7 @@
                 <a:latin typeface="Arial" panose="020B0604020202020204" pitchFamily="34" charset="0"/>
                 <a:cs typeface="Arial" panose="020B0604020202020204" pitchFamily="34" charset="0"/>
               </a:rPr>
-              <a:t>(a) Electron-hole pair to Exciton (BSE)</a:t>
+              <a:t>(a) Electron-hole pair to Exciton (Encoder only)</a:t>
             </a:r>
           </a:p>
         </p:txBody>
@@ -18370,7 +17537,7 @@
         </p:nvSpPr>
         <p:spPr>
           <a:xfrm rot="5400000">
-            <a:off x="4537699" y="2370942"/>
+            <a:off x="4893671" y="2370944"/>
             <a:ext cx="968764" cy="358571"/>
           </a:xfrm>
           <a:prstGeom prst="roundRect">
@@ -18441,7 +17608,7 @@
         <p:spPr>
           <a:xfrm>
             <a:off x="4503017" y="2587741"/>
-            <a:ext cx="340446" cy="0"/>
+            <a:ext cx="299074" cy="0"/>
           </a:xfrm>
           <a:prstGeom prst="straightConnector1">
             <a:avLst/>
@@ -18884,8 +18051,8 @@
           </p:txBody>
         </p:sp>
       </p:grpSp>
-      <mc:AlternateContent xmlns:mc="http://schemas.openxmlformats.org/markup-compatibility/2006">
-        <mc:Choice xmlns:a14="http://schemas.microsoft.com/office/drawing/2010/main" Requires="a14">
+      <mc:AlternateContent xmlns:mc="http://schemas.openxmlformats.org/markup-compatibility/2006" xmlns:a14="http://schemas.microsoft.com/office/drawing/2010/main">
+        <mc:Choice Requires="a14">
           <p:sp>
             <p:nvSpPr>
               <p:cNvPr id="83" name="TextBox 82">
@@ -18951,16 +18118,7 @@
                               </a:solidFill>
                               <a:latin typeface="Cambria Math" panose="02040503050406030204" pitchFamily="18" charset="0"/>
                             </a:rPr>
-                            <m:t>𝑐</m:t>
-                          </m:r>
-                          <m:r>
-                            <a:rPr lang="en-US" altLang="zh-CN" sz="1400" b="0" i="1" dirty="0" smtClean="0">
-                              <a:solidFill>
-                                <a:srgbClr val="C00000"/>
-                              </a:solidFill>
-                              <a:latin typeface="Cambria Math" panose="02040503050406030204" pitchFamily="18" charset="0"/>
-                            </a:rPr>
-                            <m:t>𝑘</m:t>
+                            <m:t>𝑐𝑘</m:t>
                           </m:r>
                         </m:sub>
                         <m:sup>
@@ -18987,7 +18145,7 @@
             </p:txBody>
           </p:sp>
         </mc:Choice>
-        <mc:Fallback>
+        <mc:Fallback xmlns="">
           <p:sp>
             <p:nvSpPr>
               <p:cNvPr id="83" name="TextBox 82">
@@ -19032,8 +18190,8 @@
           </p:sp>
         </mc:Fallback>
       </mc:AlternateContent>
-      <mc:AlternateContent xmlns:mc="http://schemas.openxmlformats.org/markup-compatibility/2006">
-        <mc:Choice xmlns:a14="http://schemas.microsoft.com/office/drawing/2010/main" Requires="a14">
+      <mc:AlternateContent xmlns:mc="http://schemas.openxmlformats.org/markup-compatibility/2006" xmlns:a14="http://schemas.microsoft.com/office/drawing/2010/main">
+        <mc:Choice Requires="a14">
           <p:sp>
             <p:nvSpPr>
               <p:cNvPr id="84" name="TextBox 83">
@@ -19099,16 +18257,7 @@
                               </a:solidFill>
                               <a:latin typeface="Cambria Math" panose="02040503050406030204" pitchFamily="18" charset="0"/>
                             </a:rPr>
-                            <m:t>𝑣</m:t>
-                          </m:r>
-                          <m:r>
-                            <a:rPr lang="en-US" altLang="zh-CN" sz="1400" b="0" i="1" dirty="0" smtClean="0">
-                              <a:solidFill>
-                                <a:srgbClr val="104862"/>
-                              </a:solidFill>
-                              <a:latin typeface="Cambria Math" panose="02040503050406030204" pitchFamily="18" charset="0"/>
-                            </a:rPr>
-                            <m:t>𝑘</m:t>
+                            <m:t>𝑣𝑘</m:t>
                           </m:r>
                         </m:sub>
                         <m:sup>
@@ -19135,7 +18284,7 @@
             </p:txBody>
           </p:sp>
         </mc:Choice>
-        <mc:Fallback>
+        <mc:Fallback xmlns="">
           <p:sp>
             <p:nvSpPr>
               <p:cNvPr id="84" name="TextBox 83">
@@ -19616,8 +18765,8 @@
           </p:sp>
         </p:grpSp>
       </p:grpSp>
-      <mc:AlternateContent xmlns:mc="http://schemas.openxmlformats.org/markup-compatibility/2006">
-        <mc:Choice xmlns:a14="http://schemas.microsoft.com/office/drawing/2010/main" Requires="a14">
+      <mc:AlternateContent xmlns:mc="http://schemas.openxmlformats.org/markup-compatibility/2006" xmlns:a14="http://schemas.microsoft.com/office/drawing/2010/main">
+        <mc:Choice Requires="a14">
           <p:sp>
             <p:nvSpPr>
               <p:cNvPr id="124" name="TextBox 123">
@@ -19706,7 +18855,7 @@
             </p:txBody>
           </p:sp>
         </mc:Choice>
-        <mc:Fallback>
+        <mc:Fallback xmlns="">
           <p:sp>
             <p:nvSpPr>
               <p:cNvPr id="124" name="TextBox 123">
@@ -19809,14 +18958,14 @@
         </p:nvGrpSpPr>
         <p:grpSpPr>
           <a:xfrm>
-            <a:off x="5607988" y="2427698"/>
+            <a:off x="5963960" y="2427700"/>
             <a:ext cx="886103" cy="854321"/>
             <a:chOff x="4810850" y="3727015"/>
             <a:chExt cx="994873" cy="959190"/>
           </a:xfrm>
         </p:grpSpPr>
-        <mc:AlternateContent xmlns:mc="http://schemas.openxmlformats.org/markup-compatibility/2006">
-          <mc:Choice xmlns:a14="http://schemas.microsoft.com/office/drawing/2010/main" Requires="a14">
+        <mc:AlternateContent xmlns:mc="http://schemas.openxmlformats.org/markup-compatibility/2006" xmlns:a14="http://schemas.microsoft.com/office/drawing/2010/main">
+          <mc:Choice Requires="a14">
             <p:sp>
               <p:nvSpPr>
                 <p:cNvPr id="11" name="TextBox 10">
@@ -19911,7 +19060,7 @@
               </p:txBody>
             </p:sp>
           </mc:Choice>
-          <mc:Fallback>
+          <mc:Fallback xmlns="">
             <p:sp>
               <p:nvSpPr>
                 <p:cNvPr id="11" name="TextBox 10">
@@ -20275,8 +19424,8 @@
               </p:txBody>
             </p:sp>
           </p:grpSp>
-          <mc:AlternateContent xmlns:mc="http://schemas.openxmlformats.org/markup-compatibility/2006">
-            <mc:Choice xmlns:a14="http://schemas.microsoft.com/office/drawing/2010/main" Requires="a14">
+          <mc:AlternateContent xmlns:mc="http://schemas.openxmlformats.org/markup-compatibility/2006" xmlns:a14="http://schemas.microsoft.com/office/drawing/2010/main">
+            <mc:Choice Requires="a14">
               <p:sp>
                 <p:nvSpPr>
                   <p:cNvPr id="15" name="TextBox 14">
@@ -20305,6 +19454,7 @@
                   </a:bodyPr>
                   <a:lstStyle/>
                   <a:p>
+                    <a:pPr/>
                     <a14:m>
                       <m:oMathPara xmlns:m="http://schemas.openxmlformats.org/officeDocument/2006/math">
                         <m:oMathParaPr>
@@ -20357,7 +19507,7 @@
                 </p:txBody>
               </p:sp>
             </mc:Choice>
-            <mc:Fallback>
+            <mc:Fallback xmlns="">
               <p:sp>
                 <p:nvSpPr>
                   <p:cNvPr id="15" name="TextBox 14">
@@ -20402,8 +19552,8 @@
               </p:sp>
             </mc:Fallback>
           </mc:AlternateContent>
-          <mc:AlternateContent xmlns:mc="http://schemas.openxmlformats.org/markup-compatibility/2006">
-            <mc:Choice xmlns:a14="http://schemas.microsoft.com/office/drawing/2010/main" Requires="a14">
+          <mc:AlternateContent xmlns:mc="http://schemas.openxmlformats.org/markup-compatibility/2006" xmlns:a14="http://schemas.microsoft.com/office/drawing/2010/main">
+            <mc:Choice Requires="a14">
               <p:sp>
                 <p:nvSpPr>
                   <p:cNvPr id="16" name="TextBox 15">
@@ -20432,6 +19582,7 @@
                   </a:bodyPr>
                   <a:lstStyle/>
                   <a:p>
+                    <a:pPr/>
                     <a14:m>
                       <m:oMathPara xmlns:m="http://schemas.openxmlformats.org/officeDocument/2006/math">
                         <m:oMathParaPr>
@@ -20492,7 +19643,7 @@
                 </p:txBody>
               </p:sp>
             </mc:Choice>
-            <mc:Fallback>
+            <mc:Fallback xmlns="">
               <p:sp>
                 <p:nvSpPr>
                   <p:cNvPr id="16" name="TextBox 15">
@@ -20881,7 +20032,7 @@
             </p:nvSpPr>
             <p:spPr>
               <a:xfrm>
-                <a:off x="5761586" y="2115099"/>
+                <a:off x="6117558" y="2115101"/>
                 <a:ext cx="397288" cy="276999"/>
               </a:xfrm>
               <a:prstGeom prst="rect">
@@ -20895,6 +20046,7 @@
               </a:bodyPr>
               <a:lstStyle/>
               <a:p>
+                <a:pPr/>
                 <a14:m>
                   <m:oMathPara xmlns:m="http://schemas.openxmlformats.org/officeDocument/2006/math">
                     <m:oMathParaPr>
@@ -20955,7 +20107,7 @@
             </p:nvSpPr>
             <p:spPr>
               <a:xfrm>
-                <a:off x="5761586" y="2115099"/>
+                <a:off x="6117558" y="2115101"/>
                 <a:ext cx="397288" cy="276999"/>
               </a:xfrm>
               <a:prstGeom prst="rect">
@@ -20999,7 +20151,7 @@
         </p:nvCxnSpPr>
         <p:spPr>
           <a:xfrm flipV="1">
-            <a:off x="5208932" y="2893623"/>
+            <a:off x="5564904" y="2893625"/>
             <a:ext cx="372557" cy="5109"/>
           </a:xfrm>
           <a:prstGeom prst="straightConnector1">
@@ -21043,7 +20195,7 @@
         </p:nvCxnSpPr>
         <p:spPr>
           <a:xfrm>
-            <a:off x="5208932" y="2274327"/>
+            <a:off x="5564904" y="2274329"/>
             <a:ext cx="197138" cy="0"/>
           </a:xfrm>
           <a:prstGeom prst="straightConnector1">
@@ -21085,7 +20237,7 @@
         </p:nvSpPr>
         <p:spPr>
           <a:xfrm rot="5400000">
-            <a:off x="5220270" y="2033116"/>
+            <a:off x="5576242" y="2033118"/>
             <a:ext cx="625327" cy="227204"/>
           </a:xfrm>
           <a:prstGeom prst="roundRect">
@@ -21153,7 +20305,7 @@
         </p:nvCxnSpPr>
         <p:spPr>
           <a:xfrm>
-            <a:off x="5666237" y="2285477"/>
+            <a:off x="6022209" y="2285479"/>
             <a:ext cx="190699" cy="0"/>
           </a:xfrm>
           <a:prstGeom prst="straightConnector1">
@@ -21181,8 +20333,8 @@
           </a:fontRef>
         </p:style>
       </p:cxnSp>
-      <mc:AlternateContent xmlns:mc="http://schemas.openxmlformats.org/markup-compatibility/2006">
-        <mc:Choice xmlns:a14="http://schemas.microsoft.com/office/drawing/2010/main" Requires="a14">
+      <mc:AlternateContent xmlns:mc="http://schemas.openxmlformats.org/markup-compatibility/2006" xmlns:a14="http://schemas.microsoft.com/office/drawing/2010/main">
+        <mc:Choice Requires="a14">
           <p:sp>
             <p:nvSpPr>
               <p:cNvPr id="46" name="TextBox 45">
@@ -21233,13 +20385,7 @@
                             <a:rPr lang="en-US" altLang="zh-CN" sz="1400" b="0" i="1" smtClean="0">
                               <a:latin typeface="Cambria Math" panose="02040503050406030204" pitchFamily="18" charset="0"/>
                             </a:rPr>
-                            <m:t>{</m:t>
-                          </m:r>
-                          <m:r>
-                            <a:rPr lang="en-US" altLang="zh-CN" sz="1400" b="0" i="1" smtClean="0">
-                              <a:latin typeface="Cambria Math" panose="02040503050406030204" pitchFamily="18" charset="0"/>
-                            </a:rPr>
-                            <m:t>|</m:t>
+                            <m:t>{|</m:t>
                           </m:r>
                           <m:r>
                             <a:rPr lang="en-US" altLang="zh-CN" sz="1400" b="0" i="1" smtClean="0">
@@ -21263,7 +20409,7 @@
             </p:txBody>
           </p:sp>
         </mc:Choice>
-        <mc:Fallback>
+        <mc:Fallback xmlns="">
           <p:sp>
             <p:nvSpPr>
               <p:cNvPr id="46" name="TextBox 45">
@@ -21475,8 +20621,8 @@
         </p:nvSpPr>
         <p:spPr>
           <a:xfrm>
-            <a:off x="1726554" y="4049580"/>
-            <a:ext cx="2915685" cy="276999"/>
+            <a:off x="1656339" y="4113114"/>
+            <a:ext cx="3630238" cy="276999"/>
           </a:xfrm>
           <a:prstGeom prst="rect">
             <a:avLst/>
@@ -21494,35 +20640,7 @@
                 <a:latin typeface="Arial" panose="020B0604020202020204" pitchFamily="34" charset="0"/>
                 <a:cs typeface="Arial" panose="020B0604020202020204" pitchFamily="34" charset="0"/>
               </a:rPr>
-              <a:t>(a) Electron-Electron Interaction (G</a:t>
-            </a:r>
-            <a:r>
-              <a:rPr lang="en-US" altLang="zh-CN" sz="1200" baseline="-25000" dirty="0">
-                <a:latin typeface="Arial" panose="020B0604020202020204" pitchFamily="34" charset="0"/>
-                <a:cs typeface="Arial" panose="020B0604020202020204" pitchFamily="34" charset="0"/>
-              </a:rPr>
-              <a:t>0</a:t>
-            </a:r>
-            <a:r>
-              <a:rPr lang="en-US" altLang="zh-CN" sz="1200" dirty="0">
-                <a:latin typeface="Arial" panose="020B0604020202020204" pitchFamily="34" charset="0"/>
-                <a:cs typeface="Arial" panose="020B0604020202020204" pitchFamily="34" charset="0"/>
-              </a:rPr>
-              <a:t>W</a:t>
-            </a:r>
-            <a:r>
-              <a:rPr lang="en-US" altLang="zh-CN" sz="1200" baseline="-25000" dirty="0">
-                <a:latin typeface="Arial" panose="020B0604020202020204" pitchFamily="34" charset="0"/>
-                <a:cs typeface="Arial" panose="020B0604020202020204" pitchFamily="34" charset="0"/>
-              </a:rPr>
-              <a:t>0</a:t>
-            </a:r>
-            <a:r>
-              <a:rPr lang="en-US" altLang="zh-CN" sz="1200" dirty="0">
-                <a:latin typeface="Arial" panose="020B0604020202020204" pitchFamily="34" charset="0"/>
-                <a:cs typeface="Arial" panose="020B0604020202020204" pitchFamily="34" charset="0"/>
-              </a:rPr>
-              <a:t>)</a:t>
+              <a:t>(a) Electron-Electron Interaction (Encoder-Decoder)</a:t>
             </a:r>
           </a:p>
         </p:txBody>
@@ -21587,7 +20705,7 @@
             </p:nvSpPr>
             <p:spPr>
               <a:xfrm>
-                <a:off x="2838274" y="4463728"/>
+                <a:off x="2859568" y="4437550"/>
                 <a:ext cx="446948" cy="312586"/>
               </a:xfrm>
               <a:prstGeom prst="rect">
@@ -21700,7 +20818,7 @@
             </p:nvSpPr>
             <p:spPr>
               <a:xfrm>
-                <a:off x="2838274" y="4463728"/>
+                <a:off x="2859568" y="4437550"/>
                 <a:ext cx="446948" cy="312586"/>
               </a:xfrm>
               <a:prstGeom prst="rect">
@@ -21709,7 +20827,7 @@
               <a:blipFill>
                 <a:blip r:embed="rId13"/>
                 <a:stretch>
-                  <a:fillRect r="-30137" b="-5769"/>
+                  <a:fillRect r="-30137" b="-5882"/>
                 </a:stretch>
               </a:blipFill>
             </p:spPr>
@@ -21892,7 +21010,7 @@
             </p:nvSpPr>
             <p:spPr>
               <a:xfrm>
-                <a:off x="4686478" y="4759816"/>
+                <a:off x="5260591" y="4759818"/>
                 <a:ext cx="593496" cy="303160"/>
               </a:xfrm>
               <a:prstGeom prst="rect">
@@ -21906,6 +21024,7 @@
               </a:bodyPr>
               <a:lstStyle/>
               <a:p>
+                <a:pPr/>
                 <a14:m>
                   <m:oMathPara xmlns:m="http://schemas.openxmlformats.org/officeDocument/2006/math">
                     <m:oMathParaPr>
@@ -21998,7 +21117,7 @@
             </p:nvSpPr>
             <p:spPr>
               <a:xfrm>
-                <a:off x="4686478" y="4759816"/>
+                <a:off x="5260591" y="4759818"/>
                 <a:ext cx="593496" cy="303160"/>
               </a:xfrm>
               <a:prstGeom prst="rect">
@@ -22042,7 +21161,7 @@
         </p:nvCxnSpPr>
         <p:spPr>
           <a:xfrm>
-            <a:off x="4148177" y="4928932"/>
+            <a:off x="4741751" y="4928935"/>
             <a:ext cx="197138" cy="0"/>
           </a:xfrm>
           <a:prstGeom prst="straightConnector1">
@@ -22084,7 +21203,7 @@
         </p:nvSpPr>
         <p:spPr>
           <a:xfrm rot="5400000">
-            <a:off x="4146253" y="4800619"/>
+            <a:off x="4739827" y="4800622"/>
             <a:ext cx="625327" cy="227204"/>
           </a:xfrm>
           <a:prstGeom prst="roundRect">
@@ -22152,7 +21271,7 @@
         </p:nvCxnSpPr>
         <p:spPr>
           <a:xfrm>
-            <a:off x="4572519" y="4928932"/>
+            <a:off x="5166093" y="4928935"/>
             <a:ext cx="190699" cy="0"/>
           </a:xfrm>
           <a:prstGeom prst="straightConnector1">
@@ -22377,10 +21496,10 @@
         </p:nvGrpSpPr>
         <p:grpSpPr>
           <a:xfrm>
-            <a:off x="3186046" y="4931115"/>
-            <a:ext cx="576340" cy="349785"/>
+            <a:off x="3186044" y="4931124"/>
+            <a:ext cx="1194369" cy="534865"/>
             <a:chOff x="4416535" y="5259770"/>
-            <a:chExt cx="340446" cy="349785"/>
+            <a:chExt cx="705518" cy="349782"/>
           </a:xfrm>
         </p:grpSpPr>
         <p:cxnSp>
@@ -22400,7 +21519,7 @@
           <p:spPr>
             <a:xfrm>
               <a:off x="4416535" y="5259770"/>
-              <a:ext cx="340446" cy="0"/>
+              <a:ext cx="705518" cy="0"/>
             </a:xfrm>
             <a:prstGeom prst="straightConnector1">
               <a:avLst/>
@@ -22441,7 +21560,7 @@
           </p:nvSpPr>
           <p:spPr>
             <a:xfrm rot="5400000">
-              <a:off x="4484092" y="5336666"/>
+              <a:off x="4484090" y="5336663"/>
               <a:ext cx="349659" cy="196119"/>
             </a:xfrm>
             <a:custGeom>
@@ -22560,7 +21679,7 @@
             <a:noFill/>
             <a:ln>
               <a:headEnd type="triangle"/>
-              <a:tailEnd type="triangle"/>
+              <a:tailEnd type="none"/>
             </a:ln>
           </p:spPr>
           <p:style>
@@ -22603,7 +21722,7 @@
         </p:nvSpPr>
         <p:spPr>
           <a:xfrm>
-            <a:off x="3133936" y="4672244"/>
+            <a:off x="3507861" y="4647813"/>
             <a:ext cx="696024" cy="276999"/>
           </a:xfrm>
           <a:prstGeom prst="rect">
@@ -22639,7 +21758,7 @@
         </p:nvSpPr>
         <p:spPr>
           <a:xfrm>
-            <a:off x="3045747" y="5246538"/>
+            <a:off x="2992496" y="5434495"/>
             <a:ext cx="792205" cy="276999"/>
           </a:xfrm>
           <a:prstGeom prst="rect">
@@ -22675,7 +21794,7 @@
         </p:nvSpPr>
         <p:spPr>
           <a:xfrm rot="5400000">
-            <a:off x="3464486" y="4883691"/>
+            <a:off x="4079091" y="4883694"/>
             <a:ext cx="968764" cy="358571"/>
           </a:xfrm>
           <a:prstGeom prst="roundRect">
@@ -22729,6 +21848,226 @@
           </a:p>
         </p:txBody>
       </p:sp>
+      <p:sp>
+        <p:nvSpPr>
+          <p:cNvPr id="2" name="Rectangle: Rounded Corners 1">
+            <a:extLst>
+              <a:ext uri="{FF2B5EF4-FFF2-40B4-BE49-F238E27FC236}">
+                <a16:creationId xmlns:a16="http://schemas.microsoft.com/office/drawing/2014/main" id="{F8CB31D1-5317-8697-4DBD-98BFFB12F711}"/>
+              </a:ext>
+            </a:extLst>
+          </p:cNvPr>
+          <p:cNvSpPr/>
+          <p:nvPr/>
+        </p:nvSpPr>
+        <p:spPr>
+          <a:xfrm rot="5400000">
+            <a:off x="4434933" y="2467299"/>
+            <a:ext cx="968765" cy="227204"/>
+          </a:xfrm>
+          <a:prstGeom prst="roundRect">
+            <a:avLst/>
+          </a:prstGeom>
+          <a:solidFill>
+            <a:srgbClr val="F8F8F8"/>
+          </a:solidFill>
+          <a:ln>
+            <a:solidFill>
+              <a:srgbClr val="393333"/>
+            </a:solidFill>
+          </a:ln>
+        </p:spPr>
+        <p:style>
+          <a:lnRef idx="2">
+            <a:schemeClr val="accent1">
+              <a:shade val="15000"/>
+            </a:schemeClr>
+          </a:lnRef>
+          <a:fillRef idx="1">
+            <a:schemeClr val="accent1"/>
+          </a:fillRef>
+          <a:effectRef idx="0">
+            <a:schemeClr val="accent1"/>
+          </a:effectRef>
+          <a:fontRef idx="minor">
+            <a:schemeClr val="lt1"/>
+          </a:fontRef>
+        </p:style>
+        <p:txBody>
+          <a:bodyPr rtlCol="0" anchor="ctr"/>
+          <a:lstStyle/>
+          <a:p>
+            <a:pPr algn="ctr"/>
+            <a:r>
+              <a:rPr lang="en-US" altLang="zh-CN" sz="1200" dirty="0">
+                <a:solidFill>
+                  <a:schemeClr val="tx1"/>
+                </a:solidFill>
+              </a:rPr>
+              <a:t>K-sampling</a:t>
+            </a:r>
+            <a:endParaRPr lang="zh-CN" altLang="en-US" sz="1200" dirty="0">
+              <a:solidFill>
+                <a:schemeClr val="tx1"/>
+              </a:solidFill>
+            </a:endParaRPr>
+          </a:p>
+        </p:txBody>
+      </p:sp>
+      <p:cxnSp>
+        <p:nvCxnSpPr>
+          <p:cNvPr id="3" name="Straight Arrow Connector 2">
+            <a:extLst>
+              <a:ext uri="{FF2B5EF4-FFF2-40B4-BE49-F238E27FC236}">
+                <a16:creationId xmlns:a16="http://schemas.microsoft.com/office/drawing/2014/main" id="{463EAE0B-03B9-7301-19E2-2562E28916D0}"/>
+              </a:ext>
+            </a:extLst>
+          </p:cNvPr>
+          <p:cNvCxnSpPr>
+            <a:cxnSpLocks/>
+          </p:cNvCxnSpPr>
+          <p:nvPr/>
+        </p:nvCxnSpPr>
+        <p:spPr>
+          <a:xfrm>
+            <a:off x="5032918" y="2587741"/>
+            <a:ext cx="167222" cy="0"/>
+          </a:xfrm>
+          <a:prstGeom prst="straightConnector1">
+            <a:avLst/>
+          </a:prstGeom>
+          <a:ln>
+            <a:solidFill>
+              <a:schemeClr val="tx1"/>
+            </a:solidFill>
+            <a:tailEnd type="triangle"/>
+          </a:ln>
+        </p:spPr>
+        <p:style>
+          <a:lnRef idx="2">
+            <a:schemeClr val="accent1"/>
+          </a:lnRef>
+          <a:fillRef idx="0">
+            <a:schemeClr val="accent1"/>
+          </a:fillRef>
+          <a:effectRef idx="1">
+            <a:schemeClr val="accent1"/>
+          </a:effectRef>
+          <a:fontRef idx="minor">
+            <a:schemeClr val="tx1"/>
+          </a:fontRef>
+        </p:style>
+      </p:cxnSp>
+      <p:sp>
+        <p:nvSpPr>
+          <p:cNvPr id="33" name="Rectangle: Rounded Corners 32">
+            <a:extLst>
+              <a:ext uri="{FF2B5EF4-FFF2-40B4-BE49-F238E27FC236}">
+                <a16:creationId xmlns:a16="http://schemas.microsoft.com/office/drawing/2014/main" id="{586F083E-EC33-A9D3-78E7-C68056DAAE93}"/>
+              </a:ext>
+            </a:extLst>
+          </p:cNvPr>
+          <p:cNvSpPr/>
+          <p:nvPr/>
+        </p:nvSpPr>
+        <p:spPr>
+          <a:xfrm rot="5400000">
+            <a:off x="3539336" y="5216609"/>
+            <a:ext cx="846644" cy="400544"/>
+          </a:xfrm>
+          <a:prstGeom prst="roundRect">
+            <a:avLst/>
+          </a:prstGeom>
+          <a:solidFill>
+            <a:srgbClr val="F8F8F8"/>
+          </a:solidFill>
+          <a:ln>
+            <a:solidFill>
+              <a:srgbClr val="393333"/>
+            </a:solidFill>
+          </a:ln>
+        </p:spPr>
+        <p:style>
+          <a:lnRef idx="2">
+            <a:schemeClr val="accent1">
+              <a:shade val="15000"/>
+            </a:schemeClr>
+          </a:lnRef>
+          <a:fillRef idx="1">
+            <a:schemeClr val="accent1"/>
+          </a:fillRef>
+          <a:effectRef idx="0">
+            <a:schemeClr val="accent1"/>
+          </a:effectRef>
+          <a:fontRef idx="minor">
+            <a:schemeClr val="lt1"/>
+          </a:fontRef>
+        </p:style>
+        <p:txBody>
+          <a:bodyPr rtlCol="0" anchor="ctr"/>
+          <a:lstStyle/>
+          <a:p>
+            <a:pPr algn="ctr"/>
+            <a:r>
+              <a:rPr lang="en-US" altLang="zh-CN" sz="1200" dirty="0">
+                <a:solidFill>
+                  <a:schemeClr val="tx1"/>
+                </a:solidFill>
+              </a:rPr>
+              <a:t>K-sampling</a:t>
+            </a:r>
+            <a:endParaRPr lang="zh-CN" altLang="en-US" sz="1200" dirty="0">
+              <a:solidFill>
+                <a:schemeClr val="tx1"/>
+              </a:solidFill>
+            </a:endParaRPr>
+          </a:p>
+        </p:txBody>
+      </p:sp>
+      <p:cxnSp>
+        <p:nvCxnSpPr>
+          <p:cNvPr id="40" name="Straight Arrow Connector 39">
+            <a:extLst>
+              <a:ext uri="{FF2B5EF4-FFF2-40B4-BE49-F238E27FC236}">
+                <a16:creationId xmlns:a16="http://schemas.microsoft.com/office/drawing/2014/main" id="{BAAF43F5-1AC0-E23D-2742-D1182BF5D4F2}"/>
+              </a:ext>
+            </a:extLst>
+          </p:cNvPr>
+          <p:cNvCxnSpPr>
+            <a:cxnSpLocks/>
+          </p:cNvCxnSpPr>
+          <p:nvPr/>
+        </p:nvCxnSpPr>
+        <p:spPr>
+          <a:xfrm>
+            <a:off x="4162930" y="5450901"/>
+            <a:ext cx="217487" cy="0"/>
+          </a:xfrm>
+          <a:prstGeom prst="straightConnector1">
+            <a:avLst/>
+          </a:prstGeom>
+          <a:ln>
+            <a:solidFill>
+              <a:schemeClr val="tx1"/>
+            </a:solidFill>
+            <a:tailEnd type="triangle"/>
+          </a:ln>
+        </p:spPr>
+        <p:style>
+          <a:lnRef idx="2">
+            <a:schemeClr val="accent1"/>
+          </a:lnRef>
+          <a:fillRef idx="0">
+            <a:schemeClr val="accent1"/>
+          </a:fillRef>
+          <a:effectRef idx="1">
+            <a:schemeClr val="accent1"/>
+          </a:effectRef>
+          <a:fontRef idx="minor">
+            <a:schemeClr val="tx1"/>
+          </a:fontRef>
+        </p:style>
+      </p:cxnSp>
     </p:spTree>
     <p:extLst>
       <p:ext uri="{BB962C8B-B14F-4D97-AF65-F5344CB8AC3E}">
